--- a/03.Langchain_Prompt_Template/Deck1_Slides01-10_Temperature_Prompts_Basics.pptx
+++ b/03.Langchain_Prompt_Template/Deck1_Slides01-10_Temperature_Prompts_Basics.pptx
@@ -69,20 +69,29 @@
             <a:noAutofit/>
           </a:bodyPr>
           <a:p>
-            <a:r>
-              <a:rPr b="0" lang="en-IN" sz="1800" spc="-1" strike="noStrike">
-                <a:solidFill>
-                  <a:srgbClr val="000000"/>
-                </a:solidFill>
-                <a:latin typeface="Calibri"/>
-              </a:rPr>
-              <a:t>Click to move the slide</a:t>
-            </a:r>
-            <a:endParaRPr b="0" lang="en-IN" sz="1800" spc="-1" strike="noStrike">
-              <a:solidFill>
-                <a:srgbClr val="000000"/>
-              </a:solidFill>
-              <a:latin typeface="Calibri"/>
+            <a:pPr algn="ctr">
+              <a:buNone/>
+            </a:pPr>
+            <a:r>
+              <a:rPr b="0" lang="en-IN" sz="4400" spc="-1" strike="noStrike">
+                <a:latin typeface="Arial"/>
+              </a:rPr>
+              <a:t>Click to </a:t>
+            </a:r>
+            <a:r>
+              <a:rPr b="0" lang="en-IN" sz="4400" spc="-1" strike="noStrike">
+                <a:latin typeface="Arial"/>
+              </a:rPr>
+              <a:t>move </a:t>
+            </a:r>
+            <a:r>
+              <a:rPr b="0" lang="en-IN" sz="4400" spc="-1" strike="noStrike">
+                <a:latin typeface="Arial"/>
+              </a:rPr>
+              <a:t>the slide</a:t>
+            </a:r>
+            <a:endParaRPr b="0" lang="en-IN" sz="4400" spc="-1" strike="noStrike">
+              <a:latin typeface="Arial"/>
             </a:endParaRPr>
           </a:p>
         </p:txBody>
@@ -119,7 +128,13 @@
               <a:rPr b="0" lang="en-IN" sz="2000" spc="-1" strike="noStrike">
                 <a:latin typeface="Arial"/>
               </a:rPr>
-              <a:t>Click to edit the notes format</a:t>
+              <a:t>Click to edit the </a:t>
+            </a:r>
+            <a:r>
+              <a:rPr b="0" lang="en-IN" sz="2000" spc="-1" strike="noStrike">
+                <a:latin typeface="Arial"/>
+              </a:rPr>
+              <a:t>notes format</a:t>
             </a:r>
             <a:endParaRPr b="0" lang="en-IN" sz="2000" spc="-1" strike="noStrike">
               <a:latin typeface="Arial"/>
@@ -304,7 +319,7 @@
             <a:pPr algn="r">
               <a:buNone/>
             </a:pPr>
-            <a:fld id="{1A2C1536-6E9F-4D83-B5FF-3B9FDF9834B1}" type="slidenum">
+            <a:fld id="{075E2B8B-7607-4FC6-917B-8CFA47083F9F}" type="slidenum">
               <a:rPr b="0" lang="en-IN" sz="1400" spc="-1" strike="noStrike">
                 <a:latin typeface="Times New Roman"/>
               </a:rPr>
@@ -341,7 +356,7 @@
       </p:grpSpPr>
       <p:sp>
         <p:nvSpPr>
-          <p:cNvPr id="282" name="PlaceHolder 1"/>
+          <p:cNvPr id="281" name="PlaceHolder 1"/>
           <p:cNvSpPr>
             <a:spLocks noGrp="1"/>
           </p:cNvSpPr>
@@ -352,19 +367,19 @@
         <p:spPr>
           <a:xfrm>
             <a:off x="685800" y="1143000"/>
-            <a:ext cx="5486040" cy="3085920"/>
-          </a:xfrm>
-          <a:prstGeom prst="rect">
-            <a:avLst/>
-          </a:prstGeom>
-          <a:ln w="0">
-            <a:noFill/>
-          </a:ln>
-        </p:spPr>
-      </p:sp>
-      <p:sp>
-        <p:nvSpPr>
-          <p:cNvPr id="283" name="PlaceHolder 2"/>
+            <a:ext cx="5485680" cy="3085560"/>
+          </a:xfrm>
+          <a:prstGeom prst="rect">
+            <a:avLst/>
+          </a:prstGeom>
+          <a:ln w="0">
+            <a:noFill/>
+          </a:ln>
+        </p:spPr>
+      </p:sp>
+      <p:sp>
+        <p:nvSpPr>
+          <p:cNvPr id="282" name="PlaceHolder 2"/>
           <p:cNvSpPr>
             <a:spLocks noGrp="1"/>
           </p:cNvSpPr>
@@ -375,18 +390,18 @@
         <p:spPr>
           <a:xfrm>
             <a:off x="685800" y="4400640"/>
-            <a:ext cx="5486040" cy="3600000"/>
-          </a:xfrm>
-          <a:prstGeom prst="rect">
-            <a:avLst/>
-          </a:prstGeom>
-          <a:noFill/>
-          <a:ln w="0">
-            <a:noFill/>
-          </a:ln>
-        </p:spPr>
-        <p:txBody>
-          <a:bodyPr anchor="t">
+            <a:ext cx="5485680" cy="3599640"/>
+          </a:xfrm>
+          <a:prstGeom prst="rect">
+            <a:avLst/>
+          </a:prstGeom>
+          <a:noFill/>
+          <a:ln w="0">
+            <a:noFill/>
+          </a:ln>
+        </p:spPr>
+        <p:txBody>
+          <a:bodyPr lIns="0" rIns="0" tIns="0" bIns="0" anchor="t">
             <a:noAutofit/>
           </a:bodyPr>
           <a:p>
@@ -398,7 +413,7 @@
       </p:sp>
       <p:sp>
         <p:nvSpPr>
-          <p:cNvPr id="284" name="PlaceHolder 3"/>
+          <p:cNvPr id="283" name="PlaceHolder 3"/>
           <p:cNvSpPr>
             <a:spLocks noGrp="1"/>
           </p:cNvSpPr>
@@ -409,18 +424,18 @@
         <p:spPr>
           <a:xfrm>
             <a:off x="3884760" y="8685360"/>
-            <a:ext cx="2971440" cy="458280"/>
-          </a:xfrm>
-          <a:prstGeom prst="rect">
-            <a:avLst/>
-          </a:prstGeom>
-          <a:noFill/>
-          <a:ln w="0">
-            <a:noFill/>
-          </a:ln>
-        </p:spPr>
-        <p:txBody>
-          <a:bodyPr anchor="b">
+            <a:ext cx="2971080" cy="457920"/>
+          </a:xfrm>
+          <a:prstGeom prst="rect">
+            <a:avLst/>
+          </a:prstGeom>
+          <a:noFill/>
+          <a:ln w="0">
+            <a:noFill/>
+          </a:ln>
+        </p:spPr>
+        <p:txBody>
+          <a:bodyPr lIns="0" rIns="0" tIns="0" bIns="0" anchor="b">
             <a:noAutofit/>
           </a:bodyPr>
           <a:lstStyle>
@@ -445,7 +460,7 @@
               </a:lnSpc>
               <a:buNone/>
             </a:pPr>
-            <a:fld id="{F3946924-DFA6-46A5-90AE-9230189BD7E6}" type="slidenum">
+            <a:fld id="{BF2A02A1-FB28-4D45-9F45-D8C158AE119E}" type="slidenum">
               <a:rPr b="0" lang="en-US" sz="1200" spc="-1" strike="noStrike">
                 <a:solidFill>
                   <a:srgbClr val="000000"/>
@@ -485,7 +500,7 @@
       </p:grpSpPr>
       <p:sp>
         <p:nvSpPr>
-          <p:cNvPr id="309" name="PlaceHolder 1"/>
+          <p:cNvPr id="308" name="PlaceHolder 1"/>
           <p:cNvSpPr>
             <a:spLocks noGrp="1"/>
           </p:cNvSpPr>
@@ -496,19 +511,19 @@
         <p:spPr>
           <a:xfrm>
             <a:off x="685800" y="1143000"/>
-            <a:ext cx="5486040" cy="3085920"/>
-          </a:xfrm>
-          <a:prstGeom prst="rect">
-            <a:avLst/>
-          </a:prstGeom>
-          <a:ln w="0">
-            <a:noFill/>
-          </a:ln>
-        </p:spPr>
-      </p:sp>
-      <p:sp>
-        <p:nvSpPr>
-          <p:cNvPr id="310" name="PlaceHolder 2"/>
+            <a:ext cx="5485680" cy="3085560"/>
+          </a:xfrm>
+          <a:prstGeom prst="rect">
+            <a:avLst/>
+          </a:prstGeom>
+          <a:ln w="0">
+            <a:noFill/>
+          </a:ln>
+        </p:spPr>
+      </p:sp>
+      <p:sp>
+        <p:nvSpPr>
+          <p:cNvPr id="309" name="PlaceHolder 2"/>
           <p:cNvSpPr>
             <a:spLocks noGrp="1"/>
           </p:cNvSpPr>
@@ -519,18 +534,18 @@
         <p:spPr>
           <a:xfrm>
             <a:off x="685800" y="4400640"/>
-            <a:ext cx="5486040" cy="3600000"/>
-          </a:xfrm>
-          <a:prstGeom prst="rect">
-            <a:avLst/>
-          </a:prstGeom>
-          <a:noFill/>
-          <a:ln w="0">
-            <a:noFill/>
-          </a:ln>
-        </p:spPr>
-        <p:txBody>
-          <a:bodyPr anchor="t">
+            <a:ext cx="5485680" cy="3599640"/>
+          </a:xfrm>
+          <a:prstGeom prst="rect">
+            <a:avLst/>
+          </a:prstGeom>
+          <a:noFill/>
+          <a:ln w="0">
+            <a:noFill/>
+          </a:ln>
+        </p:spPr>
+        <p:txBody>
+          <a:bodyPr lIns="0" rIns="0" tIns="0" bIns="0" anchor="t">
             <a:noAutofit/>
           </a:bodyPr>
           <a:p>
@@ -542,7 +557,7 @@
       </p:sp>
       <p:sp>
         <p:nvSpPr>
-          <p:cNvPr id="311" name="PlaceHolder 3"/>
+          <p:cNvPr id="310" name="PlaceHolder 3"/>
           <p:cNvSpPr>
             <a:spLocks noGrp="1"/>
           </p:cNvSpPr>
@@ -553,18 +568,18 @@
         <p:spPr>
           <a:xfrm>
             <a:off x="3884760" y="8685360"/>
-            <a:ext cx="2971440" cy="458280"/>
-          </a:xfrm>
-          <a:prstGeom prst="rect">
-            <a:avLst/>
-          </a:prstGeom>
-          <a:noFill/>
-          <a:ln w="0">
-            <a:noFill/>
-          </a:ln>
-        </p:spPr>
-        <p:txBody>
-          <a:bodyPr anchor="b">
+            <a:ext cx="2971080" cy="457920"/>
+          </a:xfrm>
+          <a:prstGeom prst="rect">
+            <a:avLst/>
+          </a:prstGeom>
+          <a:noFill/>
+          <a:ln w="0">
+            <a:noFill/>
+          </a:ln>
+        </p:spPr>
+        <p:txBody>
+          <a:bodyPr lIns="0" rIns="0" tIns="0" bIns="0" anchor="b">
             <a:noAutofit/>
           </a:bodyPr>
           <a:lstStyle>
@@ -589,7 +604,7 @@
               </a:lnSpc>
               <a:buNone/>
             </a:pPr>
-            <a:fld id="{DC37967B-855D-4EAB-8EC4-453CE7162886}" type="slidenum">
+            <a:fld id="{EAC279A4-1A15-444B-A187-ED01694ED45C}" type="slidenum">
               <a:rPr b="0" lang="en-US" sz="1200" spc="-1" strike="noStrike">
                 <a:solidFill>
                   <a:srgbClr val="000000"/>
@@ -629,7 +644,7 @@
       </p:grpSpPr>
       <p:sp>
         <p:nvSpPr>
-          <p:cNvPr id="285" name="PlaceHolder 1"/>
+          <p:cNvPr id="284" name="PlaceHolder 1"/>
           <p:cNvSpPr>
             <a:spLocks noGrp="1"/>
           </p:cNvSpPr>
@@ -640,19 +655,19 @@
         <p:spPr>
           <a:xfrm>
             <a:off x="685800" y="1143000"/>
-            <a:ext cx="5486040" cy="3085920"/>
-          </a:xfrm>
-          <a:prstGeom prst="rect">
-            <a:avLst/>
-          </a:prstGeom>
-          <a:ln w="0">
-            <a:noFill/>
-          </a:ln>
-        </p:spPr>
-      </p:sp>
-      <p:sp>
-        <p:nvSpPr>
-          <p:cNvPr id="286" name="PlaceHolder 2"/>
+            <a:ext cx="5485680" cy="3085560"/>
+          </a:xfrm>
+          <a:prstGeom prst="rect">
+            <a:avLst/>
+          </a:prstGeom>
+          <a:ln w="0">
+            <a:noFill/>
+          </a:ln>
+        </p:spPr>
+      </p:sp>
+      <p:sp>
+        <p:nvSpPr>
+          <p:cNvPr id="285" name="PlaceHolder 2"/>
           <p:cNvSpPr>
             <a:spLocks noGrp="1"/>
           </p:cNvSpPr>
@@ -663,18 +678,18 @@
         <p:spPr>
           <a:xfrm>
             <a:off x="685800" y="4400640"/>
-            <a:ext cx="5486040" cy="3600000"/>
-          </a:xfrm>
-          <a:prstGeom prst="rect">
-            <a:avLst/>
-          </a:prstGeom>
-          <a:noFill/>
-          <a:ln w="0">
-            <a:noFill/>
-          </a:ln>
-        </p:spPr>
-        <p:txBody>
-          <a:bodyPr anchor="t">
+            <a:ext cx="5485680" cy="3599640"/>
+          </a:xfrm>
+          <a:prstGeom prst="rect">
+            <a:avLst/>
+          </a:prstGeom>
+          <a:noFill/>
+          <a:ln w="0">
+            <a:noFill/>
+          </a:ln>
+        </p:spPr>
+        <p:txBody>
+          <a:bodyPr lIns="0" rIns="0" tIns="0" bIns="0" anchor="t">
             <a:noAutofit/>
           </a:bodyPr>
           <a:p>
@@ -686,7 +701,7 @@
       </p:sp>
       <p:sp>
         <p:nvSpPr>
-          <p:cNvPr id="287" name="PlaceHolder 3"/>
+          <p:cNvPr id="286" name="PlaceHolder 3"/>
           <p:cNvSpPr>
             <a:spLocks noGrp="1"/>
           </p:cNvSpPr>
@@ -697,18 +712,18 @@
         <p:spPr>
           <a:xfrm>
             <a:off x="3884760" y="8685360"/>
-            <a:ext cx="2971440" cy="458280"/>
-          </a:xfrm>
-          <a:prstGeom prst="rect">
-            <a:avLst/>
-          </a:prstGeom>
-          <a:noFill/>
-          <a:ln w="0">
-            <a:noFill/>
-          </a:ln>
-        </p:spPr>
-        <p:txBody>
-          <a:bodyPr anchor="b">
+            <a:ext cx="2971080" cy="457920"/>
+          </a:xfrm>
+          <a:prstGeom prst="rect">
+            <a:avLst/>
+          </a:prstGeom>
+          <a:noFill/>
+          <a:ln w="0">
+            <a:noFill/>
+          </a:ln>
+        </p:spPr>
+        <p:txBody>
+          <a:bodyPr lIns="0" rIns="0" tIns="0" bIns="0" anchor="b">
             <a:noAutofit/>
           </a:bodyPr>
           <a:lstStyle>
@@ -733,7 +748,7 @@
               </a:lnSpc>
               <a:buNone/>
             </a:pPr>
-            <a:fld id="{AD7D4954-4AEB-43D5-9F40-B283475BF5AB}" type="slidenum">
+            <a:fld id="{A14A81AF-E44A-43CF-9F14-BE120EC6E4B8}" type="slidenum">
               <a:rPr b="0" lang="en-US" sz="1200" spc="-1" strike="noStrike">
                 <a:solidFill>
                   <a:srgbClr val="000000"/>
@@ -773,7 +788,7 @@
       </p:grpSpPr>
       <p:sp>
         <p:nvSpPr>
-          <p:cNvPr id="288" name="PlaceHolder 1"/>
+          <p:cNvPr id="287" name="PlaceHolder 1"/>
           <p:cNvSpPr>
             <a:spLocks noGrp="1"/>
           </p:cNvSpPr>
@@ -784,19 +799,19 @@
         <p:spPr>
           <a:xfrm>
             <a:off x="685800" y="1143000"/>
-            <a:ext cx="5486040" cy="3085920"/>
-          </a:xfrm>
-          <a:prstGeom prst="rect">
-            <a:avLst/>
-          </a:prstGeom>
-          <a:ln w="0">
-            <a:noFill/>
-          </a:ln>
-        </p:spPr>
-      </p:sp>
-      <p:sp>
-        <p:nvSpPr>
-          <p:cNvPr id="289" name="PlaceHolder 2"/>
+            <a:ext cx="5485680" cy="3085560"/>
+          </a:xfrm>
+          <a:prstGeom prst="rect">
+            <a:avLst/>
+          </a:prstGeom>
+          <a:ln w="0">
+            <a:noFill/>
+          </a:ln>
+        </p:spPr>
+      </p:sp>
+      <p:sp>
+        <p:nvSpPr>
+          <p:cNvPr id="288" name="PlaceHolder 2"/>
           <p:cNvSpPr>
             <a:spLocks noGrp="1"/>
           </p:cNvSpPr>
@@ -807,18 +822,18 @@
         <p:spPr>
           <a:xfrm>
             <a:off x="685800" y="4400640"/>
-            <a:ext cx="5486040" cy="3600000"/>
-          </a:xfrm>
-          <a:prstGeom prst="rect">
-            <a:avLst/>
-          </a:prstGeom>
-          <a:noFill/>
-          <a:ln w="0">
-            <a:noFill/>
-          </a:ln>
-        </p:spPr>
-        <p:txBody>
-          <a:bodyPr anchor="t">
+            <a:ext cx="5485680" cy="3599640"/>
+          </a:xfrm>
+          <a:prstGeom prst="rect">
+            <a:avLst/>
+          </a:prstGeom>
+          <a:noFill/>
+          <a:ln w="0">
+            <a:noFill/>
+          </a:ln>
+        </p:spPr>
+        <p:txBody>
+          <a:bodyPr lIns="0" rIns="0" tIns="0" bIns="0" anchor="t">
             <a:noAutofit/>
           </a:bodyPr>
           <a:p>
@@ -830,7 +845,7 @@
       </p:sp>
       <p:sp>
         <p:nvSpPr>
-          <p:cNvPr id="290" name="PlaceHolder 3"/>
+          <p:cNvPr id="289" name="PlaceHolder 3"/>
           <p:cNvSpPr>
             <a:spLocks noGrp="1"/>
           </p:cNvSpPr>
@@ -841,18 +856,18 @@
         <p:spPr>
           <a:xfrm>
             <a:off x="3884760" y="8685360"/>
-            <a:ext cx="2971440" cy="458280"/>
-          </a:xfrm>
-          <a:prstGeom prst="rect">
-            <a:avLst/>
-          </a:prstGeom>
-          <a:noFill/>
-          <a:ln w="0">
-            <a:noFill/>
-          </a:ln>
-        </p:spPr>
-        <p:txBody>
-          <a:bodyPr anchor="b">
+            <a:ext cx="2971080" cy="457920"/>
+          </a:xfrm>
+          <a:prstGeom prst="rect">
+            <a:avLst/>
+          </a:prstGeom>
+          <a:noFill/>
+          <a:ln w="0">
+            <a:noFill/>
+          </a:ln>
+        </p:spPr>
+        <p:txBody>
+          <a:bodyPr lIns="0" rIns="0" tIns="0" bIns="0" anchor="b">
             <a:noAutofit/>
           </a:bodyPr>
           <a:lstStyle>
@@ -877,7 +892,7 @@
               </a:lnSpc>
               <a:buNone/>
             </a:pPr>
-            <a:fld id="{0E5E4B6C-23A9-4FF4-8BDD-A323C0398AB5}" type="slidenum">
+            <a:fld id="{7497C100-F9E7-45AC-BEE1-7D3535B60DFB}" type="slidenum">
               <a:rPr b="0" lang="en-US" sz="1200" spc="-1" strike="noStrike">
                 <a:solidFill>
                   <a:srgbClr val="000000"/>
@@ -917,7 +932,7 @@
       </p:grpSpPr>
       <p:sp>
         <p:nvSpPr>
-          <p:cNvPr id="291" name="PlaceHolder 1"/>
+          <p:cNvPr id="290" name="PlaceHolder 1"/>
           <p:cNvSpPr>
             <a:spLocks noGrp="1"/>
           </p:cNvSpPr>
@@ -928,19 +943,19 @@
         <p:spPr>
           <a:xfrm>
             <a:off x="685800" y="1143000"/>
-            <a:ext cx="5486040" cy="3085920"/>
-          </a:xfrm>
-          <a:prstGeom prst="rect">
-            <a:avLst/>
-          </a:prstGeom>
-          <a:ln w="0">
-            <a:noFill/>
-          </a:ln>
-        </p:spPr>
-      </p:sp>
-      <p:sp>
-        <p:nvSpPr>
-          <p:cNvPr id="292" name="PlaceHolder 2"/>
+            <a:ext cx="5485680" cy="3085560"/>
+          </a:xfrm>
+          <a:prstGeom prst="rect">
+            <a:avLst/>
+          </a:prstGeom>
+          <a:ln w="0">
+            <a:noFill/>
+          </a:ln>
+        </p:spPr>
+      </p:sp>
+      <p:sp>
+        <p:nvSpPr>
+          <p:cNvPr id="291" name="PlaceHolder 2"/>
           <p:cNvSpPr>
             <a:spLocks noGrp="1"/>
           </p:cNvSpPr>
@@ -951,18 +966,18 @@
         <p:spPr>
           <a:xfrm>
             <a:off x="685800" y="4400640"/>
-            <a:ext cx="5486040" cy="3600000"/>
-          </a:xfrm>
-          <a:prstGeom prst="rect">
-            <a:avLst/>
-          </a:prstGeom>
-          <a:noFill/>
-          <a:ln w="0">
-            <a:noFill/>
-          </a:ln>
-        </p:spPr>
-        <p:txBody>
-          <a:bodyPr anchor="t">
+            <a:ext cx="5485680" cy="3599640"/>
+          </a:xfrm>
+          <a:prstGeom prst="rect">
+            <a:avLst/>
+          </a:prstGeom>
+          <a:noFill/>
+          <a:ln w="0">
+            <a:noFill/>
+          </a:ln>
+        </p:spPr>
+        <p:txBody>
+          <a:bodyPr lIns="0" rIns="0" tIns="0" bIns="0" anchor="t">
             <a:noAutofit/>
           </a:bodyPr>
           <a:p>
@@ -974,7 +989,7 @@
       </p:sp>
       <p:sp>
         <p:nvSpPr>
-          <p:cNvPr id="293" name="PlaceHolder 3"/>
+          <p:cNvPr id="292" name="PlaceHolder 3"/>
           <p:cNvSpPr>
             <a:spLocks noGrp="1"/>
           </p:cNvSpPr>
@@ -985,18 +1000,18 @@
         <p:spPr>
           <a:xfrm>
             <a:off x="3884760" y="8685360"/>
-            <a:ext cx="2971440" cy="458280"/>
-          </a:xfrm>
-          <a:prstGeom prst="rect">
-            <a:avLst/>
-          </a:prstGeom>
-          <a:noFill/>
-          <a:ln w="0">
-            <a:noFill/>
-          </a:ln>
-        </p:spPr>
-        <p:txBody>
-          <a:bodyPr anchor="b">
+            <a:ext cx="2971080" cy="457920"/>
+          </a:xfrm>
+          <a:prstGeom prst="rect">
+            <a:avLst/>
+          </a:prstGeom>
+          <a:noFill/>
+          <a:ln w="0">
+            <a:noFill/>
+          </a:ln>
+        </p:spPr>
+        <p:txBody>
+          <a:bodyPr lIns="0" rIns="0" tIns="0" bIns="0" anchor="b">
             <a:noAutofit/>
           </a:bodyPr>
           <a:lstStyle>
@@ -1021,7 +1036,7 @@
               </a:lnSpc>
               <a:buNone/>
             </a:pPr>
-            <a:fld id="{9A339512-E933-4F70-8B08-5BEDCF755FE7}" type="slidenum">
+            <a:fld id="{9812AAEA-5156-46E5-9B77-447B1E16EC49}" type="slidenum">
               <a:rPr b="0" lang="en-US" sz="1200" spc="-1" strike="noStrike">
                 <a:solidFill>
                   <a:srgbClr val="000000"/>
@@ -1061,7 +1076,7 @@
       </p:grpSpPr>
       <p:sp>
         <p:nvSpPr>
-          <p:cNvPr id="294" name="PlaceHolder 1"/>
+          <p:cNvPr id="293" name="PlaceHolder 1"/>
           <p:cNvSpPr>
             <a:spLocks noGrp="1"/>
           </p:cNvSpPr>
@@ -1072,19 +1087,19 @@
         <p:spPr>
           <a:xfrm>
             <a:off x="685800" y="1143000"/>
-            <a:ext cx="5486040" cy="3085920"/>
-          </a:xfrm>
-          <a:prstGeom prst="rect">
-            <a:avLst/>
-          </a:prstGeom>
-          <a:ln w="0">
-            <a:noFill/>
-          </a:ln>
-        </p:spPr>
-      </p:sp>
-      <p:sp>
-        <p:nvSpPr>
-          <p:cNvPr id="295" name="PlaceHolder 2"/>
+            <a:ext cx="5485680" cy="3085560"/>
+          </a:xfrm>
+          <a:prstGeom prst="rect">
+            <a:avLst/>
+          </a:prstGeom>
+          <a:ln w="0">
+            <a:noFill/>
+          </a:ln>
+        </p:spPr>
+      </p:sp>
+      <p:sp>
+        <p:nvSpPr>
+          <p:cNvPr id="294" name="PlaceHolder 2"/>
           <p:cNvSpPr>
             <a:spLocks noGrp="1"/>
           </p:cNvSpPr>
@@ -1095,18 +1110,18 @@
         <p:spPr>
           <a:xfrm>
             <a:off x="685800" y="4400640"/>
-            <a:ext cx="5486040" cy="3600000"/>
-          </a:xfrm>
-          <a:prstGeom prst="rect">
-            <a:avLst/>
-          </a:prstGeom>
-          <a:noFill/>
-          <a:ln w="0">
-            <a:noFill/>
-          </a:ln>
-        </p:spPr>
-        <p:txBody>
-          <a:bodyPr anchor="t">
+            <a:ext cx="5485680" cy="3599640"/>
+          </a:xfrm>
+          <a:prstGeom prst="rect">
+            <a:avLst/>
+          </a:prstGeom>
+          <a:noFill/>
+          <a:ln w="0">
+            <a:noFill/>
+          </a:ln>
+        </p:spPr>
+        <p:txBody>
+          <a:bodyPr lIns="0" rIns="0" tIns="0" bIns="0" anchor="t">
             <a:noAutofit/>
           </a:bodyPr>
           <a:p>
@@ -1118,7 +1133,7 @@
       </p:sp>
       <p:sp>
         <p:nvSpPr>
-          <p:cNvPr id="296" name="PlaceHolder 3"/>
+          <p:cNvPr id="295" name="PlaceHolder 3"/>
           <p:cNvSpPr>
             <a:spLocks noGrp="1"/>
           </p:cNvSpPr>
@@ -1129,18 +1144,18 @@
         <p:spPr>
           <a:xfrm>
             <a:off x="3884760" y="8685360"/>
-            <a:ext cx="2971440" cy="458280"/>
-          </a:xfrm>
-          <a:prstGeom prst="rect">
-            <a:avLst/>
-          </a:prstGeom>
-          <a:noFill/>
-          <a:ln w="0">
-            <a:noFill/>
-          </a:ln>
-        </p:spPr>
-        <p:txBody>
-          <a:bodyPr anchor="b">
+            <a:ext cx="2971080" cy="457920"/>
+          </a:xfrm>
+          <a:prstGeom prst="rect">
+            <a:avLst/>
+          </a:prstGeom>
+          <a:noFill/>
+          <a:ln w="0">
+            <a:noFill/>
+          </a:ln>
+        </p:spPr>
+        <p:txBody>
+          <a:bodyPr lIns="0" rIns="0" tIns="0" bIns="0" anchor="b">
             <a:noAutofit/>
           </a:bodyPr>
           <a:lstStyle>
@@ -1165,7 +1180,7 @@
               </a:lnSpc>
               <a:buNone/>
             </a:pPr>
-            <a:fld id="{EAE8F199-178B-4CD2-B25E-6546F7E3429D}" type="slidenum">
+            <a:fld id="{2F415D3B-BDD2-4629-AD11-DF7E3054D679}" type="slidenum">
               <a:rPr b="0" lang="en-US" sz="1200" spc="-1" strike="noStrike">
                 <a:solidFill>
                   <a:srgbClr val="000000"/>
@@ -1205,7 +1220,7 @@
       </p:grpSpPr>
       <p:sp>
         <p:nvSpPr>
-          <p:cNvPr id="297" name="PlaceHolder 1"/>
+          <p:cNvPr id="296" name="PlaceHolder 1"/>
           <p:cNvSpPr>
             <a:spLocks noGrp="1"/>
           </p:cNvSpPr>
@@ -1216,19 +1231,19 @@
         <p:spPr>
           <a:xfrm>
             <a:off x="685800" y="1143000"/>
-            <a:ext cx="5486040" cy="3085920"/>
-          </a:xfrm>
-          <a:prstGeom prst="rect">
-            <a:avLst/>
-          </a:prstGeom>
-          <a:ln w="0">
-            <a:noFill/>
-          </a:ln>
-        </p:spPr>
-      </p:sp>
-      <p:sp>
-        <p:nvSpPr>
-          <p:cNvPr id="298" name="PlaceHolder 2"/>
+            <a:ext cx="5485680" cy="3085560"/>
+          </a:xfrm>
+          <a:prstGeom prst="rect">
+            <a:avLst/>
+          </a:prstGeom>
+          <a:ln w="0">
+            <a:noFill/>
+          </a:ln>
+        </p:spPr>
+      </p:sp>
+      <p:sp>
+        <p:nvSpPr>
+          <p:cNvPr id="297" name="PlaceHolder 2"/>
           <p:cNvSpPr>
             <a:spLocks noGrp="1"/>
           </p:cNvSpPr>
@@ -1239,18 +1254,18 @@
         <p:spPr>
           <a:xfrm>
             <a:off x="685800" y="4400640"/>
-            <a:ext cx="5486040" cy="3600000"/>
-          </a:xfrm>
-          <a:prstGeom prst="rect">
-            <a:avLst/>
-          </a:prstGeom>
-          <a:noFill/>
-          <a:ln w="0">
-            <a:noFill/>
-          </a:ln>
-        </p:spPr>
-        <p:txBody>
-          <a:bodyPr anchor="t">
+            <a:ext cx="5485680" cy="3599640"/>
+          </a:xfrm>
+          <a:prstGeom prst="rect">
+            <a:avLst/>
+          </a:prstGeom>
+          <a:noFill/>
+          <a:ln w="0">
+            <a:noFill/>
+          </a:ln>
+        </p:spPr>
+        <p:txBody>
+          <a:bodyPr lIns="0" rIns="0" tIns="0" bIns="0" anchor="t">
             <a:noAutofit/>
           </a:bodyPr>
           <a:p>
@@ -1262,7 +1277,7 @@
       </p:sp>
       <p:sp>
         <p:nvSpPr>
-          <p:cNvPr id="299" name="PlaceHolder 3"/>
+          <p:cNvPr id="298" name="PlaceHolder 3"/>
           <p:cNvSpPr>
             <a:spLocks noGrp="1"/>
           </p:cNvSpPr>
@@ -1273,18 +1288,18 @@
         <p:spPr>
           <a:xfrm>
             <a:off x="3884760" y="8685360"/>
-            <a:ext cx="2971440" cy="458280"/>
-          </a:xfrm>
-          <a:prstGeom prst="rect">
-            <a:avLst/>
-          </a:prstGeom>
-          <a:noFill/>
-          <a:ln w="0">
-            <a:noFill/>
-          </a:ln>
-        </p:spPr>
-        <p:txBody>
-          <a:bodyPr anchor="b">
+            <a:ext cx="2971080" cy="457920"/>
+          </a:xfrm>
+          <a:prstGeom prst="rect">
+            <a:avLst/>
+          </a:prstGeom>
+          <a:noFill/>
+          <a:ln w="0">
+            <a:noFill/>
+          </a:ln>
+        </p:spPr>
+        <p:txBody>
+          <a:bodyPr lIns="0" rIns="0" tIns="0" bIns="0" anchor="b">
             <a:noAutofit/>
           </a:bodyPr>
           <a:lstStyle>
@@ -1309,7 +1324,7 @@
               </a:lnSpc>
               <a:buNone/>
             </a:pPr>
-            <a:fld id="{31D0DC4A-87EA-4C83-99B9-C13E22B45F1D}" type="slidenum">
+            <a:fld id="{3F543B66-FBA8-4B1C-807C-D798F21AC4C1}" type="slidenum">
               <a:rPr b="0" lang="en-US" sz="1200" spc="-1" strike="noStrike">
                 <a:solidFill>
                   <a:srgbClr val="000000"/>
@@ -1349,7 +1364,7 @@
       </p:grpSpPr>
       <p:sp>
         <p:nvSpPr>
-          <p:cNvPr id="300" name="PlaceHolder 1"/>
+          <p:cNvPr id="299" name="PlaceHolder 1"/>
           <p:cNvSpPr>
             <a:spLocks noGrp="1"/>
           </p:cNvSpPr>
@@ -1360,19 +1375,19 @@
         <p:spPr>
           <a:xfrm>
             <a:off x="685800" y="1143000"/>
-            <a:ext cx="5486040" cy="3085920"/>
-          </a:xfrm>
-          <a:prstGeom prst="rect">
-            <a:avLst/>
-          </a:prstGeom>
-          <a:ln w="0">
-            <a:noFill/>
-          </a:ln>
-        </p:spPr>
-      </p:sp>
-      <p:sp>
-        <p:nvSpPr>
-          <p:cNvPr id="301" name="PlaceHolder 2"/>
+            <a:ext cx="5485680" cy="3085560"/>
+          </a:xfrm>
+          <a:prstGeom prst="rect">
+            <a:avLst/>
+          </a:prstGeom>
+          <a:ln w="0">
+            <a:noFill/>
+          </a:ln>
+        </p:spPr>
+      </p:sp>
+      <p:sp>
+        <p:nvSpPr>
+          <p:cNvPr id="300" name="PlaceHolder 2"/>
           <p:cNvSpPr>
             <a:spLocks noGrp="1"/>
           </p:cNvSpPr>
@@ -1383,18 +1398,18 @@
         <p:spPr>
           <a:xfrm>
             <a:off x="685800" y="4400640"/>
-            <a:ext cx="5486040" cy="3600000"/>
-          </a:xfrm>
-          <a:prstGeom prst="rect">
-            <a:avLst/>
-          </a:prstGeom>
-          <a:noFill/>
-          <a:ln w="0">
-            <a:noFill/>
-          </a:ln>
-        </p:spPr>
-        <p:txBody>
-          <a:bodyPr anchor="t">
+            <a:ext cx="5485680" cy="3599640"/>
+          </a:xfrm>
+          <a:prstGeom prst="rect">
+            <a:avLst/>
+          </a:prstGeom>
+          <a:noFill/>
+          <a:ln w="0">
+            <a:noFill/>
+          </a:ln>
+        </p:spPr>
+        <p:txBody>
+          <a:bodyPr lIns="0" rIns="0" tIns="0" bIns="0" anchor="t">
             <a:noAutofit/>
           </a:bodyPr>
           <a:p>
@@ -1406,7 +1421,7 @@
       </p:sp>
       <p:sp>
         <p:nvSpPr>
-          <p:cNvPr id="302" name="PlaceHolder 3"/>
+          <p:cNvPr id="301" name="PlaceHolder 3"/>
           <p:cNvSpPr>
             <a:spLocks noGrp="1"/>
           </p:cNvSpPr>
@@ -1417,18 +1432,18 @@
         <p:spPr>
           <a:xfrm>
             <a:off x="3884760" y="8685360"/>
-            <a:ext cx="2971440" cy="458280"/>
-          </a:xfrm>
-          <a:prstGeom prst="rect">
-            <a:avLst/>
-          </a:prstGeom>
-          <a:noFill/>
-          <a:ln w="0">
-            <a:noFill/>
-          </a:ln>
-        </p:spPr>
-        <p:txBody>
-          <a:bodyPr anchor="b">
+            <a:ext cx="2971080" cy="457920"/>
+          </a:xfrm>
+          <a:prstGeom prst="rect">
+            <a:avLst/>
+          </a:prstGeom>
+          <a:noFill/>
+          <a:ln w="0">
+            <a:noFill/>
+          </a:ln>
+        </p:spPr>
+        <p:txBody>
+          <a:bodyPr lIns="0" rIns="0" tIns="0" bIns="0" anchor="b">
             <a:noAutofit/>
           </a:bodyPr>
           <a:lstStyle>
@@ -1453,7 +1468,7 @@
               </a:lnSpc>
               <a:buNone/>
             </a:pPr>
-            <a:fld id="{21D66656-4987-49B1-AC03-0B8E5AD31E1F}" type="slidenum">
+            <a:fld id="{9AAF5DE6-F4D4-42E1-B82B-6B5C73808CC1}" type="slidenum">
               <a:rPr b="0" lang="en-US" sz="1200" spc="-1" strike="noStrike">
                 <a:solidFill>
                   <a:srgbClr val="000000"/>
@@ -1493,7 +1508,7 @@
       </p:grpSpPr>
       <p:sp>
         <p:nvSpPr>
-          <p:cNvPr id="303" name="PlaceHolder 1"/>
+          <p:cNvPr id="302" name="PlaceHolder 1"/>
           <p:cNvSpPr>
             <a:spLocks noGrp="1"/>
           </p:cNvSpPr>
@@ -1504,19 +1519,19 @@
         <p:spPr>
           <a:xfrm>
             <a:off x="685800" y="1143000"/>
-            <a:ext cx="5486040" cy="3085920"/>
-          </a:xfrm>
-          <a:prstGeom prst="rect">
-            <a:avLst/>
-          </a:prstGeom>
-          <a:ln w="0">
-            <a:noFill/>
-          </a:ln>
-        </p:spPr>
-      </p:sp>
-      <p:sp>
-        <p:nvSpPr>
-          <p:cNvPr id="304" name="PlaceHolder 2"/>
+            <a:ext cx="5485680" cy="3085560"/>
+          </a:xfrm>
+          <a:prstGeom prst="rect">
+            <a:avLst/>
+          </a:prstGeom>
+          <a:ln w="0">
+            <a:noFill/>
+          </a:ln>
+        </p:spPr>
+      </p:sp>
+      <p:sp>
+        <p:nvSpPr>
+          <p:cNvPr id="303" name="PlaceHolder 2"/>
           <p:cNvSpPr>
             <a:spLocks noGrp="1"/>
           </p:cNvSpPr>
@@ -1527,18 +1542,18 @@
         <p:spPr>
           <a:xfrm>
             <a:off x="685800" y="4400640"/>
-            <a:ext cx="5486040" cy="3600000"/>
-          </a:xfrm>
-          <a:prstGeom prst="rect">
-            <a:avLst/>
-          </a:prstGeom>
-          <a:noFill/>
-          <a:ln w="0">
-            <a:noFill/>
-          </a:ln>
-        </p:spPr>
-        <p:txBody>
-          <a:bodyPr anchor="t">
+            <a:ext cx="5485680" cy="3599640"/>
+          </a:xfrm>
+          <a:prstGeom prst="rect">
+            <a:avLst/>
+          </a:prstGeom>
+          <a:noFill/>
+          <a:ln w="0">
+            <a:noFill/>
+          </a:ln>
+        </p:spPr>
+        <p:txBody>
+          <a:bodyPr lIns="0" rIns="0" tIns="0" bIns="0" anchor="t">
             <a:noAutofit/>
           </a:bodyPr>
           <a:p>
@@ -1550,7 +1565,7 @@
       </p:sp>
       <p:sp>
         <p:nvSpPr>
-          <p:cNvPr id="305" name="PlaceHolder 3"/>
+          <p:cNvPr id="304" name="PlaceHolder 3"/>
           <p:cNvSpPr>
             <a:spLocks noGrp="1"/>
           </p:cNvSpPr>
@@ -1561,18 +1576,18 @@
         <p:spPr>
           <a:xfrm>
             <a:off x="3884760" y="8685360"/>
-            <a:ext cx="2971440" cy="458280"/>
-          </a:xfrm>
-          <a:prstGeom prst="rect">
-            <a:avLst/>
-          </a:prstGeom>
-          <a:noFill/>
-          <a:ln w="0">
-            <a:noFill/>
-          </a:ln>
-        </p:spPr>
-        <p:txBody>
-          <a:bodyPr anchor="b">
+            <a:ext cx="2971080" cy="457920"/>
+          </a:xfrm>
+          <a:prstGeom prst="rect">
+            <a:avLst/>
+          </a:prstGeom>
+          <a:noFill/>
+          <a:ln w="0">
+            <a:noFill/>
+          </a:ln>
+        </p:spPr>
+        <p:txBody>
+          <a:bodyPr lIns="0" rIns="0" tIns="0" bIns="0" anchor="b">
             <a:noAutofit/>
           </a:bodyPr>
           <a:lstStyle>
@@ -1597,7 +1612,7 @@
               </a:lnSpc>
               <a:buNone/>
             </a:pPr>
-            <a:fld id="{A2C2EEDE-A30F-48DB-9445-BCCBE43CDAEB}" type="slidenum">
+            <a:fld id="{BB76C357-7AAD-4043-BC36-4C8F51941912}" type="slidenum">
               <a:rPr b="0" lang="en-US" sz="1200" spc="-1" strike="noStrike">
                 <a:solidFill>
                   <a:srgbClr val="000000"/>
@@ -1637,7 +1652,7 @@
       </p:grpSpPr>
       <p:sp>
         <p:nvSpPr>
-          <p:cNvPr id="306" name="PlaceHolder 1"/>
+          <p:cNvPr id="305" name="PlaceHolder 1"/>
           <p:cNvSpPr>
             <a:spLocks noGrp="1"/>
           </p:cNvSpPr>
@@ -1648,19 +1663,19 @@
         <p:spPr>
           <a:xfrm>
             <a:off x="685800" y="1143000"/>
-            <a:ext cx="5486040" cy="3085920"/>
-          </a:xfrm>
-          <a:prstGeom prst="rect">
-            <a:avLst/>
-          </a:prstGeom>
-          <a:ln w="0">
-            <a:noFill/>
-          </a:ln>
-        </p:spPr>
-      </p:sp>
-      <p:sp>
-        <p:nvSpPr>
-          <p:cNvPr id="307" name="PlaceHolder 2"/>
+            <a:ext cx="5485680" cy="3085560"/>
+          </a:xfrm>
+          <a:prstGeom prst="rect">
+            <a:avLst/>
+          </a:prstGeom>
+          <a:ln w="0">
+            <a:noFill/>
+          </a:ln>
+        </p:spPr>
+      </p:sp>
+      <p:sp>
+        <p:nvSpPr>
+          <p:cNvPr id="306" name="PlaceHolder 2"/>
           <p:cNvSpPr>
             <a:spLocks noGrp="1"/>
           </p:cNvSpPr>
@@ -1671,18 +1686,18 @@
         <p:spPr>
           <a:xfrm>
             <a:off x="685800" y="4400640"/>
-            <a:ext cx="5486040" cy="3600000"/>
-          </a:xfrm>
-          <a:prstGeom prst="rect">
-            <a:avLst/>
-          </a:prstGeom>
-          <a:noFill/>
-          <a:ln w="0">
-            <a:noFill/>
-          </a:ln>
-        </p:spPr>
-        <p:txBody>
-          <a:bodyPr anchor="t">
+            <a:ext cx="5485680" cy="3599640"/>
+          </a:xfrm>
+          <a:prstGeom prst="rect">
+            <a:avLst/>
+          </a:prstGeom>
+          <a:noFill/>
+          <a:ln w="0">
+            <a:noFill/>
+          </a:ln>
+        </p:spPr>
+        <p:txBody>
+          <a:bodyPr lIns="0" rIns="0" tIns="0" bIns="0" anchor="t">
             <a:noAutofit/>
           </a:bodyPr>
           <a:p>
@@ -1694,7 +1709,7 @@
       </p:sp>
       <p:sp>
         <p:nvSpPr>
-          <p:cNvPr id="308" name="PlaceHolder 3"/>
+          <p:cNvPr id="307" name="PlaceHolder 3"/>
           <p:cNvSpPr>
             <a:spLocks noGrp="1"/>
           </p:cNvSpPr>
@@ -1705,18 +1720,18 @@
         <p:spPr>
           <a:xfrm>
             <a:off x="3884760" y="8685360"/>
-            <a:ext cx="2971440" cy="458280"/>
-          </a:xfrm>
-          <a:prstGeom prst="rect">
-            <a:avLst/>
-          </a:prstGeom>
-          <a:noFill/>
-          <a:ln w="0">
-            <a:noFill/>
-          </a:ln>
-        </p:spPr>
-        <p:txBody>
-          <a:bodyPr anchor="b">
+            <a:ext cx="2971080" cy="457920"/>
+          </a:xfrm>
+          <a:prstGeom prst="rect">
+            <a:avLst/>
+          </a:prstGeom>
+          <a:noFill/>
+          <a:ln w="0">
+            <a:noFill/>
+          </a:ln>
+        </p:spPr>
+        <p:txBody>
+          <a:bodyPr lIns="0" rIns="0" tIns="0" bIns="0" anchor="b">
             <a:noAutofit/>
           </a:bodyPr>
           <a:lstStyle>
@@ -1741,7 +1756,7 @@
               </a:lnSpc>
               <a:buNone/>
             </a:pPr>
-            <a:fld id="{6543CACF-7DA1-4529-B23C-7536B900FD76}" type="slidenum">
+            <a:fld id="{346CB0B9-66D2-4309-A58E-212D78904C04}" type="slidenum">
               <a:rPr b="0" lang="en-US" sz="1200" spc="-1" strike="noStrike">
                 <a:solidFill>
                   <a:srgbClr val="000000"/>
@@ -1829,11 +1844,11 @@
             <a:noAutofit/>
           </a:bodyPr>
           <a:p>
-            <a:endParaRPr b="0" lang="en-IN" sz="1800" spc="-1" strike="noStrike">
-              <a:solidFill>
-                <a:srgbClr val="000000"/>
-              </a:solidFill>
-              <a:latin typeface="Calibri"/>
+            <a:pPr algn="ctr">
+              <a:buNone/>
+            </a:pPr>
+            <a:endParaRPr b="0" lang="en-IN" sz="4400" spc="-1" strike="noStrike">
+              <a:latin typeface="Arial"/>
             </a:endParaRPr>
           </a:p>
         </p:txBody>
@@ -1867,10 +1882,7 @@
           </a:bodyPr>
           <a:p>
             <a:endParaRPr b="0" lang="en-IN" sz="3200" spc="-1" strike="noStrike">
-              <a:solidFill>
-                <a:srgbClr val="000000"/>
-              </a:solidFill>
-              <a:latin typeface="Calibri"/>
+              <a:latin typeface="Arial"/>
             </a:endParaRPr>
           </a:p>
         </p:txBody>
@@ -1904,10 +1916,7 @@
           </a:bodyPr>
           <a:p>
             <a:endParaRPr b="0" lang="en-IN" sz="3200" spc="-1" strike="noStrike">
-              <a:solidFill>
-                <a:srgbClr val="000000"/>
-              </a:solidFill>
-              <a:latin typeface="Calibri"/>
+              <a:latin typeface="Arial"/>
             </a:endParaRPr>
           </a:p>
         </p:txBody>
@@ -1962,11 +1971,11 @@
             <a:noAutofit/>
           </a:bodyPr>
           <a:p>
-            <a:endParaRPr b="0" lang="en-IN" sz="1800" spc="-1" strike="noStrike">
-              <a:solidFill>
-                <a:srgbClr val="000000"/>
-              </a:solidFill>
-              <a:latin typeface="Calibri"/>
+            <a:pPr algn="ctr">
+              <a:buNone/>
+            </a:pPr>
+            <a:endParaRPr b="0" lang="en-IN" sz="4400" spc="-1" strike="noStrike">
+              <a:latin typeface="Arial"/>
             </a:endParaRPr>
           </a:p>
         </p:txBody>
@@ -2000,10 +2009,7 @@
           </a:bodyPr>
           <a:p>
             <a:endParaRPr b="0" lang="en-IN" sz="3200" spc="-1" strike="noStrike">
-              <a:solidFill>
-                <a:srgbClr val="000000"/>
-              </a:solidFill>
-              <a:latin typeface="Calibri"/>
+              <a:latin typeface="Arial"/>
             </a:endParaRPr>
           </a:p>
         </p:txBody>
@@ -2037,10 +2043,7 @@
           </a:bodyPr>
           <a:p>
             <a:endParaRPr b="0" lang="en-IN" sz="3200" spc="-1" strike="noStrike">
-              <a:solidFill>
-                <a:srgbClr val="000000"/>
-              </a:solidFill>
-              <a:latin typeface="Calibri"/>
+              <a:latin typeface="Arial"/>
             </a:endParaRPr>
           </a:p>
         </p:txBody>
@@ -2074,10 +2077,7 @@
           </a:bodyPr>
           <a:p>
             <a:endParaRPr b="0" lang="en-IN" sz="3200" spc="-1" strike="noStrike">
-              <a:solidFill>
-                <a:srgbClr val="000000"/>
-              </a:solidFill>
-              <a:latin typeface="Calibri"/>
+              <a:latin typeface="Arial"/>
             </a:endParaRPr>
           </a:p>
         </p:txBody>
@@ -2111,10 +2111,7 @@
           </a:bodyPr>
           <a:p>
             <a:endParaRPr b="0" lang="en-IN" sz="3200" spc="-1" strike="noStrike">
-              <a:solidFill>
-                <a:srgbClr val="000000"/>
-              </a:solidFill>
-              <a:latin typeface="Calibri"/>
+              <a:latin typeface="Arial"/>
             </a:endParaRPr>
           </a:p>
         </p:txBody>
@@ -2169,11 +2166,11 @@
             <a:noAutofit/>
           </a:bodyPr>
           <a:p>
-            <a:endParaRPr b="0" lang="en-IN" sz="1800" spc="-1" strike="noStrike">
-              <a:solidFill>
-                <a:srgbClr val="000000"/>
-              </a:solidFill>
-              <a:latin typeface="Calibri"/>
+            <a:pPr algn="ctr">
+              <a:buNone/>
+            </a:pPr>
+            <a:endParaRPr b="0" lang="en-IN" sz="4400" spc="-1" strike="noStrike">
+              <a:latin typeface="Arial"/>
             </a:endParaRPr>
           </a:p>
         </p:txBody>
@@ -2207,10 +2204,7 @@
           </a:bodyPr>
           <a:p>
             <a:endParaRPr b="0" lang="en-IN" sz="3200" spc="-1" strike="noStrike">
-              <a:solidFill>
-                <a:srgbClr val="000000"/>
-              </a:solidFill>
-              <a:latin typeface="Calibri"/>
+              <a:latin typeface="Arial"/>
             </a:endParaRPr>
           </a:p>
         </p:txBody>
@@ -2244,10 +2238,7 @@
           </a:bodyPr>
           <a:p>
             <a:endParaRPr b="0" lang="en-IN" sz="3200" spc="-1" strike="noStrike">
-              <a:solidFill>
-                <a:srgbClr val="000000"/>
-              </a:solidFill>
-              <a:latin typeface="Calibri"/>
+              <a:latin typeface="Arial"/>
             </a:endParaRPr>
           </a:p>
         </p:txBody>
@@ -2281,10 +2272,7 @@
           </a:bodyPr>
           <a:p>
             <a:endParaRPr b="0" lang="en-IN" sz="3200" spc="-1" strike="noStrike">
-              <a:solidFill>
-                <a:srgbClr val="000000"/>
-              </a:solidFill>
-              <a:latin typeface="Calibri"/>
+              <a:latin typeface="Arial"/>
             </a:endParaRPr>
           </a:p>
         </p:txBody>
@@ -2318,10 +2306,7 @@
           </a:bodyPr>
           <a:p>
             <a:endParaRPr b="0" lang="en-IN" sz="3200" spc="-1" strike="noStrike">
-              <a:solidFill>
-                <a:srgbClr val="000000"/>
-              </a:solidFill>
-              <a:latin typeface="Calibri"/>
+              <a:latin typeface="Arial"/>
             </a:endParaRPr>
           </a:p>
         </p:txBody>
@@ -2355,10 +2340,7 @@
           </a:bodyPr>
           <a:p>
             <a:endParaRPr b="0" lang="en-IN" sz="3200" spc="-1" strike="noStrike">
-              <a:solidFill>
-                <a:srgbClr val="000000"/>
-              </a:solidFill>
-              <a:latin typeface="Calibri"/>
+              <a:latin typeface="Arial"/>
             </a:endParaRPr>
           </a:p>
         </p:txBody>
@@ -2392,10 +2374,7 @@
           </a:bodyPr>
           <a:p>
             <a:endParaRPr b="0" lang="en-IN" sz="3200" spc="-1" strike="noStrike">
-              <a:solidFill>
-                <a:srgbClr val="000000"/>
-              </a:solidFill>
-              <a:latin typeface="Calibri"/>
+              <a:latin typeface="Arial"/>
             </a:endParaRPr>
           </a:p>
         </p:txBody>
@@ -2450,11 +2429,11 @@
             <a:noAutofit/>
           </a:bodyPr>
           <a:p>
-            <a:endParaRPr b="0" lang="en-IN" sz="1800" spc="-1" strike="noStrike">
-              <a:solidFill>
-                <a:srgbClr val="000000"/>
-              </a:solidFill>
-              <a:latin typeface="Calibri"/>
+            <a:pPr algn="ctr">
+              <a:buNone/>
+            </a:pPr>
+            <a:endParaRPr b="0" lang="en-IN" sz="4400" spc="-1" strike="noStrike">
+              <a:latin typeface="Arial"/>
             </a:endParaRPr>
           </a:p>
         </p:txBody>
@@ -2546,11 +2525,11 @@
             <a:noAutofit/>
           </a:bodyPr>
           <a:p>
-            <a:endParaRPr b="0" lang="en-IN" sz="1800" spc="-1" strike="noStrike">
-              <a:solidFill>
-                <a:srgbClr val="000000"/>
-              </a:solidFill>
-              <a:latin typeface="Calibri"/>
+            <a:pPr algn="ctr">
+              <a:buNone/>
+            </a:pPr>
+            <a:endParaRPr b="0" lang="en-IN" sz="4400" spc="-1" strike="noStrike">
+              <a:latin typeface="Arial"/>
             </a:endParaRPr>
           </a:p>
         </p:txBody>
@@ -2584,10 +2563,7 @@
           </a:bodyPr>
           <a:p>
             <a:endParaRPr b="0" lang="en-IN" sz="3200" spc="-1" strike="noStrike">
-              <a:solidFill>
-                <a:srgbClr val="000000"/>
-              </a:solidFill>
-              <a:latin typeface="Calibri"/>
+              <a:latin typeface="Arial"/>
             </a:endParaRPr>
           </a:p>
         </p:txBody>
@@ -2642,11 +2618,11 @@
             <a:noAutofit/>
           </a:bodyPr>
           <a:p>
-            <a:endParaRPr b="0" lang="en-IN" sz="1800" spc="-1" strike="noStrike">
-              <a:solidFill>
-                <a:srgbClr val="000000"/>
-              </a:solidFill>
-              <a:latin typeface="Calibri"/>
+            <a:pPr algn="ctr">
+              <a:buNone/>
+            </a:pPr>
+            <a:endParaRPr b="0" lang="en-IN" sz="4400" spc="-1" strike="noStrike">
+              <a:latin typeface="Arial"/>
             </a:endParaRPr>
           </a:p>
         </p:txBody>
@@ -2680,10 +2656,7 @@
           </a:bodyPr>
           <a:p>
             <a:endParaRPr b="0" lang="en-IN" sz="3200" spc="-1" strike="noStrike">
-              <a:solidFill>
-                <a:srgbClr val="000000"/>
-              </a:solidFill>
-              <a:latin typeface="Calibri"/>
+              <a:latin typeface="Arial"/>
             </a:endParaRPr>
           </a:p>
         </p:txBody>
@@ -2717,10 +2690,7 @@
           </a:bodyPr>
           <a:p>
             <a:endParaRPr b="0" lang="en-IN" sz="3200" spc="-1" strike="noStrike">
-              <a:solidFill>
-                <a:srgbClr val="000000"/>
-              </a:solidFill>
-              <a:latin typeface="Calibri"/>
+              <a:latin typeface="Arial"/>
             </a:endParaRPr>
           </a:p>
         </p:txBody>
@@ -2775,11 +2745,11 @@
             <a:noAutofit/>
           </a:bodyPr>
           <a:p>
-            <a:endParaRPr b="0" lang="en-IN" sz="1800" spc="-1" strike="noStrike">
-              <a:solidFill>
-                <a:srgbClr val="000000"/>
-              </a:solidFill>
-              <a:latin typeface="Calibri"/>
+            <a:pPr algn="ctr">
+              <a:buNone/>
+            </a:pPr>
+            <a:endParaRPr b="0" lang="en-IN" sz="4400" spc="-1" strike="noStrike">
+              <a:latin typeface="Arial"/>
             </a:endParaRPr>
           </a:p>
         </p:txBody>
@@ -2893,11 +2863,11 @@
             <a:noAutofit/>
           </a:bodyPr>
           <a:p>
-            <a:endParaRPr b="0" lang="en-IN" sz="1800" spc="-1" strike="noStrike">
-              <a:solidFill>
-                <a:srgbClr val="000000"/>
-              </a:solidFill>
-              <a:latin typeface="Calibri"/>
+            <a:pPr algn="ctr">
+              <a:buNone/>
+            </a:pPr>
+            <a:endParaRPr b="0" lang="en-IN" sz="4400" spc="-1" strike="noStrike">
+              <a:latin typeface="Arial"/>
             </a:endParaRPr>
           </a:p>
         </p:txBody>
@@ -2931,10 +2901,7 @@
           </a:bodyPr>
           <a:p>
             <a:endParaRPr b="0" lang="en-IN" sz="3200" spc="-1" strike="noStrike">
-              <a:solidFill>
-                <a:srgbClr val="000000"/>
-              </a:solidFill>
-              <a:latin typeface="Calibri"/>
+              <a:latin typeface="Arial"/>
             </a:endParaRPr>
           </a:p>
         </p:txBody>
@@ -2968,10 +2935,7 @@
           </a:bodyPr>
           <a:p>
             <a:endParaRPr b="0" lang="en-IN" sz="3200" spc="-1" strike="noStrike">
-              <a:solidFill>
-                <a:srgbClr val="000000"/>
-              </a:solidFill>
-              <a:latin typeface="Calibri"/>
+              <a:latin typeface="Arial"/>
             </a:endParaRPr>
           </a:p>
         </p:txBody>
@@ -3005,10 +2969,7 @@
           </a:bodyPr>
           <a:p>
             <a:endParaRPr b="0" lang="en-IN" sz="3200" spc="-1" strike="noStrike">
-              <a:solidFill>
-                <a:srgbClr val="000000"/>
-              </a:solidFill>
-              <a:latin typeface="Calibri"/>
+              <a:latin typeface="Arial"/>
             </a:endParaRPr>
           </a:p>
         </p:txBody>
@@ -3063,11 +3024,11 @@
             <a:noAutofit/>
           </a:bodyPr>
           <a:p>
-            <a:endParaRPr b="0" lang="en-IN" sz="1800" spc="-1" strike="noStrike">
-              <a:solidFill>
-                <a:srgbClr val="000000"/>
-              </a:solidFill>
-              <a:latin typeface="Calibri"/>
+            <a:pPr algn="ctr">
+              <a:buNone/>
+            </a:pPr>
+            <a:endParaRPr b="0" lang="en-IN" sz="4400" spc="-1" strike="noStrike">
+              <a:latin typeface="Arial"/>
             </a:endParaRPr>
           </a:p>
         </p:txBody>
@@ -3101,10 +3062,7 @@
           </a:bodyPr>
           <a:p>
             <a:endParaRPr b="0" lang="en-IN" sz="3200" spc="-1" strike="noStrike">
-              <a:solidFill>
-                <a:srgbClr val="000000"/>
-              </a:solidFill>
-              <a:latin typeface="Calibri"/>
+              <a:latin typeface="Arial"/>
             </a:endParaRPr>
           </a:p>
         </p:txBody>
@@ -3138,10 +3096,7 @@
           </a:bodyPr>
           <a:p>
             <a:endParaRPr b="0" lang="en-IN" sz="3200" spc="-1" strike="noStrike">
-              <a:solidFill>
-                <a:srgbClr val="000000"/>
-              </a:solidFill>
-              <a:latin typeface="Calibri"/>
+              <a:latin typeface="Arial"/>
             </a:endParaRPr>
           </a:p>
         </p:txBody>
@@ -3175,10 +3130,7 @@
           </a:bodyPr>
           <a:p>
             <a:endParaRPr b="0" lang="en-IN" sz="3200" spc="-1" strike="noStrike">
-              <a:solidFill>
-                <a:srgbClr val="000000"/>
-              </a:solidFill>
-              <a:latin typeface="Calibri"/>
+              <a:latin typeface="Arial"/>
             </a:endParaRPr>
           </a:p>
         </p:txBody>
@@ -3233,11 +3185,11 @@
             <a:noAutofit/>
           </a:bodyPr>
           <a:p>
-            <a:endParaRPr b="0" lang="en-IN" sz="1800" spc="-1" strike="noStrike">
-              <a:solidFill>
-                <a:srgbClr val="000000"/>
-              </a:solidFill>
-              <a:latin typeface="Calibri"/>
+            <a:pPr algn="ctr">
+              <a:buNone/>
+            </a:pPr>
+            <a:endParaRPr b="0" lang="en-IN" sz="4400" spc="-1" strike="noStrike">
+              <a:latin typeface="Arial"/>
             </a:endParaRPr>
           </a:p>
         </p:txBody>
@@ -3271,10 +3223,7 @@
           </a:bodyPr>
           <a:p>
             <a:endParaRPr b="0" lang="en-IN" sz="3200" spc="-1" strike="noStrike">
-              <a:solidFill>
-                <a:srgbClr val="000000"/>
-              </a:solidFill>
-              <a:latin typeface="Calibri"/>
+              <a:latin typeface="Arial"/>
             </a:endParaRPr>
           </a:p>
         </p:txBody>
@@ -3308,10 +3257,7 @@
           </a:bodyPr>
           <a:p>
             <a:endParaRPr b="0" lang="en-IN" sz="3200" spc="-1" strike="noStrike">
-              <a:solidFill>
-                <a:srgbClr val="000000"/>
-              </a:solidFill>
-              <a:latin typeface="Calibri"/>
+              <a:latin typeface="Arial"/>
             </a:endParaRPr>
           </a:p>
         </p:txBody>
@@ -3345,10 +3291,7 @@
           </a:bodyPr>
           <a:p>
             <a:endParaRPr b="0" lang="en-IN" sz="3200" spc="-1" strike="noStrike">
-              <a:solidFill>
-                <a:srgbClr val="000000"/>
-              </a:solidFill>
-              <a:latin typeface="Calibri"/>
+              <a:latin typeface="Arial"/>
             </a:endParaRPr>
           </a:p>
         </p:txBody>
@@ -3410,20 +3353,17 @@
             <a:noAutofit/>
           </a:bodyPr>
           <a:p>
-            <a:r>
-              <a:rPr b="0" lang="en-IN" sz="1800" spc="-1" strike="noStrike">
-                <a:solidFill>
-                  <a:srgbClr val="000000"/>
-                </a:solidFill>
-                <a:latin typeface="Calibri"/>
+            <a:pPr algn="ctr">
+              <a:buNone/>
+            </a:pPr>
+            <a:r>
+              <a:rPr b="0" lang="en-IN" sz="4400" spc="-1" strike="noStrike">
+                <a:latin typeface="Arial"/>
               </a:rPr>
               <a:t>Click to edit the title text format</a:t>
             </a:r>
-            <a:endParaRPr b="0" lang="en-IN" sz="1800" spc="-1" strike="noStrike">
-              <a:solidFill>
-                <a:srgbClr val="000000"/>
-              </a:solidFill>
-              <a:latin typeface="Calibri"/>
+            <a:endParaRPr b="0" lang="en-IN" sz="4400" spc="-1" strike="noStrike">
+              <a:latin typeface="Arial"/>
             </a:endParaRPr>
           </a:p>
         </p:txBody>
@@ -3469,18 +3409,12 @@
             </a:pPr>
             <a:r>
               <a:rPr b="0" lang="en-IN" sz="3200" spc="-1" strike="noStrike">
-                <a:solidFill>
-                  <a:srgbClr val="000000"/>
-                </a:solidFill>
-                <a:latin typeface="Calibri"/>
+                <a:latin typeface="Arial"/>
               </a:rPr>
               <a:t>Click to edit the outline text format</a:t>
             </a:r>
             <a:endParaRPr b="0" lang="en-IN" sz="3200" spc="-1" strike="noStrike">
-              <a:solidFill>
-                <a:srgbClr val="000000"/>
-              </a:solidFill>
-              <a:latin typeface="Calibri"/>
+              <a:latin typeface="Arial"/>
             </a:endParaRPr>
           </a:p>
           <a:p>
@@ -3496,19 +3430,13 @@
               <a:buChar char=""/>
             </a:pPr>
             <a:r>
-              <a:rPr b="0" lang="en-IN" sz="2400" spc="-1" strike="noStrike">
-                <a:solidFill>
-                  <a:srgbClr val="000000"/>
-                </a:solidFill>
-                <a:latin typeface="Calibri"/>
+              <a:rPr b="0" lang="en-IN" sz="2800" spc="-1" strike="noStrike">
+                <a:latin typeface="Arial"/>
               </a:rPr>
               <a:t>Second Outline Level</a:t>
             </a:r>
-            <a:endParaRPr b="0" lang="en-IN" sz="2400" spc="-1" strike="noStrike">
-              <a:solidFill>
-                <a:srgbClr val="000000"/>
-              </a:solidFill>
-              <a:latin typeface="Calibri"/>
+            <a:endParaRPr b="0" lang="en-IN" sz="2800" spc="-1" strike="noStrike">
+              <a:latin typeface="Arial"/>
             </a:endParaRPr>
           </a:p>
           <a:p>
@@ -3524,19 +3452,13 @@
               <a:buChar char=""/>
             </a:pPr>
             <a:r>
-              <a:rPr b="0" lang="en-IN" sz="2000" spc="-1" strike="noStrike">
-                <a:solidFill>
-                  <a:srgbClr val="000000"/>
-                </a:solidFill>
-                <a:latin typeface="Calibri"/>
+              <a:rPr b="0" lang="en-IN" sz="2400" spc="-1" strike="noStrike">
+                <a:latin typeface="Arial"/>
               </a:rPr>
               <a:t>Third Outline Level</a:t>
             </a:r>
-            <a:endParaRPr b="0" lang="en-IN" sz="2000" spc="-1" strike="noStrike">
-              <a:solidFill>
-                <a:srgbClr val="000000"/>
-              </a:solidFill>
-              <a:latin typeface="Calibri"/>
+            <a:endParaRPr b="0" lang="en-IN" sz="2400" spc="-1" strike="noStrike">
+              <a:latin typeface="Arial"/>
             </a:endParaRPr>
           </a:p>
           <a:p>
@@ -3553,18 +3475,12 @@
             </a:pPr>
             <a:r>
               <a:rPr b="0" lang="en-IN" sz="2000" spc="-1" strike="noStrike">
-                <a:solidFill>
-                  <a:srgbClr val="000000"/>
-                </a:solidFill>
-                <a:latin typeface="Calibri"/>
+                <a:latin typeface="Arial"/>
               </a:rPr>
               <a:t>Fourth Outline Level</a:t>
             </a:r>
             <a:endParaRPr b="0" lang="en-IN" sz="2000" spc="-1" strike="noStrike">
-              <a:solidFill>
-                <a:srgbClr val="000000"/>
-              </a:solidFill>
-              <a:latin typeface="Calibri"/>
+              <a:latin typeface="Arial"/>
             </a:endParaRPr>
           </a:p>
           <a:p>
@@ -3581,18 +3497,12 @@
             </a:pPr>
             <a:r>
               <a:rPr b="0" lang="en-IN" sz="2000" spc="-1" strike="noStrike">
-                <a:solidFill>
-                  <a:srgbClr val="000000"/>
-                </a:solidFill>
-                <a:latin typeface="Calibri"/>
+                <a:latin typeface="Arial"/>
               </a:rPr>
               <a:t>Fifth Outline Level</a:t>
             </a:r>
             <a:endParaRPr b="0" lang="en-IN" sz="2000" spc="-1" strike="noStrike">
-              <a:solidFill>
-                <a:srgbClr val="000000"/>
-              </a:solidFill>
-              <a:latin typeface="Calibri"/>
+              <a:latin typeface="Arial"/>
             </a:endParaRPr>
           </a:p>
           <a:p>
@@ -3609,18 +3519,12 @@
             </a:pPr>
             <a:r>
               <a:rPr b="0" lang="en-IN" sz="2000" spc="-1" strike="noStrike">
-                <a:solidFill>
-                  <a:srgbClr val="000000"/>
-                </a:solidFill>
-                <a:latin typeface="Calibri"/>
+                <a:latin typeface="Arial"/>
               </a:rPr>
               <a:t>Sixth Outline Level</a:t>
             </a:r>
             <a:endParaRPr b="0" lang="en-IN" sz="2000" spc="-1" strike="noStrike">
-              <a:solidFill>
-                <a:srgbClr val="000000"/>
-              </a:solidFill>
-              <a:latin typeface="Calibri"/>
+              <a:latin typeface="Arial"/>
             </a:endParaRPr>
           </a:p>
           <a:p>
@@ -3637,18 +3541,12 @@
             </a:pPr>
             <a:r>
               <a:rPr b="0" lang="en-IN" sz="2000" spc="-1" strike="noStrike">
-                <a:solidFill>
-                  <a:srgbClr val="000000"/>
-                </a:solidFill>
-                <a:latin typeface="Calibri"/>
+                <a:latin typeface="Arial"/>
               </a:rPr>
               <a:t>Seventh Outline Level</a:t>
             </a:r>
             <a:endParaRPr b="0" lang="en-IN" sz="2000" spc="-1" strike="noStrike">
-              <a:solidFill>
-                <a:srgbClr val="000000"/>
-              </a:solidFill>
-              <a:latin typeface="Calibri"/>
+              <a:latin typeface="Arial"/>
             </a:endParaRPr>
           </a:p>
         </p:txBody>
@@ -3706,7 +3604,7 @@
         <p:spPr>
           <a:xfrm>
             <a:off x="6217920" y="-1097280"/>
-            <a:ext cx="5028840" cy="5028840"/>
+            <a:ext cx="5028480" cy="5028480"/>
           </a:xfrm>
           <a:prstGeom prst="ellipse">
             <a:avLst/>
@@ -3741,7 +3639,7 @@
         <p:spPr>
           <a:xfrm>
             <a:off x="7498080" y="2926080"/>
-            <a:ext cx="2559960" cy="2559960"/>
+            <a:ext cx="2559600" cy="2559600"/>
           </a:xfrm>
           <a:prstGeom prst="ellipse">
             <a:avLst/>
@@ -3776,7 +3674,7 @@
         <p:spPr>
           <a:xfrm>
             <a:off x="0" y="0"/>
-            <a:ext cx="182520" cy="5143320"/>
+            <a:ext cx="182160" cy="5142960"/>
           </a:xfrm>
           <a:prstGeom prst="rect">
             <a:avLst/>
@@ -3804,7 +3702,7 @@
         <p:spPr>
           <a:xfrm>
             <a:off x="502920" y="457200"/>
-            <a:ext cx="2011320" cy="347040"/>
+            <a:ext cx="2010960" cy="346680"/>
           </a:xfrm>
           <a:prstGeom prst="rect">
             <a:avLst/>
@@ -3832,7 +3730,7 @@
         <p:spPr>
           <a:xfrm>
             <a:off x="502920" y="457200"/>
-            <a:ext cx="2011320" cy="347040"/>
+            <a:ext cx="2010960" cy="346680"/>
           </a:xfrm>
           <a:prstGeom prst="rect">
             <a:avLst/>
@@ -3868,6 +3766,7 @@
                   <a:srgbClr val="ffffff"/>
                 </a:solidFill>
                 <a:latin typeface="Calibri"/>
+                <a:ea typeface="DejaVu Sans"/>
               </a:rPr>
               <a:t>PART 1 OF 4  •  SLIDES 1–10</a:t>
             </a:r>
@@ -3886,7 +3785,7 @@
         <p:spPr>
           <a:xfrm>
             <a:off x="502920" y="1005840"/>
-            <a:ext cx="8229240" cy="502560"/>
+            <a:ext cx="8228880" cy="502200"/>
           </a:xfrm>
           <a:prstGeom prst="rect">
             <a:avLst/>
@@ -3941,7 +3840,7 @@
         <p:spPr>
           <a:xfrm>
             <a:off x="502920" y="1463040"/>
-            <a:ext cx="8229240" cy="1096920"/>
+            <a:ext cx="8228880" cy="1096560"/>
           </a:xfrm>
           <a:prstGeom prst="rect">
             <a:avLst/>
@@ -3996,7 +3895,7 @@
         <p:spPr>
           <a:xfrm>
             <a:off x="502920" y="2578680"/>
-            <a:ext cx="8229240" cy="502560"/>
+            <a:ext cx="8228880" cy="502200"/>
           </a:xfrm>
           <a:prstGeom prst="rect">
             <a:avLst/>
@@ -4051,7 +3950,7 @@
         <p:spPr>
           <a:xfrm>
             <a:off x="502920" y="3200400"/>
-            <a:ext cx="2194200" cy="45360"/>
+            <a:ext cx="2193840" cy="45000"/>
           </a:xfrm>
           <a:prstGeom prst="rect">
             <a:avLst/>
@@ -4079,7 +3978,7 @@
         <p:spPr>
           <a:xfrm>
             <a:off x="502920" y="3364920"/>
-            <a:ext cx="7314840" cy="347040"/>
+            <a:ext cx="7314480" cy="346680"/>
           </a:xfrm>
           <a:prstGeom prst="rect">
             <a:avLst/>
@@ -4115,6 +4014,7 @@
                   <a:srgbClr val="64748b"/>
                 </a:solidFill>
                 <a:latin typeface="Calibri"/>
+                <a:ea typeface="DejaVu Sans"/>
               </a:rPr>
               <a:t>LangChain  •  OpenAI  •  Streamlit  •  Python</a:t>
             </a:r>
@@ -4133,7 +4033,7 @@
         <p:spPr>
           <a:xfrm>
             <a:off x="0" y="4773240"/>
-            <a:ext cx="9143640" cy="370080"/>
+            <a:ext cx="9143280" cy="369720"/>
           </a:xfrm>
           <a:prstGeom prst="rect">
             <a:avLst/>
@@ -4161,7 +4061,7 @@
         <p:spPr>
           <a:xfrm>
             <a:off x="365760" y="4773240"/>
-            <a:ext cx="8412120" cy="370080"/>
+            <a:ext cx="8411760" cy="369720"/>
           </a:xfrm>
           <a:prstGeom prst="rect">
             <a:avLst/>
@@ -4197,6 +4097,7 @@
                   <a:srgbClr val="64748b"/>
                 </a:solidFill>
                 <a:latin typeface="Calibri"/>
+                <a:ea typeface="DejaVu Sans"/>
               </a:rPr>
               <a:t>LangChain Prompt Engineering — Complete Series</a:t>
             </a:r>
@@ -4245,14 +4146,14 @@
       </p:grpSpPr>
       <p:sp>
         <p:nvSpPr>
-          <p:cNvPr id="262" name="Shape 0"/>
+          <p:cNvPr id="261" name="Shape 0"/>
           <p:cNvSpPr/>
           <p:nvPr/>
         </p:nvSpPr>
         <p:spPr>
           <a:xfrm>
             <a:off x="0" y="0"/>
-            <a:ext cx="9143640" cy="822600"/>
+            <a:ext cx="9143280" cy="822240"/>
           </a:xfrm>
           <a:prstGeom prst="rect">
             <a:avLst/>
@@ -4273,14 +4174,14 @@
       </p:sp>
       <p:sp>
         <p:nvSpPr>
-          <p:cNvPr id="263" name="Text 1"/>
+          <p:cNvPr id="262" name="Text 1"/>
           <p:cNvSpPr/>
           <p:nvPr/>
         </p:nvSpPr>
         <p:spPr>
           <a:xfrm>
             <a:off x="411480" y="0"/>
-            <a:ext cx="8320680" cy="822600"/>
+            <a:ext cx="8320320" cy="822240"/>
           </a:xfrm>
           <a:prstGeom prst="rect">
             <a:avLst/>
@@ -4316,6 +4217,7 @@
                   <a:srgbClr val="ffffff"/>
                 </a:solidFill>
                 <a:latin typeface="Calibri"/>
+                <a:ea typeface="DejaVu Sans"/>
               </a:rPr>
               <a:t>Static Prompts vs Dynamic Prompt Templates</a:t>
             </a:r>
@@ -4327,14 +4229,14 @@
       </p:sp>
       <p:sp>
         <p:nvSpPr>
-          <p:cNvPr id="264" name="Shape 2"/>
+          <p:cNvPr id="263" name="Shape 2"/>
           <p:cNvSpPr/>
           <p:nvPr/>
         </p:nvSpPr>
         <p:spPr>
           <a:xfrm>
             <a:off x="292680" y="932760"/>
-            <a:ext cx="4132800" cy="3913200"/>
+            <a:ext cx="4132440" cy="3912840"/>
           </a:xfrm>
           <a:prstGeom prst="rect">
             <a:avLst/>
@@ -4362,14 +4264,14 @@
       </p:sp>
       <p:sp>
         <p:nvSpPr>
-          <p:cNvPr id="265" name="Shape 3"/>
+          <p:cNvPr id="264" name="Shape 3"/>
           <p:cNvSpPr/>
           <p:nvPr/>
         </p:nvSpPr>
         <p:spPr>
           <a:xfrm>
             <a:off x="292680" y="932760"/>
-            <a:ext cx="4132800" cy="475200"/>
+            <a:ext cx="4132440" cy="474840"/>
           </a:xfrm>
           <a:prstGeom prst="rect">
             <a:avLst/>
@@ -4390,14 +4292,14 @@
       </p:sp>
       <p:sp>
         <p:nvSpPr>
-          <p:cNvPr id="266" name="Text 4"/>
+          <p:cNvPr id="265" name="Text 4"/>
           <p:cNvSpPr/>
           <p:nvPr/>
         </p:nvSpPr>
         <p:spPr>
           <a:xfrm>
             <a:off x="411480" y="932760"/>
-            <a:ext cx="3949920" cy="475200"/>
+            <a:ext cx="3949560" cy="474840"/>
           </a:xfrm>
           <a:prstGeom prst="rect">
             <a:avLst/>
@@ -4433,6 +4335,7 @@
                   <a:srgbClr val="ffffff"/>
                 </a:solidFill>
                 <a:latin typeface="Calibri"/>
+                <a:ea typeface="DejaVu Sans"/>
               </a:rPr>
               <a:t>❌  </a:t>
             </a:r>
@@ -4442,6 +4345,7 @@
                   <a:srgbClr val="ffffff"/>
                 </a:solidFill>
                 <a:latin typeface="Calibri"/>
+                <a:ea typeface="DejaVu Sans"/>
               </a:rPr>
               <a:t>Static Prompts</a:t>
             </a:r>
@@ -4453,14 +4357,14 @@
       </p:sp>
       <p:sp>
         <p:nvSpPr>
-          <p:cNvPr id="267" name="Text 5"/>
+          <p:cNvPr id="266" name="Text 5"/>
           <p:cNvSpPr/>
           <p:nvPr/>
         </p:nvSpPr>
         <p:spPr>
           <a:xfrm>
             <a:off x="457200" y="1508760"/>
-            <a:ext cx="3821760" cy="1508400"/>
+            <a:ext cx="3821400" cy="1508040"/>
           </a:xfrm>
           <a:prstGeom prst="rect">
             <a:avLst/>
@@ -4491,19 +4395,20 @@
               <a:buClr>
                 <a:srgbClr val="1e293b"/>
               </a:buClr>
-              <a:buFont typeface="Symbol" charset="2"/>
+              <a:buFont typeface="Symbol"/>
               <a:buChar char=""/>
             </a:pPr>
             <a:r>
-              <a:rPr b="0" lang="en-US" sz="1100" spc="-1" strike="noStrike">
+              <a:rPr b="0" lang="en-US" sz="1000" spc="-1" strike="noStrike">
                 <a:solidFill>
                   <a:srgbClr val="1e293b"/>
                 </a:solidFill>
                 <a:latin typeface="Calibri"/>
+                <a:ea typeface="DejaVu Sans"/>
               </a:rPr>
               <a:t>User writes the full prompt text freely</a:t>
             </a:r>
-            <a:endParaRPr b="0" lang="en-IN" sz="1100" spc="-1" strike="noStrike">
+            <a:endParaRPr b="0" lang="en-IN" sz="1000" spc="-1" strike="noStrike">
               <a:latin typeface="Arial"/>
             </a:endParaRPr>
           </a:p>
@@ -4518,19 +4423,20 @@
               <a:buClr>
                 <a:srgbClr val="1e293b"/>
               </a:buClr>
-              <a:buFont typeface="Symbol" charset="2"/>
+              <a:buFont typeface="Symbol"/>
               <a:buChar char=""/>
             </a:pPr>
             <a:r>
-              <a:rPr b="0" lang="en-US" sz="1100" spc="-1" strike="noStrike">
+              <a:rPr b="0" lang="en-US" sz="1000" spc="-1" strike="noStrike">
                 <a:solidFill>
                   <a:srgbClr val="1e293b"/>
                 </a:solidFill>
                 <a:latin typeface="Calibri"/>
+                <a:ea typeface="DejaVu Sans"/>
               </a:rPr>
               <a:t>No structure, no constraints, no template</a:t>
             </a:r>
-            <a:endParaRPr b="0" lang="en-IN" sz="1100" spc="-1" strike="noStrike">
+            <a:endParaRPr b="0" lang="en-IN" sz="1000" spc="-1" strike="noStrike">
               <a:latin typeface="Arial"/>
             </a:endParaRPr>
           </a:p>
@@ -4545,19 +4451,20 @@
               <a:buClr>
                 <a:srgbClr val="1e293b"/>
               </a:buClr>
-              <a:buFont typeface="Symbol" charset="2"/>
+              <a:buFont typeface="Symbol"/>
               <a:buChar char=""/>
             </a:pPr>
             <a:r>
-              <a:rPr b="0" lang="en-US" sz="1100" spc="-1" strike="noStrike">
+              <a:rPr b="0" lang="en-US" sz="1000" spc="-1" strike="noStrike">
                 <a:solidFill>
                   <a:srgbClr val="1e293b"/>
                 </a:solidFill>
                 <a:latin typeface="Calibri"/>
+                <a:ea typeface="DejaVu Sans"/>
               </a:rPr>
               <a:t>Risk of typos, unclear instructions</a:t>
             </a:r>
-            <a:endParaRPr b="0" lang="en-IN" sz="1100" spc="-1" strike="noStrike">
+            <a:endParaRPr b="0" lang="en-IN" sz="1000" spc="-1" strike="noStrike">
               <a:latin typeface="Arial"/>
             </a:endParaRPr>
           </a:p>
@@ -4572,19 +4479,20 @@
               <a:buClr>
                 <a:srgbClr val="1e293b"/>
               </a:buClr>
-              <a:buFont typeface="Symbol" charset="2"/>
+              <a:buFont typeface="Symbol"/>
               <a:buChar char=""/>
             </a:pPr>
             <a:r>
-              <a:rPr b="0" lang="en-US" sz="1100" spc="-1" strike="noStrike">
+              <a:rPr b="0" lang="en-US" sz="1000" spc="-1" strike="noStrike">
                 <a:solidFill>
                   <a:srgbClr val="1e293b"/>
                 </a:solidFill>
                 <a:latin typeface="Calibri"/>
+                <a:ea typeface="DejaVu Sans"/>
               </a:rPr>
               <a:t>Unpredictable output quality every time</a:t>
             </a:r>
-            <a:endParaRPr b="0" lang="en-IN" sz="1100" spc="-1" strike="noStrike">
+            <a:endParaRPr b="0" lang="en-IN" sz="1000" spc="-1" strike="noStrike">
               <a:latin typeface="Arial"/>
             </a:endParaRPr>
           </a:p>
@@ -4599,34 +4507,35 @@
               <a:buClr>
                 <a:srgbClr val="1e293b"/>
               </a:buClr>
-              <a:buFont typeface="Symbol" charset="2"/>
+              <a:buFont typeface="Symbol"/>
               <a:buChar char=""/>
             </a:pPr>
             <a:r>
-              <a:rPr b="0" lang="en-US" sz="1100" spc="-1" strike="noStrike">
+              <a:rPr b="0" lang="en-US" sz="1000" spc="-1" strike="noStrike">
                 <a:solidFill>
                   <a:srgbClr val="1e293b"/>
                 </a:solidFill>
                 <a:latin typeface="Calibri"/>
+                <a:ea typeface="DejaVu Sans"/>
               </a:rPr>
               <a:t>Hard to maintain or improve over time</a:t>
             </a:r>
-            <a:endParaRPr b="0" lang="en-IN" sz="1100" spc="-1" strike="noStrike">
-              <a:latin typeface="Arial"/>
-            </a:endParaRPr>
-          </a:p>
-        </p:txBody>
-      </p:sp>
-      <p:sp>
-        <p:nvSpPr>
-          <p:cNvPr id="268" name="Shape 6"/>
+            <a:endParaRPr b="0" lang="en-IN" sz="1000" spc="-1" strike="noStrike">
+              <a:latin typeface="Arial"/>
+            </a:endParaRPr>
+          </a:p>
+        </p:txBody>
+      </p:sp>
+      <p:sp>
+        <p:nvSpPr>
+          <p:cNvPr id="267" name="Shape 6"/>
           <p:cNvSpPr/>
           <p:nvPr/>
         </p:nvSpPr>
         <p:spPr>
           <a:xfrm>
             <a:off x="411480" y="3108960"/>
-            <a:ext cx="3885840" cy="529920"/>
+            <a:ext cx="3885480" cy="529560"/>
           </a:xfrm>
           <a:prstGeom prst="rect">
             <a:avLst/>
@@ -4647,14 +4556,14 @@
       </p:sp>
       <p:sp>
         <p:nvSpPr>
-          <p:cNvPr id="269" name="Text 7"/>
+          <p:cNvPr id="268" name="Text 7"/>
           <p:cNvSpPr/>
           <p:nvPr/>
         </p:nvSpPr>
         <p:spPr>
           <a:xfrm>
             <a:off x="502920" y="3108960"/>
-            <a:ext cx="3730320" cy="529920"/>
+            <a:ext cx="3729960" cy="529560"/>
           </a:xfrm>
           <a:prstGeom prst="rect">
             <a:avLst/>
@@ -4692,7 +4601,7 @@
                 <a:latin typeface="Consolas"/>
                 <a:ea typeface="Consolas"/>
               </a:rPr>
-              <a:t>"Summarize the Attention paper pls"</a:t>
+              <a:t>"Provide report on climate Change"</a:t>
             </a:r>
             <a:endParaRPr b="0" lang="en-IN" sz="1000" spc="-1" strike="noStrike">
               <a:latin typeface="Arial"/>
@@ -4702,14 +4611,14 @@
       </p:sp>
       <p:sp>
         <p:nvSpPr>
-          <p:cNvPr id="270" name="Text 8"/>
+          <p:cNvPr id="269" name="Text 8"/>
           <p:cNvSpPr/>
           <p:nvPr/>
         </p:nvSpPr>
         <p:spPr>
           <a:xfrm>
             <a:off x="438840" y="3730680"/>
-            <a:ext cx="3858480" cy="319680"/>
+            <a:ext cx="3858120" cy="319320"/>
           </a:xfrm>
           <a:prstGeom prst="rect">
             <a:avLst/>
@@ -4745,6 +4654,7 @@
                   <a:srgbClr val="ef4444"/>
                 </a:solidFill>
                 <a:latin typeface="Calibri"/>
+                <a:ea typeface="DejaVu Sans"/>
               </a:rPr>
               <a:t>⚠  </a:t>
             </a:r>
@@ -4754,6 +4664,7 @@
                   <a:srgbClr val="ef4444"/>
                 </a:solidFill>
                 <a:latin typeface="Calibri"/>
+                <a:ea typeface="DejaVu Sans"/>
               </a:rPr>
               <a:t>Inconsistent — user controls everything!</a:t>
             </a:r>
@@ -4765,14 +4676,14 @@
       </p:sp>
       <p:sp>
         <p:nvSpPr>
-          <p:cNvPr id="271" name="Shape 9"/>
+          <p:cNvPr id="270" name="Shape 9"/>
           <p:cNvSpPr/>
           <p:nvPr/>
         </p:nvSpPr>
         <p:spPr>
           <a:xfrm>
             <a:off x="411480" y="4133160"/>
-            <a:ext cx="3885840" cy="566640"/>
+            <a:ext cx="3885480" cy="566280"/>
           </a:xfrm>
           <a:prstGeom prst="rect">
             <a:avLst/>
@@ -4793,14 +4704,14 @@
       </p:sp>
       <p:sp>
         <p:nvSpPr>
-          <p:cNvPr id="272" name="Text 10"/>
+          <p:cNvPr id="271" name="Text 10"/>
           <p:cNvSpPr/>
           <p:nvPr/>
         </p:nvSpPr>
         <p:spPr>
           <a:xfrm>
             <a:off x="502920" y="4133160"/>
-            <a:ext cx="3730320" cy="566640"/>
+            <a:ext cx="3729960" cy="566280"/>
           </a:xfrm>
           <a:prstGeom prst="rect">
             <a:avLst/>
@@ -4836,6 +4747,7 @@
                   <a:srgbClr val="ef4444"/>
                 </a:solidFill>
                 <a:latin typeface="Calibri"/>
+                <a:ea typeface="DejaVu Sans"/>
               </a:rPr>
               <a:t>❌ </a:t>
             </a:r>
@@ -4845,6 +4757,7 @@
                   <a:srgbClr val="ef4444"/>
                 </a:solidFill>
                 <a:latin typeface="Calibri"/>
+                <a:ea typeface="DejaVu Sans"/>
               </a:rPr>
               <a:t>No validation   ❌ No structure   ❌ No reuse</a:t>
             </a:r>
@@ -4856,14 +4769,14 @@
       </p:sp>
       <p:sp>
         <p:nvSpPr>
-          <p:cNvPr id="273" name="Shape 11"/>
+          <p:cNvPr id="272" name="Shape 11"/>
           <p:cNvSpPr/>
           <p:nvPr/>
         </p:nvSpPr>
         <p:spPr>
           <a:xfrm>
             <a:off x="4718160" y="932760"/>
-            <a:ext cx="4132800" cy="3913200"/>
+            <a:ext cx="4132440" cy="3912840"/>
           </a:xfrm>
           <a:prstGeom prst="rect">
             <a:avLst/>
@@ -4891,14 +4804,14 @@
       </p:sp>
       <p:sp>
         <p:nvSpPr>
-          <p:cNvPr id="274" name="Shape 12"/>
+          <p:cNvPr id="273" name="Shape 12"/>
           <p:cNvSpPr/>
           <p:nvPr/>
         </p:nvSpPr>
         <p:spPr>
           <a:xfrm>
             <a:off x="4718160" y="932760"/>
-            <a:ext cx="4132800" cy="475200"/>
+            <a:ext cx="4132440" cy="474840"/>
           </a:xfrm>
           <a:prstGeom prst="rect">
             <a:avLst/>
@@ -4919,14 +4832,14 @@
       </p:sp>
       <p:sp>
         <p:nvSpPr>
-          <p:cNvPr id="275" name="Text 13"/>
+          <p:cNvPr id="274" name="Text 13"/>
           <p:cNvSpPr/>
           <p:nvPr/>
         </p:nvSpPr>
         <p:spPr>
           <a:xfrm>
             <a:off x="4827960" y="932760"/>
-            <a:ext cx="3949920" cy="475200"/>
+            <a:ext cx="3949560" cy="474840"/>
           </a:xfrm>
           <a:prstGeom prst="rect">
             <a:avLst/>
@@ -4962,6 +4875,7 @@
                   <a:srgbClr val="ffffff"/>
                 </a:solidFill>
                 <a:latin typeface="Calibri"/>
+                <a:ea typeface="DejaVu Sans"/>
               </a:rPr>
               <a:t>✓  </a:t>
             </a:r>
@@ -4971,6 +4885,7 @@
                   <a:srgbClr val="ffffff"/>
                 </a:solidFill>
                 <a:latin typeface="Calibri"/>
+                <a:ea typeface="DejaVu Sans"/>
               </a:rPr>
               <a:t>Dynamic Prompt Templates</a:t>
             </a:r>
@@ -4982,14 +4897,14 @@
       </p:sp>
       <p:sp>
         <p:nvSpPr>
-          <p:cNvPr id="276" name="Text 14"/>
+          <p:cNvPr id="275" name="Text 14"/>
           <p:cNvSpPr/>
           <p:nvPr/>
         </p:nvSpPr>
         <p:spPr>
           <a:xfrm>
             <a:off x="4846320" y="1508760"/>
-            <a:ext cx="3821760" cy="1508400"/>
+            <a:ext cx="3821400" cy="1508040"/>
           </a:xfrm>
           <a:prstGeom prst="rect">
             <a:avLst/>
@@ -5020,19 +4935,20 @@
               <a:buClr>
                 <a:srgbClr val="1e293b"/>
               </a:buClr>
-              <a:buFont typeface="Symbol" charset="2"/>
+              <a:buFont typeface="Symbol"/>
               <a:buChar char=""/>
             </a:pPr>
             <a:r>
-              <a:rPr b="0" lang="en-US" sz="1100" spc="-1" strike="noStrike">
+              <a:rPr b="0" lang="en-US" sz="1000" spc="-1" strike="noStrike">
                 <a:solidFill>
                   <a:srgbClr val="1e293b"/>
                 </a:solidFill>
                 <a:latin typeface="Calibri"/>
+                <a:ea typeface="DejaVu Sans"/>
               </a:rPr>
               <a:t>Template defines the structure — user fills slots</a:t>
             </a:r>
-            <a:endParaRPr b="0" lang="en-IN" sz="1100" spc="-1" strike="noStrike">
+            <a:endParaRPr b="0" lang="en-IN" sz="1000" spc="-1" strike="noStrike">
               <a:latin typeface="Arial"/>
             </a:endParaRPr>
           </a:p>
@@ -5047,19 +4963,20 @@
               <a:buClr>
                 <a:srgbClr val="1e293b"/>
               </a:buClr>
-              <a:buFont typeface="Symbol" charset="2"/>
+              <a:buFont typeface="Symbol"/>
               <a:buChar char=""/>
             </a:pPr>
             <a:r>
-              <a:rPr b="0" lang="en-US" sz="1100" spc="-1" strike="noStrike">
+              <a:rPr b="0" lang="en-US" sz="1000" spc="-1" strike="noStrike">
                 <a:solidFill>
                   <a:srgbClr val="1e293b"/>
                 </a:solidFill>
                 <a:latin typeface="Calibri"/>
+                <a:ea typeface="DejaVu Sans"/>
               </a:rPr>
               <a:t>Controlled inputs: dropdowns, text fields</a:t>
             </a:r>
-            <a:endParaRPr b="0" lang="en-IN" sz="1100" spc="-1" strike="noStrike">
+            <a:endParaRPr b="0" lang="en-IN" sz="1000" spc="-1" strike="noStrike">
               <a:latin typeface="Arial"/>
             </a:endParaRPr>
           </a:p>
@@ -5074,19 +4991,20 @@
               <a:buClr>
                 <a:srgbClr val="1e293b"/>
               </a:buClr>
-              <a:buFont typeface="Symbol" charset="2"/>
+              <a:buFont typeface="Symbol"/>
               <a:buChar char=""/>
             </a:pPr>
             <a:r>
-              <a:rPr b="0" lang="en-US" sz="1100" spc="-1" strike="noStrike">
+              <a:rPr b="0" lang="en-US" sz="1000" spc="-1" strike="noStrike">
                 <a:solidFill>
                   <a:srgbClr val="1e293b"/>
                 </a:solidFill>
                 <a:latin typeface="Calibri"/>
+                <a:ea typeface="DejaVu Sans"/>
               </a:rPr>
               <a:t>Consistent format and quality every single time</a:t>
             </a:r>
-            <a:endParaRPr b="0" lang="en-IN" sz="1100" spc="-1" strike="noStrike">
+            <a:endParaRPr b="0" lang="en-IN" sz="1000" spc="-1" strike="noStrike">
               <a:latin typeface="Arial"/>
             </a:endParaRPr>
           </a:p>
@@ -5101,19 +5019,20 @@
               <a:buClr>
                 <a:srgbClr val="1e293b"/>
               </a:buClr>
-              <a:buFont typeface="Symbol" charset="2"/>
+              <a:buFont typeface="Symbol"/>
               <a:buChar char=""/>
             </a:pPr>
             <a:r>
-              <a:rPr b="0" lang="en-US" sz="1100" spc="-1" strike="noStrike">
+              <a:rPr b="0" lang="en-US" sz="1000" spc="-1" strike="noStrike">
                 <a:solidFill>
                   <a:srgbClr val="1e293b"/>
                 </a:solidFill>
                 <a:latin typeface="Calibri"/>
+                <a:ea typeface="DejaVu Sans"/>
               </a:rPr>
               <a:t>Easy to test, improve, and reuse across projects</a:t>
             </a:r>
-            <a:endParaRPr b="0" lang="en-IN" sz="1100" spc="-1" strike="noStrike">
+            <a:endParaRPr b="0" lang="en-IN" sz="1000" spc="-1" strike="noStrike">
               <a:latin typeface="Arial"/>
             </a:endParaRPr>
           </a:p>
@@ -5128,17 +5047,28 @@
               <a:buClr>
                 <a:srgbClr val="1e293b"/>
               </a:buClr>
-              <a:buFont typeface="Symbol" charset="2"/>
+              <a:buFont typeface="Symbol"/>
               <a:buChar char=""/>
             </a:pPr>
             <a:r>
+              <a:rPr b="0" lang="en-US" sz="1000" spc="-1" strike="noStrike">
+                <a:solidFill>
+                  <a:srgbClr val="1e293b"/>
+                </a:solidFill>
+                <a:latin typeface="Calibri"/>
+                <a:ea typeface="DejaVu Sans"/>
+              </a:rPr>
+              <a:t>LangChain validates placeholders</a:t>
+            </a:r>
+            <a:r>
               <a:rPr b="0" lang="en-US" sz="1100" spc="-1" strike="noStrike">
                 <a:solidFill>
                   <a:srgbClr val="1e293b"/>
                 </a:solidFill>
                 <a:latin typeface="Calibri"/>
-              </a:rPr>
-              <a:t>LangChain validates placeholders automatically</a:t>
+                <a:ea typeface="DejaVu Sans"/>
+              </a:rPr>
+              <a:t> automatically</a:t>
             </a:r>
             <a:endParaRPr b="0" lang="en-IN" sz="1100" spc="-1" strike="noStrike">
               <a:latin typeface="Arial"/>
@@ -5148,14 +5078,14 @@
       </p:sp>
       <p:sp>
         <p:nvSpPr>
-          <p:cNvPr id="277" name="Shape 15"/>
+          <p:cNvPr id="276" name="Shape 15"/>
           <p:cNvSpPr/>
           <p:nvPr/>
         </p:nvSpPr>
         <p:spPr>
           <a:xfrm>
             <a:off x="4827960" y="3108960"/>
-            <a:ext cx="3885840" cy="529920"/>
+            <a:ext cx="3885480" cy="529560"/>
           </a:xfrm>
           <a:prstGeom prst="rect">
             <a:avLst/>
@@ -5176,14 +5106,14 @@
       </p:sp>
       <p:sp>
         <p:nvSpPr>
-          <p:cNvPr id="278" name="Text 16"/>
+          <p:cNvPr id="277" name="Text 16"/>
           <p:cNvSpPr/>
           <p:nvPr/>
         </p:nvSpPr>
         <p:spPr>
           <a:xfrm>
             <a:off x="4919400" y="3108960"/>
-            <a:ext cx="3730320" cy="529920"/>
+            <a:ext cx="3729960" cy="529560"/>
           </a:xfrm>
           <a:prstGeom prst="rect">
             <a:avLst/>
@@ -5221,7 +5151,17 @@
                 <a:latin typeface="Consolas"/>
                 <a:ea typeface="Consolas"/>
               </a:rPr>
-              <a:t>"Summarise {paper_name} in {style} style"</a:t>
+              <a:t>"</a:t>
+            </a:r>
+            <a:r>
+              <a:rPr b="0" lang="en-US" sz="1000" spc="-1" strike="noStrike">
+                <a:solidFill>
+                  <a:srgbClr val="7dd3fc"/>
+                </a:solidFill>
+                <a:latin typeface="Consolas"/>
+                <a:ea typeface="Consolas"/>
+              </a:rPr>
+              <a:t>Provide {short} report on climate Change {technial} way"</a:t>
             </a:r>
             <a:endParaRPr b="0" lang="en-IN" sz="1000" spc="-1" strike="noStrike">
               <a:latin typeface="Arial"/>
@@ -5231,14 +5171,14 @@
       </p:sp>
       <p:sp>
         <p:nvSpPr>
-          <p:cNvPr id="279" name="Text 17"/>
+          <p:cNvPr id="278" name="Text 17"/>
           <p:cNvSpPr/>
           <p:nvPr/>
         </p:nvSpPr>
         <p:spPr>
           <a:xfrm>
             <a:off x="4864680" y="3730680"/>
-            <a:ext cx="3858480" cy="319680"/>
+            <a:ext cx="3858120" cy="319320"/>
           </a:xfrm>
           <a:prstGeom prst="rect">
             <a:avLst/>
@@ -5274,6 +5214,7 @@
                   <a:srgbClr val="10b981"/>
                 </a:solidFill>
                 <a:latin typeface="Calibri"/>
+                <a:ea typeface="DejaVu Sans"/>
               </a:rPr>
               <a:t>✓  </a:t>
             </a:r>
@@ -5283,6 +5224,7 @@
                   <a:srgbClr val="10b981"/>
                 </a:solidFill>
                 <a:latin typeface="Calibri"/>
+                <a:ea typeface="DejaVu Sans"/>
               </a:rPr>
               <a:t>Predictable — template controls structure!</a:t>
             </a:r>
@@ -5294,14 +5236,14 @@
       </p:sp>
       <p:sp>
         <p:nvSpPr>
-          <p:cNvPr id="280" name="Shape 18"/>
+          <p:cNvPr id="279" name="Shape 18"/>
           <p:cNvSpPr/>
           <p:nvPr/>
         </p:nvSpPr>
         <p:spPr>
           <a:xfrm>
             <a:off x="4827960" y="4133160"/>
-            <a:ext cx="3885840" cy="566640"/>
+            <a:ext cx="3885480" cy="566280"/>
           </a:xfrm>
           <a:prstGeom prst="rect">
             <a:avLst/>
@@ -5322,14 +5264,14 @@
       </p:sp>
       <p:sp>
         <p:nvSpPr>
-          <p:cNvPr id="281" name="Text 19"/>
+          <p:cNvPr id="280" name="Text 19"/>
           <p:cNvSpPr/>
           <p:nvPr/>
         </p:nvSpPr>
         <p:spPr>
           <a:xfrm>
             <a:off x="4919400" y="4133160"/>
-            <a:ext cx="3730320" cy="566640"/>
+            <a:ext cx="3729960" cy="566280"/>
           </a:xfrm>
           <a:prstGeom prst="rect">
             <a:avLst/>
@@ -5365,6 +5307,7 @@
                   <a:srgbClr val="10b981"/>
                 </a:solidFill>
                 <a:latin typeface="Calibri"/>
+                <a:ea typeface="DejaVu Sans"/>
               </a:rPr>
               <a:t>✅ </a:t>
             </a:r>
@@ -5374,6 +5317,7 @@
                   <a:srgbClr val="10b981"/>
                 </a:solidFill>
                 <a:latin typeface="Calibri"/>
+                <a:ea typeface="DejaVu Sans"/>
               </a:rPr>
               <a:t>Validated   ✅ Structured   ✅ Reusable</a:t>
             </a:r>
@@ -5429,7 +5373,7 @@
         <p:spPr>
           <a:xfrm>
             <a:off x="0" y="0"/>
-            <a:ext cx="9143640" cy="822600"/>
+            <a:ext cx="9143280" cy="822240"/>
           </a:xfrm>
           <a:prstGeom prst="rect">
             <a:avLst/>
@@ -5457,7 +5401,7 @@
         <p:spPr>
           <a:xfrm>
             <a:off x="411480" y="0"/>
-            <a:ext cx="8320680" cy="822600"/>
+            <a:ext cx="8320320" cy="822240"/>
           </a:xfrm>
           <a:prstGeom prst="rect">
             <a:avLst/>
@@ -5512,7 +5456,7 @@
         <p:spPr>
           <a:xfrm>
             <a:off x="320040" y="1024200"/>
-            <a:ext cx="4205880" cy="840960"/>
+            <a:ext cx="4205520" cy="840600"/>
           </a:xfrm>
           <a:prstGeom prst="rect">
             <a:avLst/>
@@ -5547,7 +5491,7 @@
         <p:spPr>
           <a:xfrm>
             <a:off x="320040" y="1024200"/>
-            <a:ext cx="63720" cy="840960"/>
+            <a:ext cx="63360" cy="840600"/>
           </a:xfrm>
           <a:prstGeom prst="rect">
             <a:avLst/>
@@ -5575,7 +5519,7 @@
         <p:spPr>
           <a:xfrm>
             <a:off x="457200" y="1078920"/>
-            <a:ext cx="438480" cy="273960"/>
+            <a:ext cx="438120" cy="273600"/>
           </a:xfrm>
           <a:prstGeom prst="rect">
             <a:avLst/>
@@ -5611,6 +5555,7 @@
                   <a:srgbClr val="0d9488"/>
                 </a:solidFill>
                 <a:latin typeface="Calibri"/>
+                <a:ea typeface="DejaVu Sans"/>
               </a:rPr>
               <a:t>01</a:t>
             </a:r>
@@ -5629,7 +5574,7 @@
         <p:spPr>
           <a:xfrm>
             <a:off x="457200" y="1298520"/>
-            <a:ext cx="3931560" cy="292320"/>
+            <a:ext cx="3931200" cy="291960"/>
           </a:xfrm>
           <a:prstGeom prst="rect">
             <a:avLst/>
@@ -5665,6 +5610,7 @@
                   <a:srgbClr val="1e293b"/>
                 </a:solidFill>
                 <a:latin typeface="Calibri"/>
+                <a:ea typeface="DejaVu Sans"/>
               </a:rPr>
               <a:t>🌡️ </a:t>
             </a:r>
@@ -5674,6 +5620,7 @@
                   <a:srgbClr val="1e293b"/>
                 </a:solidFill>
                 <a:latin typeface="Calibri"/>
+                <a:ea typeface="DejaVu Sans"/>
               </a:rPr>
               <a:t>Temperature Parameter</a:t>
             </a:r>
@@ -5692,7 +5639,7 @@
         <p:spPr>
           <a:xfrm>
             <a:off x="457200" y="1591200"/>
-            <a:ext cx="3931560" cy="237240"/>
+            <a:ext cx="3931200" cy="236880"/>
           </a:xfrm>
           <a:prstGeom prst="rect">
             <a:avLst/>
@@ -5728,6 +5675,7 @@
                   <a:srgbClr val="64748b"/>
                 </a:solidFill>
                 <a:latin typeface="Calibri"/>
+                <a:ea typeface="DejaVu Sans"/>
               </a:rPr>
               <a:t>Control output randomness — from deterministic to creative</a:t>
             </a:r>
@@ -5746,7 +5694,7 @@
         <p:spPr>
           <a:xfrm>
             <a:off x="4800600" y="1024200"/>
-            <a:ext cx="4205880" cy="840960"/>
+            <a:ext cx="4205520" cy="840600"/>
           </a:xfrm>
           <a:prstGeom prst="rect">
             <a:avLst/>
@@ -5781,7 +5729,7 @@
         <p:spPr>
           <a:xfrm>
             <a:off x="4800600" y="1024200"/>
-            <a:ext cx="63720" cy="840960"/>
+            <a:ext cx="63360" cy="840600"/>
           </a:xfrm>
           <a:prstGeom prst="rect">
             <a:avLst/>
@@ -5809,7 +5757,7 @@
         <p:spPr>
           <a:xfrm>
             <a:off x="4937760" y="1078920"/>
-            <a:ext cx="438480" cy="273960"/>
+            <a:ext cx="438120" cy="273600"/>
           </a:xfrm>
           <a:prstGeom prst="rect">
             <a:avLst/>
@@ -5845,6 +5793,7 @@
                   <a:srgbClr val="0d9488"/>
                 </a:solidFill>
                 <a:latin typeface="Calibri"/>
+                <a:ea typeface="DejaVu Sans"/>
               </a:rPr>
               <a:t>02</a:t>
             </a:r>
@@ -5863,7 +5812,7 @@
         <p:spPr>
           <a:xfrm>
             <a:off x="4937760" y="1298520"/>
-            <a:ext cx="3931560" cy="292320"/>
+            <a:ext cx="3931200" cy="291960"/>
           </a:xfrm>
           <a:prstGeom prst="rect">
             <a:avLst/>
@@ -5899,6 +5848,7 @@
                   <a:srgbClr val="1e293b"/>
                 </a:solidFill>
                 <a:latin typeface="Calibri"/>
+                <a:ea typeface="DejaVu Sans"/>
               </a:rPr>
               <a:t>💬 </a:t>
             </a:r>
@@ -5908,6 +5858,7 @@
                   <a:srgbClr val="1e293b"/>
                 </a:solidFill>
                 <a:latin typeface="Calibri"/>
+                <a:ea typeface="DejaVu Sans"/>
               </a:rPr>
               <a:t>Understanding Prompts</a:t>
             </a:r>
@@ -5926,7 +5877,7 @@
         <p:spPr>
           <a:xfrm>
             <a:off x="4937760" y="1591200"/>
-            <a:ext cx="3931560" cy="237240"/>
+            <a:ext cx="3931200" cy="236880"/>
           </a:xfrm>
           <a:prstGeom prst="rect">
             <a:avLst/>
@@ -5962,6 +5913,7 @@
                   <a:srgbClr val="64748b"/>
                 </a:solidFill>
                 <a:latin typeface="Calibri"/>
+                <a:ea typeface="DejaVu Sans"/>
               </a:rPr>
               <a:t>Text, image and multimodal inputs explained</a:t>
             </a:r>
@@ -5980,7 +5932,7 @@
         <p:spPr>
           <a:xfrm>
             <a:off x="320040" y="2011680"/>
-            <a:ext cx="4205880" cy="840960"/>
+            <a:ext cx="4205520" cy="840600"/>
           </a:xfrm>
           <a:prstGeom prst="rect">
             <a:avLst/>
@@ -6015,7 +5967,7 @@
         <p:spPr>
           <a:xfrm>
             <a:off x="320040" y="2011680"/>
-            <a:ext cx="63720" cy="840960"/>
+            <a:ext cx="63360" cy="840600"/>
           </a:xfrm>
           <a:prstGeom prst="rect">
             <a:avLst/>
@@ -6043,7 +5995,7 @@
         <p:spPr>
           <a:xfrm>
             <a:off x="457200" y="2066400"/>
-            <a:ext cx="438480" cy="273960"/>
+            <a:ext cx="438120" cy="273600"/>
           </a:xfrm>
           <a:prstGeom prst="rect">
             <a:avLst/>
@@ -6079,6 +6031,7 @@
                   <a:srgbClr val="0d9488"/>
                 </a:solidFill>
                 <a:latin typeface="Calibri"/>
+                <a:ea typeface="DejaVu Sans"/>
               </a:rPr>
               <a:t>03</a:t>
             </a:r>
@@ -6097,7 +6050,7 @@
         <p:spPr>
           <a:xfrm>
             <a:off x="457200" y="2286000"/>
-            <a:ext cx="3931560" cy="292320"/>
+            <a:ext cx="3931200" cy="291960"/>
           </a:xfrm>
           <a:prstGeom prst="rect">
             <a:avLst/>
@@ -6133,6 +6086,7 @@
                   <a:srgbClr val="1e293b"/>
                 </a:solidFill>
                 <a:latin typeface="Calibri"/>
+                <a:ea typeface="DejaVu Sans"/>
               </a:rPr>
               <a:t>⚡ </a:t>
             </a:r>
@@ -6142,6 +6096,7 @@
                   <a:srgbClr val="1e293b"/>
                 </a:solidFill>
                 <a:latin typeface="Calibri"/>
+                <a:ea typeface="DejaVu Sans"/>
               </a:rPr>
               <a:t>Static vs Dynamic Prompts</a:t>
             </a:r>
@@ -6160,7 +6115,7 @@
         <p:spPr>
           <a:xfrm>
             <a:off x="457200" y="2578680"/>
-            <a:ext cx="3931560" cy="237240"/>
+            <a:ext cx="3931200" cy="236880"/>
           </a:xfrm>
           <a:prstGeom prst="rect">
             <a:avLst/>
@@ -6196,6 +6151,7 @@
                   <a:srgbClr val="64748b"/>
                 </a:solidFill>
                 <a:latin typeface="Calibri"/>
+                <a:ea typeface="DejaVu Sans"/>
               </a:rPr>
               <a:t>Why raw strings fail in real production apps</a:t>
             </a:r>
@@ -6214,7 +6170,7 @@
         <p:spPr>
           <a:xfrm>
             <a:off x="4800600" y="2011680"/>
-            <a:ext cx="4205880" cy="840960"/>
+            <a:ext cx="4205520" cy="840600"/>
           </a:xfrm>
           <a:prstGeom prst="rect">
             <a:avLst/>
@@ -6249,7 +6205,7 @@
         <p:spPr>
           <a:xfrm>
             <a:off x="4800600" y="2011680"/>
-            <a:ext cx="63720" cy="840960"/>
+            <a:ext cx="63360" cy="840600"/>
           </a:xfrm>
           <a:prstGeom prst="rect">
             <a:avLst/>
@@ -6277,7 +6233,7 @@
         <p:spPr>
           <a:xfrm>
             <a:off x="4937760" y="2066400"/>
-            <a:ext cx="438480" cy="273960"/>
+            <a:ext cx="438120" cy="273600"/>
           </a:xfrm>
           <a:prstGeom prst="rect">
             <a:avLst/>
@@ -6313,6 +6269,7 @@
                   <a:srgbClr val="0d9488"/>
                 </a:solidFill>
                 <a:latin typeface="Calibri"/>
+                <a:ea typeface="DejaVu Sans"/>
               </a:rPr>
               <a:t>04</a:t>
             </a:r>
@@ -6331,7 +6288,7 @@
         <p:spPr>
           <a:xfrm>
             <a:off x="4937760" y="2286000"/>
-            <a:ext cx="3931560" cy="292320"/>
+            <a:ext cx="3931200" cy="291960"/>
           </a:xfrm>
           <a:prstGeom prst="rect">
             <a:avLst/>
@@ -6367,6 +6324,7 @@
                   <a:srgbClr val="1e293b"/>
                 </a:solidFill>
                 <a:latin typeface="Calibri"/>
+                <a:ea typeface="DejaVu Sans"/>
               </a:rPr>
               <a:t>🔧 </a:t>
             </a:r>
@@ -6376,6 +6334,7 @@
                   <a:srgbClr val="1e293b"/>
                 </a:solidFill>
                 <a:latin typeface="Calibri"/>
+                <a:ea typeface="DejaVu Sans"/>
               </a:rPr>
               <a:t>Prompt Templates</a:t>
             </a:r>
@@ -6394,7 +6353,7 @@
         <p:spPr>
           <a:xfrm>
             <a:off x="4937760" y="2578680"/>
-            <a:ext cx="3931560" cy="237240"/>
+            <a:ext cx="3931200" cy="236880"/>
           </a:xfrm>
           <a:prstGeom prst="rect">
             <a:avLst/>
@@ -6430,6 +6389,7 @@
                   <a:srgbClr val="64748b"/>
                 </a:solidFill>
                 <a:latin typeface="Calibri"/>
+                <a:ea typeface="DejaVu Sans"/>
               </a:rPr>
               <a:t>PromptTemplate: validation, reuse, and chains</a:t>
             </a:r>
@@ -6448,7 +6408,7 @@
         <p:spPr>
           <a:xfrm>
             <a:off x="320040" y="2999160"/>
-            <a:ext cx="4205880" cy="840960"/>
+            <a:ext cx="4205520" cy="840600"/>
           </a:xfrm>
           <a:prstGeom prst="rect">
             <a:avLst/>
@@ -6483,7 +6443,7 @@
         <p:spPr>
           <a:xfrm>
             <a:off x="320040" y="2999160"/>
-            <a:ext cx="63720" cy="840960"/>
+            <a:ext cx="63360" cy="840600"/>
           </a:xfrm>
           <a:prstGeom prst="rect">
             <a:avLst/>
@@ -6511,7 +6471,7 @@
         <p:spPr>
           <a:xfrm>
             <a:off x="457200" y="3054240"/>
-            <a:ext cx="438480" cy="273960"/>
+            <a:ext cx="438120" cy="273600"/>
           </a:xfrm>
           <a:prstGeom prst="rect">
             <a:avLst/>
@@ -6547,6 +6507,7 @@
                   <a:srgbClr val="0d9488"/>
                 </a:solidFill>
                 <a:latin typeface="Calibri"/>
+                <a:ea typeface="DejaVu Sans"/>
               </a:rPr>
               <a:t>05</a:t>
             </a:r>
@@ -6565,7 +6526,7 @@
         <p:spPr>
           <a:xfrm>
             <a:off x="457200" y="3273480"/>
-            <a:ext cx="3931560" cy="292320"/>
+            <a:ext cx="3931200" cy="291960"/>
           </a:xfrm>
           <a:prstGeom prst="rect">
             <a:avLst/>
@@ -6601,6 +6562,7 @@
                   <a:srgbClr val="1e293b"/>
                 </a:solidFill>
                 <a:latin typeface="Calibri"/>
+                <a:ea typeface="DejaVu Sans"/>
               </a:rPr>
               <a:t>🤖 </a:t>
             </a:r>
@@ -6610,6 +6572,7 @@
                   <a:srgbClr val="1e293b"/>
                 </a:solidFill>
                 <a:latin typeface="Calibri"/>
+                <a:ea typeface="DejaVu Sans"/>
               </a:rPr>
               <a:t>Building Chat Applications</a:t>
             </a:r>
@@ -6628,7 +6591,7 @@
         <p:spPr>
           <a:xfrm>
             <a:off x="457200" y="3566160"/>
-            <a:ext cx="3931560" cy="237240"/>
+            <a:ext cx="3931200" cy="236880"/>
           </a:xfrm>
           <a:prstGeom prst="rect">
             <a:avLst/>
@@ -6664,6 +6627,7 @@
                   <a:srgbClr val="64748b"/>
                 </a:solidFill>
                 <a:latin typeface="Calibri"/>
+                <a:ea typeface="DejaVu Sans"/>
               </a:rPr>
               <a:t>Add memory with proper chat history management</a:t>
             </a:r>
@@ -6682,7 +6646,7 @@
         <p:spPr>
           <a:xfrm>
             <a:off x="4800600" y="2999160"/>
-            <a:ext cx="4205880" cy="840960"/>
+            <a:ext cx="4205520" cy="840600"/>
           </a:xfrm>
           <a:prstGeom prst="rect">
             <a:avLst/>
@@ -6717,7 +6681,7 @@
         <p:spPr>
           <a:xfrm>
             <a:off x="4800600" y="2999160"/>
-            <a:ext cx="63720" cy="840960"/>
+            <a:ext cx="63360" cy="840600"/>
           </a:xfrm>
           <a:prstGeom prst="rect">
             <a:avLst/>
@@ -6745,7 +6709,7 @@
         <p:spPr>
           <a:xfrm>
             <a:off x="4937760" y="3054240"/>
-            <a:ext cx="438480" cy="273960"/>
+            <a:ext cx="438120" cy="273600"/>
           </a:xfrm>
           <a:prstGeom prst="rect">
             <a:avLst/>
@@ -6781,6 +6745,7 @@
                   <a:srgbClr val="0d9488"/>
                 </a:solidFill>
                 <a:latin typeface="Calibri"/>
+                <a:ea typeface="DejaVu Sans"/>
               </a:rPr>
               <a:t>06</a:t>
             </a:r>
@@ -6799,7 +6764,7 @@
         <p:spPr>
           <a:xfrm>
             <a:off x="4937760" y="3273480"/>
-            <a:ext cx="3931560" cy="292320"/>
+            <a:ext cx="3931200" cy="291960"/>
           </a:xfrm>
           <a:prstGeom prst="rect">
             <a:avLst/>
@@ -6835,6 +6800,7 @@
                   <a:srgbClr val="1e293b"/>
                 </a:solidFill>
                 <a:latin typeface="Calibri"/>
+                <a:ea typeface="DejaVu Sans"/>
               </a:rPr>
               <a:t>📨 </a:t>
             </a:r>
@@ -6844,6 +6810,7 @@
                   <a:srgbClr val="1e293b"/>
                 </a:solidFill>
                 <a:latin typeface="Calibri"/>
+                <a:ea typeface="DejaVu Sans"/>
               </a:rPr>
               <a:t>Message Types &amp; Chat History</a:t>
             </a:r>
@@ -6862,7 +6829,7 @@
         <p:spPr>
           <a:xfrm>
             <a:off x="4937760" y="3566160"/>
-            <a:ext cx="3931560" cy="237240"/>
+            <a:ext cx="3931200" cy="236880"/>
           </a:xfrm>
           <a:prstGeom prst="rect">
             <a:avLst/>
@@ -6898,6 +6865,7 @@
                   <a:srgbClr val="64748b"/>
                 </a:solidFill>
                 <a:latin typeface="Calibri"/>
+                <a:ea typeface="DejaVu Sans"/>
               </a:rPr>
               <a:t>SystemMessage, HumanMessage, AIMessage in depth</a:t>
             </a:r>
@@ -6916,7 +6884,7 @@
         <p:spPr>
           <a:xfrm>
             <a:off x="320040" y="3986640"/>
-            <a:ext cx="4205880" cy="840960"/>
+            <a:ext cx="4205520" cy="840600"/>
           </a:xfrm>
           <a:prstGeom prst="rect">
             <a:avLst/>
@@ -6951,7 +6919,7 @@
         <p:spPr>
           <a:xfrm>
             <a:off x="320040" y="3986640"/>
-            <a:ext cx="63720" cy="840960"/>
+            <a:ext cx="63360" cy="840600"/>
           </a:xfrm>
           <a:prstGeom prst="rect">
             <a:avLst/>
@@ -6979,7 +6947,7 @@
         <p:spPr>
           <a:xfrm>
             <a:off x="457200" y="4041720"/>
-            <a:ext cx="438480" cy="273960"/>
+            <a:ext cx="438120" cy="273600"/>
           </a:xfrm>
           <a:prstGeom prst="rect">
             <a:avLst/>
@@ -7015,6 +6983,7 @@
                   <a:srgbClr val="0d9488"/>
                 </a:solidFill>
                 <a:latin typeface="Calibri"/>
+                <a:ea typeface="DejaVu Sans"/>
               </a:rPr>
               <a:t>07</a:t>
             </a:r>
@@ -7033,7 +7002,7 @@
         <p:spPr>
           <a:xfrm>
             <a:off x="457200" y="4260960"/>
-            <a:ext cx="3931560" cy="292320"/>
+            <a:ext cx="3931200" cy="291960"/>
           </a:xfrm>
           <a:prstGeom prst="rect">
             <a:avLst/>
@@ -7069,6 +7038,7 @@
                   <a:srgbClr val="1e293b"/>
                 </a:solidFill>
                 <a:latin typeface="Calibri"/>
+                <a:ea typeface="DejaVu Sans"/>
               </a:rPr>
               <a:t>🗂️ </a:t>
             </a:r>
@@ -7078,6 +7048,7 @@
                   <a:srgbClr val="1e293b"/>
                 </a:solidFill>
                 <a:latin typeface="Calibri"/>
+                <a:ea typeface="DejaVu Sans"/>
               </a:rPr>
               <a:t>ChatPromptTemplate</a:t>
             </a:r>
@@ -7096,7 +7067,7 @@
         <p:spPr>
           <a:xfrm>
             <a:off x="457200" y="4553640"/>
-            <a:ext cx="3931560" cy="237240"/>
+            <a:ext cx="3931200" cy="236880"/>
           </a:xfrm>
           <a:prstGeom prst="rect">
             <a:avLst/>
@@ -7132,6 +7103,7 @@
                   <a:srgbClr val="64748b"/>
                 </a:solidFill>
                 <a:latin typeface="Calibri"/>
+                <a:ea typeface="DejaVu Sans"/>
               </a:rPr>
               <a:t>Multi-turn conversation templates with placeholders</a:t>
             </a:r>
@@ -7150,7 +7122,7 @@
         <p:spPr>
           <a:xfrm>
             <a:off x="4800600" y="3986640"/>
-            <a:ext cx="4205880" cy="840960"/>
+            <a:ext cx="4205520" cy="840600"/>
           </a:xfrm>
           <a:prstGeom prst="rect">
             <a:avLst/>
@@ -7185,7 +7157,7 @@
         <p:spPr>
           <a:xfrm>
             <a:off x="4800600" y="3986640"/>
-            <a:ext cx="63720" cy="840960"/>
+            <a:ext cx="63360" cy="840600"/>
           </a:xfrm>
           <a:prstGeom prst="rect">
             <a:avLst/>
@@ -7213,7 +7185,7 @@
         <p:spPr>
           <a:xfrm>
             <a:off x="4937760" y="4041720"/>
-            <a:ext cx="438480" cy="273960"/>
+            <a:ext cx="438120" cy="273600"/>
           </a:xfrm>
           <a:prstGeom prst="rect">
             <a:avLst/>
@@ -7249,6 +7221,7 @@
                   <a:srgbClr val="0d9488"/>
                 </a:solidFill>
                 <a:latin typeface="Calibri"/>
+                <a:ea typeface="DejaVu Sans"/>
               </a:rPr>
               <a:t>08</a:t>
             </a:r>
@@ -7267,7 +7240,7 @@
         <p:spPr>
           <a:xfrm>
             <a:off x="4937760" y="4260960"/>
-            <a:ext cx="3931560" cy="292320"/>
+            <a:ext cx="3931200" cy="291960"/>
           </a:xfrm>
           <a:prstGeom prst="rect">
             <a:avLst/>
@@ -7303,6 +7276,7 @@
                   <a:srgbClr val="1e293b"/>
                 </a:solidFill>
                 <a:latin typeface="Calibri"/>
+                <a:ea typeface="DejaVu Sans"/>
               </a:rPr>
               <a:t>📦 </a:t>
             </a:r>
@@ -7312,6 +7286,7 @@
                   <a:srgbClr val="1e293b"/>
                 </a:solidFill>
                 <a:latin typeface="Calibri"/>
+                <a:ea typeface="DejaVu Sans"/>
               </a:rPr>
               <a:t>MessagesPlaceholder</a:t>
             </a:r>
@@ -7330,7 +7305,7 @@
         <p:spPr>
           <a:xfrm>
             <a:off x="4937760" y="4553640"/>
-            <a:ext cx="3931560" cy="237240"/>
+            <a:ext cx="3931200" cy="236880"/>
           </a:xfrm>
           <a:prstGeom prst="rect">
             <a:avLst/>
@@ -7366,6 +7341,7 @@
                   <a:srgbClr val="64748b"/>
                 </a:solidFill>
                 <a:latin typeface="Calibri"/>
+                <a:ea typeface="DejaVu Sans"/>
               </a:rPr>
               <a:t>Inject saved history into new conversation turns</a:t>
             </a:r>
@@ -7421,7 +7397,7 @@
         <p:spPr>
           <a:xfrm>
             <a:off x="0" y="0"/>
-            <a:ext cx="9143640" cy="822600"/>
+            <a:ext cx="9143280" cy="822240"/>
           </a:xfrm>
           <a:prstGeom prst="rect">
             <a:avLst/>
@@ -7449,7 +7425,7 @@
         <p:spPr>
           <a:xfrm>
             <a:off x="411480" y="0"/>
-            <a:ext cx="8320680" cy="822600"/>
+            <a:ext cx="8320320" cy="822240"/>
           </a:xfrm>
           <a:prstGeom prst="rect">
             <a:avLst/>
@@ -7485,6 +7461,7 @@
                   <a:srgbClr val="ffffff"/>
                 </a:solidFill>
                 <a:latin typeface="Calibri"/>
+                <a:ea typeface="DejaVu Sans"/>
               </a:rPr>
               <a:t>Understanding the Temperature Parameter</a:t>
             </a:r>
@@ -7503,7 +7480,7 @@
         <p:spPr>
           <a:xfrm>
             <a:off x="411480" y="932760"/>
-            <a:ext cx="8320680" cy="319680"/>
+            <a:ext cx="8320320" cy="319320"/>
           </a:xfrm>
           <a:prstGeom prst="rect">
             <a:avLst/>
@@ -7539,6 +7516,7 @@
                   <a:srgbClr val="64748b"/>
                 </a:solidFill>
                 <a:latin typeface="Calibri"/>
+                <a:ea typeface="DejaVu Sans"/>
               </a:rPr>
               <a:t>Controls how random or predictable the LLM's output will be — from fully deterministic to highly creative</a:t>
             </a:r>
@@ -7557,7 +7535,7 @@
         <p:spPr>
           <a:xfrm>
             <a:off x="411480" y="1353240"/>
-            <a:ext cx="1188360" cy="255600"/>
+            <a:ext cx="1188000" cy="255240"/>
           </a:xfrm>
           <a:prstGeom prst="rect">
             <a:avLst/>
@@ -7585,7 +7563,7 @@
         <p:spPr>
           <a:xfrm>
             <a:off x="1600200" y="1353240"/>
-            <a:ext cx="1188360" cy="255600"/>
+            <a:ext cx="1188000" cy="255240"/>
           </a:xfrm>
           <a:prstGeom prst="rect">
             <a:avLst/>
@@ -7613,7 +7591,7 @@
         <p:spPr>
           <a:xfrm>
             <a:off x="2788920" y="1353240"/>
-            <a:ext cx="1188360" cy="255600"/>
+            <a:ext cx="1188000" cy="255240"/>
           </a:xfrm>
           <a:prstGeom prst="rect">
             <a:avLst/>
@@ -7641,7 +7619,7 @@
         <p:spPr>
           <a:xfrm>
             <a:off x="3977640" y="1353240"/>
-            <a:ext cx="1188360" cy="255600"/>
+            <a:ext cx="1188000" cy="255240"/>
           </a:xfrm>
           <a:prstGeom prst="rect">
             <a:avLst/>
@@ -7669,7 +7647,7 @@
         <p:spPr>
           <a:xfrm>
             <a:off x="5166360" y="1353240"/>
-            <a:ext cx="1188360" cy="255600"/>
+            <a:ext cx="1188000" cy="255240"/>
           </a:xfrm>
           <a:prstGeom prst="rect">
             <a:avLst/>
@@ -7697,7 +7675,7 @@
         <p:spPr>
           <a:xfrm>
             <a:off x="6355080" y="1353240"/>
-            <a:ext cx="1188360" cy="255600"/>
+            <a:ext cx="1188000" cy="255240"/>
           </a:xfrm>
           <a:prstGeom prst="rect">
             <a:avLst/>
@@ -7725,7 +7703,7 @@
         <p:spPr>
           <a:xfrm>
             <a:off x="7543800" y="1353240"/>
-            <a:ext cx="1188360" cy="255600"/>
+            <a:ext cx="1188000" cy="255240"/>
           </a:xfrm>
           <a:prstGeom prst="rect">
             <a:avLst/>
@@ -7753,7 +7731,7 @@
         <p:spPr>
           <a:xfrm>
             <a:off x="347400" y="1645920"/>
-            <a:ext cx="456840" cy="255600"/>
+            <a:ext cx="456480" cy="255240"/>
           </a:xfrm>
           <a:prstGeom prst="rect">
             <a:avLst/>
@@ -7789,6 +7767,7 @@
                   <a:srgbClr val="0d9488"/>
                 </a:solidFill>
                 <a:latin typeface="Calibri"/>
+                <a:ea typeface="DejaVu Sans"/>
               </a:rPr>
               <a:t>0</a:t>
             </a:r>
@@ -7807,7 +7786,7 @@
         <p:spPr>
           <a:xfrm>
             <a:off x="274320" y="1901880"/>
-            <a:ext cx="1188360" cy="228240"/>
+            <a:ext cx="1188000" cy="227880"/>
           </a:xfrm>
           <a:prstGeom prst="rect">
             <a:avLst/>
@@ -7843,6 +7822,7 @@
                   <a:srgbClr val="0d9488"/>
                 </a:solidFill>
                 <a:latin typeface="Calibri"/>
+                <a:ea typeface="DejaVu Sans"/>
               </a:rPr>
               <a:t>Deterministic</a:t>
             </a:r>
@@ -7861,7 +7841,7 @@
         <p:spPr>
           <a:xfrm>
             <a:off x="4160520" y="1645920"/>
-            <a:ext cx="548280" cy="255600"/>
+            <a:ext cx="547920" cy="255240"/>
           </a:xfrm>
           <a:prstGeom prst="rect">
             <a:avLst/>
@@ -7897,6 +7877,7 @@
                   <a:srgbClr val="f59e0b"/>
                 </a:solidFill>
                 <a:latin typeface="Calibri"/>
+                <a:ea typeface="DejaVu Sans"/>
               </a:rPr>
               <a:t>1.0</a:t>
             </a:r>
@@ -7915,7 +7896,7 @@
         <p:spPr>
           <a:xfrm>
             <a:off x="3977640" y="1901880"/>
-            <a:ext cx="1096920" cy="228240"/>
+            <a:ext cx="1096560" cy="227880"/>
           </a:xfrm>
           <a:prstGeom prst="rect">
             <a:avLst/>
@@ -7951,6 +7932,7 @@
                   <a:srgbClr val="f59e0b"/>
                 </a:solidFill>
                 <a:latin typeface="Calibri"/>
+                <a:ea typeface="DejaVu Sans"/>
               </a:rPr>
               <a:t>Balanced</a:t>
             </a:r>
@@ -7969,7 +7951,7 @@
         <p:spPr>
           <a:xfrm>
             <a:off x="8183880" y="1645920"/>
-            <a:ext cx="548280" cy="255600"/>
+            <a:ext cx="547920" cy="255240"/>
           </a:xfrm>
           <a:prstGeom prst="rect">
             <a:avLst/>
@@ -8005,6 +7987,7 @@
                   <a:srgbClr val="ef4444"/>
                 </a:solidFill>
                 <a:latin typeface="Calibri"/>
+                <a:ea typeface="DejaVu Sans"/>
               </a:rPr>
               <a:t>2.0</a:t>
             </a:r>
@@ -8023,7 +8006,7 @@
         <p:spPr>
           <a:xfrm>
             <a:off x="8001000" y="1901880"/>
-            <a:ext cx="1005480" cy="228240"/>
+            <a:ext cx="1005120" cy="227880"/>
           </a:xfrm>
           <a:prstGeom prst="rect">
             <a:avLst/>
@@ -8059,6 +8042,7 @@
                   <a:srgbClr val="ef4444"/>
                 </a:solidFill>
                 <a:latin typeface="Calibri"/>
+                <a:ea typeface="DejaVu Sans"/>
               </a:rPr>
               <a:t>Creative</a:t>
             </a:r>
@@ -8077,7 +8061,7 @@
         <p:spPr>
           <a:xfrm>
             <a:off x="320040" y="2240280"/>
-            <a:ext cx="4205880" cy="2605680"/>
+            <a:ext cx="4205520" cy="2605320"/>
           </a:xfrm>
           <a:prstGeom prst="rect">
             <a:avLst/>
@@ -8112,7 +8096,7 @@
         <p:spPr>
           <a:xfrm>
             <a:off x="320040" y="2240280"/>
-            <a:ext cx="4205880" cy="502560"/>
+            <a:ext cx="4205520" cy="502200"/>
           </a:xfrm>
           <a:prstGeom prst="rect">
             <a:avLst/>
@@ -8140,7 +8124,7 @@
         <p:spPr>
           <a:xfrm>
             <a:off x="457200" y="2240280"/>
-            <a:ext cx="3977280" cy="319680"/>
+            <a:ext cx="3976920" cy="319320"/>
           </a:xfrm>
           <a:prstGeom prst="rect">
             <a:avLst/>
@@ -8176,6 +8160,7 @@
                   <a:srgbClr val="ffffff"/>
                 </a:solidFill>
                 <a:latin typeface="Calibri"/>
+                <a:ea typeface="DejaVu Sans"/>
               </a:rPr>
               <a:t>Temperature = 0</a:t>
             </a:r>
@@ -8194,7 +8179,7 @@
         <p:spPr>
           <a:xfrm>
             <a:off x="457200" y="2541960"/>
-            <a:ext cx="3977280" cy="200880"/>
+            <a:ext cx="3976920" cy="200520"/>
           </a:xfrm>
           <a:prstGeom prst="rect">
             <a:avLst/>
@@ -8230,6 +8215,7 @@
                   <a:srgbClr val="bfdbfe"/>
                 </a:solidFill>
                 <a:latin typeface="Calibri"/>
+                <a:ea typeface="DejaVu Sans"/>
               </a:rPr>
               <a:t>Deterministic Mode</a:t>
             </a:r>
@@ -8248,7 +8234,7 @@
         <p:spPr>
           <a:xfrm>
             <a:off x="484560" y="2834640"/>
-            <a:ext cx="3913200" cy="1938240"/>
+            <a:ext cx="3912840" cy="1937880"/>
           </a:xfrm>
           <a:prstGeom prst="rect">
             <a:avLst/>
@@ -8279,7 +8265,7 @@
               <a:buClr>
                 <a:srgbClr val="1e293b"/>
               </a:buClr>
-              <a:buFont typeface="Symbol" charset="2"/>
+              <a:buFont typeface="Symbol"/>
               <a:buChar char=""/>
             </a:pPr>
             <a:r>
@@ -8288,6 +8274,7 @@
                   <a:srgbClr val="1e293b"/>
                 </a:solidFill>
                 <a:latin typeface="Calibri"/>
+                <a:ea typeface="DejaVu Sans"/>
               </a:rPr>
               <a:t>Exact same output for the same input, every run</a:t>
             </a:r>
@@ -8306,7 +8293,7 @@
               <a:buClr>
                 <a:srgbClr val="1e293b"/>
               </a:buClr>
-              <a:buFont typeface="Symbol" charset="2"/>
+              <a:buFont typeface="Symbol"/>
               <a:buChar char=""/>
             </a:pPr>
             <a:r>
@@ -8315,6 +8302,7 @@
                   <a:srgbClr val="1e293b"/>
                 </a:solidFill>
                 <a:latin typeface="Calibri"/>
+                <a:ea typeface="DejaVu Sans"/>
               </a:rPr>
               <a:t>Consistent and reproducible results</a:t>
             </a:r>
@@ -8333,7 +8321,7 @@
               <a:buClr>
                 <a:srgbClr val="1e293b"/>
               </a:buClr>
-              <a:buFont typeface="Symbol" charset="2"/>
+              <a:buFont typeface="Symbol"/>
               <a:buChar char=""/>
             </a:pPr>
             <a:r>
@@ -8342,6 +8330,7 @@
                   <a:srgbClr val="1e293b"/>
                 </a:solidFill>
                 <a:latin typeface="Calibri"/>
+                <a:ea typeface="DejaVu Sans"/>
               </a:rPr>
               <a:t>Best for: factual Q&amp;A, data extraction, classification</a:t>
             </a:r>
@@ -8360,7 +8349,7 @@
               <a:buClr>
                 <a:srgbClr val="1e293b"/>
               </a:buClr>
-              <a:buFont typeface="Symbol" charset="2"/>
+              <a:buFont typeface="Symbol"/>
               <a:buChar char=""/>
             </a:pPr>
             <a:r>
@@ -8369,6 +8358,7 @@
                   <a:srgbClr val="1e293b"/>
                 </a:solidFill>
                 <a:latin typeface="Calibri"/>
+                <a:ea typeface="DejaVu Sans"/>
               </a:rPr>
               <a:t>Recommended for production systems needing reliability</a:t>
             </a:r>
@@ -8387,7 +8377,7 @@
         <p:spPr>
           <a:xfrm>
             <a:off x="4846320" y="2240280"/>
-            <a:ext cx="4205880" cy="2605680"/>
+            <a:ext cx="4205520" cy="2605320"/>
           </a:xfrm>
           <a:prstGeom prst="rect">
             <a:avLst/>
@@ -8422,7 +8412,7 @@
         <p:spPr>
           <a:xfrm>
             <a:off x="4846320" y="2240280"/>
-            <a:ext cx="4205880" cy="502560"/>
+            <a:ext cx="4205520" cy="502200"/>
           </a:xfrm>
           <a:prstGeom prst="rect">
             <a:avLst/>
@@ -8450,7 +8440,7 @@
         <p:spPr>
           <a:xfrm>
             <a:off x="4983480" y="2240280"/>
-            <a:ext cx="3977280" cy="319680"/>
+            <a:ext cx="3976920" cy="319320"/>
           </a:xfrm>
           <a:prstGeom prst="rect">
             <a:avLst/>
@@ -8486,6 +8476,7 @@
                   <a:srgbClr val="ffffff"/>
                 </a:solidFill>
                 <a:latin typeface="Calibri"/>
+                <a:ea typeface="DejaVu Sans"/>
               </a:rPr>
               <a:t>Temperature = 1.5–2.0</a:t>
             </a:r>
@@ -8504,7 +8495,7 @@
         <p:spPr>
           <a:xfrm>
             <a:off x="4983480" y="2541960"/>
-            <a:ext cx="3977280" cy="200880"/>
+            <a:ext cx="3976920" cy="200520"/>
           </a:xfrm>
           <a:prstGeom prst="rect">
             <a:avLst/>
@@ -8540,6 +8531,7 @@
                   <a:srgbClr val="bfdbfe"/>
                 </a:solidFill>
                 <a:latin typeface="Calibri"/>
+                <a:ea typeface="DejaVu Sans"/>
               </a:rPr>
               <a:t>Creative Mode</a:t>
             </a:r>
@@ -8558,7 +8550,7 @@
         <p:spPr>
           <a:xfrm>
             <a:off x="5010840" y="2834640"/>
-            <a:ext cx="3913200" cy="1938240"/>
+            <a:ext cx="3912840" cy="1937880"/>
           </a:xfrm>
           <a:prstGeom prst="rect">
             <a:avLst/>
@@ -8589,7 +8581,7 @@
               <a:buClr>
                 <a:srgbClr val="1e293b"/>
               </a:buClr>
-              <a:buFont typeface="Symbol" charset="2"/>
+              <a:buFont typeface="Symbol"/>
               <a:buChar char=""/>
             </a:pPr>
             <a:r>
@@ -8598,6 +8590,7 @@
                   <a:srgbClr val="1e293b"/>
                 </a:solidFill>
                 <a:latin typeface="Calibri"/>
+                <a:ea typeface="DejaVu Sans"/>
               </a:rPr>
               <a:t>Different output each run even with identical input</a:t>
             </a:r>
@@ -8616,7 +8609,7 @@
               <a:buClr>
                 <a:srgbClr val="1e293b"/>
               </a:buClr>
-              <a:buFont typeface="Symbol" charset="2"/>
+              <a:buFont typeface="Symbol"/>
               <a:buChar char=""/>
             </a:pPr>
             <a:r>
@@ -8625,6 +8618,7 @@
                   <a:srgbClr val="1e293b"/>
                 </a:solidFill>
                 <a:latin typeface="Calibri"/>
+                <a:ea typeface="DejaVu Sans"/>
               </a:rPr>
               <a:t>Imaginative, varied, and surprising responses</a:t>
             </a:r>
@@ -8643,7 +8637,7 @@
               <a:buClr>
                 <a:srgbClr val="1e293b"/>
               </a:buClr>
-              <a:buFont typeface="Symbol" charset="2"/>
+              <a:buFont typeface="Symbol"/>
               <a:buChar char=""/>
             </a:pPr>
             <a:r>
@@ -8652,6 +8646,7 @@
                   <a:srgbClr val="1e293b"/>
                 </a:solidFill>
                 <a:latin typeface="Calibri"/>
+                <a:ea typeface="DejaVu Sans"/>
               </a:rPr>
               <a:t>Best for: creative writing, brainstorming, storytelling</a:t>
             </a:r>
@@ -8670,7 +8665,7 @@
               <a:buClr>
                 <a:srgbClr val="1e293b"/>
               </a:buClr>
-              <a:buFont typeface="Symbol" charset="2"/>
+              <a:buFont typeface="Symbol"/>
               <a:buChar char=""/>
             </a:pPr>
             <a:r>
@@ -8679,6 +8674,7 @@
                   <a:srgbClr val="1e293b"/>
                 </a:solidFill>
                 <a:latin typeface="Calibri"/>
+                <a:ea typeface="DejaVu Sans"/>
               </a:rPr>
               <a:t>Great for marketing copy and generative content apps</a:t>
             </a:r>
@@ -8734,7 +8730,7 @@
         <p:spPr>
           <a:xfrm>
             <a:off x="0" y="0"/>
-            <a:ext cx="9143640" cy="822600"/>
+            <a:ext cx="9143280" cy="822240"/>
           </a:xfrm>
           <a:prstGeom prst="rect">
             <a:avLst/>
@@ -8762,7 +8758,7 @@
         <p:spPr>
           <a:xfrm>
             <a:off x="411480" y="0"/>
-            <a:ext cx="8320680" cy="822600"/>
+            <a:ext cx="8320320" cy="822240"/>
           </a:xfrm>
           <a:prstGeom prst="rect">
             <a:avLst/>
@@ -8798,6 +8794,7 @@
                   <a:srgbClr val="ffffff"/>
                 </a:solidFill>
                 <a:latin typeface="Calibri"/>
+                <a:ea typeface="DejaVu Sans"/>
               </a:rPr>
               <a:t>Temperature in Action — Code Example</a:t>
             </a:r>
@@ -8816,7 +8813,7 @@
         <p:spPr>
           <a:xfrm>
             <a:off x="320040" y="960120"/>
-            <a:ext cx="5211720" cy="3245760"/>
+            <a:ext cx="5211360" cy="3245400"/>
           </a:xfrm>
           <a:prstGeom prst="rect">
             <a:avLst/>
@@ -8851,7 +8848,7 @@
         <p:spPr>
           <a:xfrm>
             <a:off x="320040" y="960120"/>
-            <a:ext cx="5211720" cy="328680"/>
+            <a:ext cx="5211360" cy="328320"/>
           </a:xfrm>
           <a:prstGeom prst="rect">
             <a:avLst/>
@@ -8879,7 +8876,7 @@
         <p:spPr>
           <a:xfrm>
             <a:off x="457200" y="960120"/>
-            <a:ext cx="2742840" cy="328680"/>
+            <a:ext cx="2742480" cy="328320"/>
           </a:xfrm>
           <a:prstGeom prst="rect">
             <a:avLst/>
@@ -8915,6 +8912,7 @@
                   <a:srgbClr val="7dd3fc"/>
                 </a:solidFill>
                 <a:latin typeface="Calibri"/>
+                <a:ea typeface="DejaVu Sans"/>
               </a:rPr>
               <a:t>temperature_demo.py</a:t>
             </a:r>
@@ -8932,8 +8930,8 @@
         </p:nvSpPr>
         <p:spPr>
           <a:xfrm>
-            <a:off x="457200" y="1353240"/>
-            <a:ext cx="4983120" cy="2788560"/>
+            <a:off x="457200" y="900000"/>
+            <a:ext cx="4982760" cy="2788200"/>
           </a:xfrm>
           <a:prstGeom prst="rect">
             <a:avLst/>
@@ -8954,6 +8952,12 @@
             <a:noAutofit/>
           </a:bodyPr>
           <a:p>
+            <a:pPr>
+              <a:lnSpc>
+                <a:spcPct val="100000"/>
+              </a:lnSpc>
+              <a:buNone/>
+            </a:pPr>
             <a:r>
               <a:rPr b="0" lang="en-US" sz="1000" spc="-1" strike="noStrike">
                 <a:solidFill>
@@ -8962,18 +8966,51 @@
                 <a:latin typeface="Consolas"/>
                 <a:ea typeface="Consolas"/>
               </a:rPr>
-              <a:t>from </a:t>
-            </a:r>
+              <a:t>from langchain_openai import ChatOpenAI</a:t>
+            </a:r>
+            <a:endParaRPr b="0" lang="en-IN" sz="1000" spc="-1" strike="noStrike">
+              <a:latin typeface="Arial"/>
+            </a:endParaRPr>
+          </a:p>
+          <a:p>
+            <a:pPr>
+              <a:lnSpc>
+                <a:spcPct val="100000"/>
+              </a:lnSpc>
+              <a:buNone/>
+            </a:pPr>
             <a:r>
               <a:rPr b="0" lang="en-US" sz="1000" spc="-1" strike="noStrike">
                 <a:solidFill>
-                  <a:srgbClr val="ffffff"/>
+                  <a:srgbClr val="c084fc"/>
                 </a:solidFill>
                 <a:latin typeface="Consolas"/>
                 <a:ea typeface="Consolas"/>
               </a:rPr>
-              <a:t>langchain_openai </a:t>
-            </a:r>
+              <a:t>from dotenv import load_dotenv</a:t>
+            </a:r>
+            <a:endParaRPr b="0" lang="en-IN" sz="1000" spc="-1" strike="noStrike">
+              <a:latin typeface="Arial"/>
+            </a:endParaRPr>
+          </a:p>
+          <a:p>
+            <a:pPr>
+              <a:lnSpc>
+                <a:spcPct val="100000"/>
+              </a:lnSpc>
+              <a:buNone/>
+            </a:pPr>
+            <a:endParaRPr b="0" lang="en-IN" sz="1000" spc="-1" strike="noStrike">
+              <a:latin typeface="Arial"/>
+            </a:endParaRPr>
+          </a:p>
+          <a:p>
+            <a:pPr>
+              <a:lnSpc>
+                <a:spcPct val="100000"/>
+              </a:lnSpc>
+              <a:buNone/>
+            </a:pPr>
             <a:r>
               <a:rPr b="0" lang="en-US" sz="1000" spc="-1" strike="noStrike">
                 <a:solidFill>
@@ -8982,23 +9019,51 @@
                 <a:latin typeface="Consolas"/>
                 <a:ea typeface="Consolas"/>
               </a:rPr>
-              <a:t>import </a:t>
-            </a:r>
+              <a:t>load_dotenv()</a:t>
+            </a:r>
+            <a:endParaRPr b="0" lang="en-IN" sz="1000" spc="-1" strike="noStrike">
+              <a:latin typeface="Arial"/>
+            </a:endParaRPr>
+          </a:p>
+          <a:p>
+            <a:pPr>
+              <a:lnSpc>
+                <a:spcPct val="100000"/>
+              </a:lnSpc>
+              <a:buNone/>
+            </a:pPr>
+            <a:endParaRPr b="0" lang="en-IN" sz="1000" spc="-1" strike="noStrike">
+              <a:latin typeface="Arial"/>
+            </a:endParaRPr>
+          </a:p>
+          <a:p>
+            <a:pPr>
+              <a:lnSpc>
+                <a:spcPct val="100000"/>
+              </a:lnSpc>
+              <a:buNone/>
+            </a:pPr>
             <a:r>
               <a:rPr b="0" lang="en-US" sz="1000" spc="-1" strike="noStrike">
                 <a:solidFill>
-                  <a:srgbClr val="ffffff"/>
+                  <a:srgbClr val="c084fc"/>
                 </a:solidFill>
                 <a:latin typeface="Consolas"/>
                 <a:ea typeface="Consolas"/>
               </a:rPr>
-              <a:t>ChatOpenAI</a:t>
+              <a:t># temperature=0 → identical output every run</a:t>
             </a:r>
             <a:endParaRPr b="0" lang="en-IN" sz="1000" spc="-1" strike="noStrike">
               <a:latin typeface="Arial"/>
             </a:endParaRPr>
           </a:p>
           <a:p>
+            <a:pPr>
+              <a:lnSpc>
+                <a:spcPct val="100000"/>
+              </a:lnSpc>
+              <a:buNone/>
+            </a:pPr>
             <a:r>
               <a:rPr b="0" lang="en-US" sz="1000" spc="-1" strike="noStrike">
                 <a:solidFill>
@@ -9007,18 +9072,40 @@
                 <a:latin typeface="Consolas"/>
                 <a:ea typeface="Consolas"/>
               </a:rPr>
-              <a:t>from </a:t>
-            </a:r>
+              <a:t>ai_model = ChatOpenAI(model='gpt-4', temperature=0.9)</a:t>
+            </a:r>
+            <a:endParaRPr b="0" lang="en-IN" sz="1000" spc="-1" strike="noStrike">
+              <a:latin typeface="Arial"/>
+            </a:endParaRPr>
+          </a:p>
+          <a:p>
+            <a:pPr>
+              <a:lnSpc>
+                <a:spcPct val="100000"/>
+              </a:lnSpc>
+              <a:buNone/>
+            </a:pPr>
             <a:r>
               <a:rPr b="0" lang="en-US" sz="1000" spc="-1" strike="noStrike">
                 <a:solidFill>
-                  <a:srgbClr val="ffffff"/>
+                  <a:srgbClr val="c084fc"/>
                 </a:solidFill>
                 <a:latin typeface="Consolas"/>
                 <a:ea typeface="Consolas"/>
               </a:rPr>
-              <a:t>dotenv </a:t>
-            </a:r>
+              <a:t>reply = ai_model.invoke(</a:t>
+            </a:r>
+            <a:endParaRPr b="0" lang="en-IN" sz="1000" spc="-1" strike="noStrike">
+              <a:latin typeface="Arial"/>
+            </a:endParaRPr>
+          </a:p>
+          <a:p>
+            <a:pPr>
+              <a:lnSpc>
+                <a:spcPct val="100000"/>
+              </a:lnSpc>
+              <a:buNone/>
+            </a:pPr>
             <a:r>
               <a:rPr b="0" lang="en-US" sz="1000" spc="-1" strike="noStrike">
                 <a:solidFill>
@@ -9027,192 +9114,123 @@
                 <a:latin typeface="Consolas"/>
                 <a:ea typeface="Consolas"/>
               </a:rPr>
-              <a:t>import </a:t>
+              <a:t>    </a:t>
             </a:r>
             <a:r>
               <a:rPr b="0" lang="en-US" sz="1000" spc="-1" strike="noStrike">
                 <a:solidFill>
-                  <a:srgbClr val="ffffff"/>
+                  <a:srgbClr val="c084fc"/>
                 </a:solidFill>
                 <a:latin typeface="Consolas"/>
                 <a:ea typeface="Consolas"/>
               </a:rPr>
-              <a:t>load_dotenv</a:t>
+              <a:t>'provide 5 liner poetry on climate change?'</a:t>
             </a:r>
             <a:endParaRPr b="0" lang="en-IN" sz="1000" spc="-1" strike="noStrike">
               <a:latin typeface="Arial"/>
             </a:endParaRPr>
           </a:p>
           <a:p>
-            <a:endParaRPr b="0" lang="en-IN" sz="1000" spc="-1" strike="noStrike">
-              <a:latin typeface="Arial"/>
-            </a:endParaRPr>
-          </a:p>
-          <a:p>
+            <a:pPr>
+              <a:lnSpc>
+                <a:spcPct val="100000"/>
+              </a:lnSpc>
+              <a:buNone/>
+            </a:pPr>
             <a:r>
               <a:rPr b="0" lang="en-US" sz="1000" spc="-1" strike="noStrike">
                 <a:solidFill>
-                  <a:srgbClr val="86efac"/>
+                  <a:srgbClr val="c084fc"/>
                 </a:solidFill>
                 <a:latin typeface="Consolas"/>
                 <a:ea typeface="Consolas"/>
               </a:rPr>
-              <a:t>load_dotenv()</a:t>
+              <a:t>)</a:t>
             </a:r>
             <a:endParaRPr b="0" lang="en-IN" sz="1000" spc="-1" strike="noStrike">
               <a:latin typeface="Arial"/>
             </a:endParaRPr>
           </a:p>
           <a:p>
-            <a:endParaRPr b="0" lang="en-IN" sz="1000" spc="-1" strike="noStrike">
-              <a:latin typeface="Arial"/>
-            </a:endParaRPr>
-          </a:p>
-          <a:p>
+            <a:pPr>
+              <a:lnSpc>
+                <a:spcPct val="100000"/>
+              </a:lnSpc>
+              <a:buNone/>
+            </a:pPr>
             <a:r>
               <a:rPr b="0" lang="en-US" sz="1000" spc="-1" strike="noStrike">
                 <a:solidFill>
-                  <a:srgbClr val="6b7280"/>
+                  <a:srgbClr val="c084fc"/>
                 </a:solidFill>
                 <a:latin typeface="Consolas"/>
                 <a:ea typeface="Consolas"/>
               </a:rPr>
-              <a:t># temperature=0 → identical output every run</a:t>
+              <a:t>print(reply.content)</a:t>
             </a:r>
             <a:endParaRPr b="0" lang="en-IN" sz="1000" spc="-1" strike="noStrike">
               <a:latin typeface="Arial"/>
             </a:endParaRPr>
           </a:p>
-          <a:p>
-            <a:r>
-              <a:rPr b="0" lang="en-US" sz="1000" spc="-1" strike="noStrike">
-                <a:solidFill>
-                  <a:srgbClr val="7dd3fc"/>
-                </a:solidFill>
-                <a:latin typeface="Consolas"/>
-                <a:ea typeface="Consolas"/>
-              </a:rPr>
-              <a:t>ai_model</a:t>
-            </a:r>
-            <a:r>
-              <a:rPr b="0" lang="en-US" sz="1000" spc="-1" strike="noStrike">
-                <a:solidFill>
-                  <a:srgbClr val="ffffff"/>
-                </a:solidFill>
-                <a:latin typeface="Consolas"/>
-                <a:ea typeface="Consolas"/>
-              </a:rPr>
-              <a:t> = ChatOpenAI(model=</a:t>
-            </a:r>
-            <a:r>
-              <a:rPr b="0" lang="en-US" sz="1000" spc="-1" strike="noStrike">
-                <a:solidFill>
-                  <a:srgbClr val="86efac"/>
-                </a:solidFill>
-                <a:latin typeface="Consolas"/>
-                <a:ea typeface="Consolas"/>
-              </a:rPr>
-              <a:t>'gpt-4'</a:t>
-            </a:r>
-            <a:r>
-              <a:rPr b="0" lang="en-US" sz="1000" spc="-1" strike="noStrike">
-                <a:solidFill>
-                  <a:srgbClr val="ffffff"/>
-                </a:solidFill>
-                <a:latin typeface="Consolas"/>
-                <a:ea typeface="Consolas"/>
-              </a:rPr>
-              <a:t>, temperature=</a:t>
-            </a:r>
-            <a:r>
-              <a:rPr b="0" lang="en-US" sz="1000" spc="-1" strike="noStrike">
-                <a:solidFill>
-                  <a:srgbClr val="fca5a5"/>
-                </a:solidFill>
-                <a:latin typeface="Consolas"/>
-                <a:ea typeface="Consolas"/>
-              </a:rPr>
-              <a:t>0</a:t>
-            </a:r>
-            <a:r>
-              <a:rPr b="0" lang="en-US" sz="1000" spc="-1" strike="noStrike">
-                <a:solidFill>
-                  <a:srgbClr val="ffffff"/>
-                </a:solidFill>
-                <a:latin typeface="Consolas"/>
-                <a:ea typeface="Consolas"/>
-              </a:rPr>
-              <a:t>)</a:t>
-            </a:r>
-            <a:endParaRPr b="0" lang="en-IN" sz="1000" spc="-1" strike="noStrike">
-              <a:latin typeface="Arial"/>
-            </a:endParaRPr>
-          </a:p>
-          <a:p>
-            <a:r>
-              <a:rPr b="0" lang="en-US" sz="1000" spc="-1" strike="noStrike">
-                <a:solidFill>
-                  <a:srgbClr val="7dd3fc"/>
-                </a:solidFill>
-                <a:latin typeface="Consolas"/>
-                <a:ea typeface="Consolas"/>
-              </a:rPr>
-              <a:t>reply</a:t>
-            </a:r>
-            <a:r>
-              <a:rPr b="0" lang="en-US" sz="1000" spc="-1" strike="noStrike">
-                <a:solidFill>
-                  <a:srgbClr val="ffffff"/>
-                </a:solidFill>
-                <a:latin typeface="Consolas"/>
-                <a:ea typeface="Consolas"/>
-              </a:rPr>
-              <a:t> = ai_model.invoke(</a:t>
-            </a:r>
-            <a:endParaRPr b="0" lang="en-IN" sz="1000" spc="-1" strike="noStrike">
-              <a:latin typeface="Arial"/>
-            </a:endParaRPr>
-          </a:p>
-          <a:p>
-            <a:r>
-              <a:rPr b="0" lang="en-US" sz="1000" spc="-1" strike="noStrike">
-                <a:solidFill>
-                  <a:srgbClr val="ffffff"/>
-                </a:solidFill>
-                <a:latin typeface="Consolas"/>
-                <a:ea typeface="Consolas"/>
-              </a:rPr>
-              <a:t>    </a:t>
-            </a:r>
-            <a:r>
-              <a:rPr b="0" lang="en-US" sz="1000" spc="-1" strike="noStrike">
-                <a:solidFill>
-                  <a:srgbClr val="86efac"/>
-                </a:solidFill>
-                <a:latin typeface="Consolas"/>
-                <a:ea typeface="Consolas"/>
-              </a:rPr>
-              <a:t>'Compose a 5-line poem about the cricket'</a:t>
-            </a:r>
-            <a:endParaRPr b="0" lang="en-IN" sz="1000" spc="-1" strike="noStrike">
-              <a:latin typeface="Arial"/>
-            </a:endParaRPr>
-          </a:p>
-          <a:p>
-            <a:r>
-              <a:rPr b="0" lang="en-US" sz="1000" spc="-1" strike="noStrike">
-                <a:solidFill>
-                  <a:srgbClr val="86efac"/>
-                </a:solidFill>
-                <a:latin typeface="Consolas"/>
-                <a:ea typeface="Consolas"/>
-              </a:rPr>
-              <a:t>)</a:t>
-            </a:r>
-            <a:endParaRPr b="0" lang="en-IN" sz="1000" spc="-1" strike="noStrike">
-              <a:latin typeface="Arial"/>
-            </a:endParaRPr>
-          </a:p>
+        </p:txBody>
+      </p:sp>
+      <p:sp>
+        <p:nvSpPr>
+          <p:cNvPr id="130" name="Shape 7"/>
+          <p:cNvSpPr/>
+          <p:nvPr/>
+        </p:nvSpPr>
+        <p:spPr>
+          <a:xfrm>
+            <a:off x="5669280" y="960120"/>
+            <a:ext cx="3199680" cy="328320"/>
+          </a:xfrm>
+          <a:prstGeom prst="rect">
+            <a:avLst/>
+          </a:prstGeom>
+          <a:solidFill>
+            <a:srgbClr val="10b981"/>
+          </a:solidFill>
+          <a:ln w="0">
+            <a:noFill/>
+          </a:ln>
+        </p:spPr>
+        <p:style>
+          <a:lnRef idx="0"/>
+          <a:fillRef idx="0"/>
+          <a:effectRef idx="0"/>
+          <a:fontRef idx="minor"/>
+        </p:style>
+      </p:sp>
+      <p:sp>
+        <p:nvSpPr>
+          <p:cNvPr id="131" name="Text 8"/>
+          <p:cNvSpPr/>
+          <p:nvPr/>
+        </p:nvSpPr>
+        <p:spPr>
+          <a:xfrm>
+            <a:off x="5779080" y="960120"/>
+            <a:ext cx="3016800" cy="328320"/>
+          </a:xfrm>
+          <a:prstGeom prst="rect">
+            <a:avLst/>
+          </a:prstGeom>
+          <a:noFill/>
+          <a:ln w="0">
+            <a:noFill/>
+          </a:ln>
+        </p:spPr>
+        <p:style>
+          <a:lnRef idx="0"/>
+          <a:fillRef idx="0"/>
+          <a:effectRef idx="0"/>
+          <a:fontRef idx="minor"/>
+        </p:style>
+        <p:txBody>
+          <a:bodyPr lIns="90000" rIns="90000" tIns="45000" bIns="45000" anchor="ctr">
+            <a:noAutofit/>
+          </a:bodyPr>
           <a:p>
             <a:pPr>
               <a:lnSpc>
@@ -9224,24 +9242,14 @@
               </a:tabLst>
             </a:pPr>
             <a:r>
-              <a:rPr b="0" lang="en-US" sz="1000" spc="-1" strike="noStrike">
-                <a:solidFill>
-                  <a:srgbClr val="fde68a"/>
-                </a:solidFill>
-                <a:latin typeface="Consolas"/>
-                <a:ea typeface="Consolas"/>
-              </a:rPr>
-              <a:t>print</a:t>
-            </a:r>
-            <a:r>
-              <a:rPr b="0" lang="en-US" sz="1000" spc="-1" strike="noStrike">
+              <a:rPr b="1" lang="en-US" sz="1000" spc="-1" strike="noStrike">
                 <a:solidFill>
                   <a:srgbClr val="ffffff"/>
                 </a:solidFill>
-                <a:latin typeface="Consolas"/>
-                <a:ea typeface="Consolas"/>
-              </a:rPr>
-              <a:t>(reply.content)</a:t>
+                <a:latin typeface="Calibri"/>
+                <a:ea typeface="DejaVu Sans"/>
+              </a:rPr>
+              <a:t>Output  (same every run)</a:t>
             </a:r>
             <a:endParaRPr b="0" lang="en-IN" sz="1000" spc="-1" strike="noStrike">
               <a:latin typeface="Arial"/>
@@ -9251,20 +9259,20 @@
       </p:sp>
       <p:sp>
         <p:nvSpPr>
-          <p:cNvPr id="130" name="Shape 6"/>
-          <p:cNvSpPr/>
-          <p:nvPr/>
-        </p:nvSpPr>
-        <p:spPr>
-          <a:xfrm>
-            <a:off x="5669280" y="960120"/>
-            <a:ext cx="3200040" cy="3245760"/>
+          <p:cNvPr id="132" name="Shape 10"/>
+          <p:cNvSpPr/>
+          <p:nvPr/>
+        </p:nvSpPr>
+        <p:spPr>
+          <a:xfrm>
+            <a:off x="320040" y="4343400"/>
+            <a:ext cx="8503200" cy="593640"/>
           </a:xfrm>
           <a:prstGeom prst="rect">
             <a:avLst/>
           </a:prstGeom>
           <a:solidFill>
-            <a:srgbClr val="ffffff"/>
+            <a:srgbClr val="ccfbf1"/>
           </a:solidFill>
           <a:ln w="0">
             <a:noFill/>
@@ -9286,20 +9294,20 @@
       </p:sp>
       <p:sp>
         <p:nvSpPr>
-          <p:cNvPr id="131" name="Shape 7"/>
-          <p:cNvSpPr/>
-          <p:nvPr/>
-        </p:nvSpPr>
-        <p:spPr>
-          <a:xfrm>
-            <a:off x="5669280" y="960120"/>
-            <a:ext cx="3200040" cy="328680"/>
+          <p:cNvPr id="133" name="Shape 11"/>
+          <p:cNvSpPr/>
+          <p:nvPr/>
+        </p:nvSpPr>
+        <p:spPr>
+          <a:xfrm>
+            <a:off x="320040" y="4343400"/>
+            <a:ext cx="63360" cy="593640"/>
           </a:xfrm>
           <a:prstGeom prst="rect">
             <a:avLst/>
           </a:prstGeom>
           <a:solidFill>
-            <a:srgbClr val="10b981"/>
+            <a:srgbClr val="0d9488"/>
           </a:solidFill>
           <a:ln w="0">
             <a:noFill/>
@@ -9314,14 +9322,14 @@
       </p:sp>
       <p:sp>
         <p:nvSpPr>
-          <p:cNvPr id="132" name="Text 8"/>
-          <p:cNvSpPr/>
-          <p:nvPr/>
-        </p:nvSpPr>
-        <p:spPr>
-          <a:xfrm>
-            <a:off x="5779080" y="960120"/>
-            <a:ext cx="3017160" cy="328680"/>
+          <p:cNvPr id="134" name="Text 12"/>
+          <p:cNvSpPr/>
+          <p:nvPr/>
+        </p:nvSpPr>
+        <p:spPr>
+          <a:xfrm>
+            <a:off x="475560" y="4343400"/>
+            <a:ext cx="8274600" cy="593640"/>
           </a:xfrm>
           <a:prstGeom prst="rect">
             <a:avLst/>
@@ -9352,220 +9360,114 @@
               </a:tabLst>
             </a:pPr>
             <a:r>
-              <a:rPr b="1" lang="en-US" sz="1000" spc="-1" strike="noStrike">
-                <a:solidFill>
-                  <a:srgbClr val="ffffff"/>
-                </a:solidFill>
-                <a:latin typeface="Calibri"/>
-              </a:rPr>
-              <a:t>Output  (same every run)</a:t>
-            </a:r>
-            <a:endParaRPr b="0" lang="en-IN" sz="1000" spc="-1" strike="noStrike">
-              <a:latin typeface="Arial"/>
-            </a:endParaRPr>
-          </a:p>
-        </p:txBody>
-      </p:sp>
-      <p:sp>
-        <p:nvSpPr>
-          <p:cNvPr id="133" name="Text 9"/>
-          <p:cNvSpPr/>
-          <p:nvPr/>
-        </p:nvSpPr>
-        <p:spPr>
-          <a:xfrm>
-            <a:off x="5779080" y="1371600"/>
-            <a:ext cx="2998800" cy="2331360"/>
-          </a:xfrm>
-          <a:prstGeom prst="rect">
-            <a:avLst/>
-          </a:prstGeom>
-          <a:noFill/>
-          <a:ln w="0">
-            <a:noFill/>
-          </a:ln>
-        </p:spPr>
-        <p:style>
-          <a:lnRef idx="0"/>
-          <a:fillRef idx="0"/>
-          <a:effectRef idx="0"/>
-          <a:fontRef idx="minor"/>
-        </p:style>
-        <p:txBody>
-          <a:bodyPr lIns="90000" rIns="90000" tIns="45000" bIns="45000" anchor="ctr">
+              <a:rPr b="0" lang="en-US" sz="1100" spc="-1" strike="noStrike">
+                <a:solidFill>
+                  <a:srgbClr val="1e293b"/>
+                </a:solidFill>
+                <a:latin typeface="Calibri"/>
+                <a:ea typeface="DejaVu Sans"/>
+              </a:rPr>
+              <a:t>💡  </a:t>
+            </a:r>
+            <a:r>
+              <a:rPr b="0" lang="en-US" sz="1100" spc="-1" strike="noStrike">
+                <a:solidFill>
+                  <a:srgbClr val="1e293b"/>
+                </a:solidFill>
+                <a:latin typeface="Calibri"/>
+                <a:ea typeface="DejaVu Sans"/>
+              </a:rPr>
+              <a:t>Key Insight: temperature=0 is ideal for production apps requiring consistent, reliable output. Raise it gradually for creative tasks — try 0.7 for balanced, 1.2+ for highly imaginative results.</a:t>
+            </a:r>
+            <a:endParaRPr b="0" lang="en-IN" sz="1100" spc="-1" strike="noStrike">
+              <a:latin typeface="Arial"/>
+            </a:endParaRPr>
+          </a:p>
+        </p:txBody>
+      </p:sp>
+      <p:sp>
+        <p:nvSpPr>
+          <p:cNvPr id="135" name="Shape 25"/>
+          <p:cNvSpPr/>
+          <p:nvPr/>
+        </p:nvSpPr>
+        <p:spPr>
+          <a:xfrm>
+            <a:off x="5616000" y="1640520"/>
+            <a:ext cx="3384000" cy="1419480"/>
+          </a:xfrm>
+          <a:prstGeom prst="rect">
+            <a:avLst/>
+          </a:prstGeom>
+          <a:solidFill>
+            <a:srgbClr val="1e293b"/>
+          </a:solidFill>
+          <a:ln w="0">
+            <a:noFill/>
+          </a:ln>
+        </p:spPr>
+        <p:style>
+          <a:lnRef idx="0"/>
+          <a:fillRef idx="0"/>
+          <a:effectRef idx="0"/>
+          <a:fontRef idx="minor"/>
+        </p:style>
+        <p:txBody>
+          <a:bodyPr lIns="90000" rIns="90000" tIns="45000" bIns="45000" anchor="t">
             <a:noAutofit/>
           </a:bodyPr>
           <a:p>
-            <a:pPr>
-              <a:lnSpc>
-                <a:spcPct val="140000"/>
-              </a:lnSpc>
-              <a:buNone/>
-              <a:tabLst>
-                <a:tab algn="l" pos="0"/>
-              </a:tabLst>
-            </a:pPr>
-            <a:r>
-              <a:rPr b="0" i="1" lang="en-US" sz="1100" spc="-1" strike="noStrike">
-                <a:solidFill>
-                  <a:srgbClr val="1e293b"/>
-                </a:solidFill>
-                <a:latin typeface="Georgia"/>
-                <a:ea typeface="Georgia"/>
-              </a:rPr>
-              <a:t>T</a:t>
-            </a:r>
-            <a:endParaRPr b="0" lang="en-IN" sz="1100" spc="-1" strike="noStrike">
-              <a:latin typeface="Arial"/>
-            </a:endParaRPr>
-          </a:p>
-          <a:p>
-            <a:pPr>
-              <a:lnSpc>
-                <a:spcPct val="140000"/>
-              </a:lnSpc>
-              <a:buNone/>
-              <a:tabLst>
-                <a:tab algn="l" pos="0"/>
-              </a:tabLst>
-            </a:pPr>
-            <a:r>
-              <a:rPr b="0" i="1" lang="en-US" sz="1100" spc="-1" strike="noStrike">
-                <a:solidFill>
-                  <a:srgbClr val="1e293b"/>
-                </a:solidFill>
-                <a:latin typeface="Georgia"/>
-                <a:ea typeface="Georgia"/>
-              </a:rPr>
-              <a:t>.</a:t>
-            </a:r>
-            <a:endParaRPr b="0" lang="en-IN" sz="1100" spc="-1" strike="noStrike">
-              <a:latin typeface="Arial"/>
-            </a:endParaRPr>
-          </a:p>
-        </p:txBody>
-      </p:sp>
-      <p:sp>
-        <p:nvSpPr>
-          <p:cNvPr id="134" name="Shape 10"/>
-          <p:cNvSpPr/>
-          <p:nvPr/>
-        </p:nvSpPr>
-        <p:spPr>
-          <a:xfrm>
-            <a:off x="320040" y="4343400"/>
-            <a:ext cx="8503560" cy="594000"/>
-          </a:xfrm>
-          <a:prstGeom prst="rect">
-            <a:avLst/>
-          </a:prstGeom>
-          <a:solidFill>
-            <a:srgbClr val="ccfbf1"/>
-          </a:solidFill>
-          <a:ln w="0">
-            <a:noFill/>
-          </a:ln>
-          <a:effectLst>
-            <a:outerShdw algn="bl" blurRad="101520" dir="8100000" dist="37674" kx="0" ky="0" rotWithShape="0" sx="100000" sy="100000">
-              <a:srgbClr val="000000">
-                <a:alpha val="13000"/>
-              </a:srgbClr>
-            </a:outerShdw>
-          </a:effectLst>
-        </p:spPr>
-        <p:style>
-          <a:lnRef idx="0"/>
-          <a:fillRef idx="0"/>
-          <a:effectRef idx="0"/>
-          <a:fontRef idx="minor"/>
-        </p:style>
-      </p:sp>
-      <p:sp>
-        <p:nvSpPr>
-          <p:cNvPr id="135" name="Shape 11"/>
-          <p:cNvSpPr/>
-          <p:nvPr/>
-        </p:nvSpPr>
-        <p:spPr>
-          <a:xfrm>
-            <a:off x="320040" y="4343400"/>
-            <a:ext cx="63720" cy="594000"/>
-          </a:xfrm>
-          <a:prstGeom prst="rect">
-            <a:avLst/>
-          </a:prstGeom>
-          <a:solidFill>
-            <a:srgbClr val="0d9488"/>
-          </a:solidFill>
-          <a:ln w="0">
-            <a:noFill/>
-          </a:ln>
-        </p:spPr>
-        <p:style>
-          <a:lnRef idx="0"/>
-          <a:fillRef idx="0"/>
-          <a:effectRef idx="0"/>
-          <a:fontRef idx="minor"/>
-        </p:style>
-      </p:sp>
-      <p:sp>
-        <p:nvSpPr>
-          <p:cNvPr id="136" name="Text 12"/>
-          <p:cNvSpPr/>
-          <p:nvPr/>
-        </p:nvSpPr>
-        <p:spPr>
-          <a:xfrm>
-            <a:off x="475560" y="4343400"/>
-            <a:ext cx="8274960" cy="594000"/>
-          </a:xfrm>
-          <a:prstGeom prst="rect">
-            <a:avLst/>
-          </a:prstGeom>
-          <a:noFill/>
-          <a:ln w="0">
-            <a:noFill/>
-          </a:ln>
-        </p:spPr>
-        <p:style>
-          <a:lnRef idx="0"/>
-          <a:fillRef idx="0"/>
-          <a:effectRef idx="0"/>
-          <a:fontRef idx="minor"/>
-        </p:style>
-        <p:txBody>
-          <a:bodyPr lIns="90000" rIns="90000" tIns="45000" bIns="45000" anchor="ctr">
-            <a:noAutofit/>
-          </a:bodyPr>
-          <a:p>
-            <a:pPr>
-              <a:lnSpc>
-                <a:spcPct val="100000"/>
-              </a:lnSpc>
-              <a:buNone/>
-              <a:tabLst>
-                <a:tab algn="l" pos="0"/>
-              </a:tabLst>
-            </a:pPr>
-            <a:r>
-              <a:rPr b="0" lang="en-US" sz="1100" spc="-1" strike="noStrike">
-                <a:solidFill>
-                  <a:srgbClr val="1e293b"/>
-                </a:solidFill>
-                <a:latin typeface="Calibri"/>
-              </a:rPr>
-              <a:t>💡  </a:t>
-            </a:r>
-            <a:r>
-              <a:rPr b="0" lang="en-US" sz="1100" spc="-1" strike="noStrike">
-                <a:solidFill>
-                  <a:srgbClr val="1e293b"/>
-                </a:solidFill>
-                <a:latin typeface="Calibri"/>
-              </a:rPr>
-              <a:t>Key Insight: temperature=0 is ideal for production apps requiring consistent, reliable output. Raise it gradually for creative tasks — try 0.7 for balanced, 1.2+ for highly imaginative results.</a:t>
-            </a:r>
-            <a:endParaRPr b="0" lang="en-IN" sz="1100" spc="-1" strike="noStrike">
+            <a:r>
+              <a:rPr b="0" lang="en-IN" sz="1200" spc="-1" strike="noStrike">
+                <a:latin typeface="Arial"/>
+              </a:rPr>
+              <a:t>Earth cries with each raindrop’s fall, a plea,</a:t>
+            </a:r>
+            <a:endParaRPr b="0" lang="en-IN" sz="1200" spc="-1" strike="noStrike">
+              <a:latin typeface="Arial"/>
+            </a:endParaRPr>
+          </a:p>
+          <a:p>
+            <a:r>
+              <a:rPr b="0" lang="en-IN" sz="1200" spc="-1" strike="noStrike">
+                <a:latin typeface="Arial"/>
+              </a:rPr>
+              <a:t>Winds whisper of a dying decree.</a:t>
+            </a:r>
+            <a:endParaRPr b="0" lang="en-IN" sz="1200" spc="-1" strike="noStrike">
+              <a:latin typeface="Arial"/>
+            </a:endParaRPr>
+          </a:p>
+          <a:p>
+            <a:r>
+              <a:rPr b="0" lang="en-IN" sz="1200" spc="-1" strike="noStrike">
+                <a:latin typeface="Arial"/>
+              </a:rPr>
+              <a:t>Ice turning to tears, forests to ash,</a:t>
+            </a:r>
+            <a:endParaRPr b="0" lang="en-IN" sz="1200" spc="-1" strike="noStrike">
+              <a:latin typeface="Arial"/>
+            </a:endParaRPr>
+          </a:p>
+          <a:p>
+            <a:r>
+              <a:rPr b="0" lang="en-IN" sz="1200" spc="-1" strike="noStrike">
+                <a:latin typeface="Arial"/>
+              </a:rPr>
+              <a:t>Our reckless actions, a calamitous clash.</a:t>
+            </a:r>
+            <a:endParaRPr b="0" lang="en-IN" sz="1200" spc="-1" strike="noStrike">
+              <a:latin typeface="Arial"/>
+            </a:endParaRPr>
+          </a:p>
+          <a:p>
+            <a:r>
+              <a:rPr b="0" lang="en-IN" sz="1200" spc="-1" strike="noStrike">
+                <a:latin typeface="Arial"/>
+              </a:rPr>
+              <a:t>Let's heal her wounds, let the change be in we.</a:t>
+            </a:r>
+            <a:endParaRPr b="0" lang="en-IN" sz="1200" spc="-1" strike="noStrike">
               <a:latin typeface="Arial"/>
             </a:endParaRPr>
           </a:p>
@@ -9610,14 +9512,14 @@
       </p:grpSpPr>
       <p:sp>
         <p:nvSpPr>
-          <p:cNvPr id="137" name="Shape 0"/>
+          <p:cNvPr id="136" name="Shape 0"/>
           <p:cNvSpPr/>
           <p:nvPr/>
         </p:nvSpPr>
         <p:spPr>
           <a:xfrm>
             <a:off x="0" y="0"/>
-            <a:ext cx="9143640" cy="822600"/>
+            <a:ext cx="9143280" cy="822240"/>
           </a:xfrm>
           <a:prstGeom prst="rect">
             <a:avLst/>
@@ -9638,14 +9540,14 @@
       </p:sp>
       <p:sp>
         <p:nvSpPr>
-          <p:cNvPr id="138" name="Text 1"/>
+          <p:cNvPr id="137" name="Text 1"/>
           <p:cNvSpPr/>
           <p:nvPr/>
         </p:nvSpPr>
         <p:spPr>
           <a:xfrm>
             <a:off x="411480" y="0"/>
-            <a:ext cx="8320680" cy="822600"/>
+            <a:ext cx="8320320" cy="822240"/>
           </a:xfrm>
           <a:prstGeom prst="rect">
             <a:avLst/>
@@ -9681,6 +9583,7 @@
                   <a:srgbClr val="ffffff"/>
                 </a:solidFill>
                 <a:latin typeface="Calibri"/>
+                <a:ea typeface="DejaVu Sans"/>
               </a:rPr>
               <a:t>What Are Prompts?</a:t>
             </a:r>
@@ -9692,14 +9595,14 @@
       </p:sp>
       <p:sp>
         <p:nvSpPr>
-          <p:cNvPr id="139" name="Shape 2"/>
+          <p:cNvPr id="138" name="Shape 2"/>
           <p:cNvSpPr/>
           <p:nvPr/>
         </p:nvSpPr>
         <p:spPr>
           <a:xfrm>
             <a:off x="320040" y="932760"/>
-            <a:ext cx="8503560" cy="502560"/>
+            <a:ext cx="8503200" cy="502200"/>
           </a:xfrm>
           <a:prstGeom prst="rect">
             <a:avLst/>
@@ -9720,14 +9623,14 @@
       </p:sp>
       <p:sp>
         <p:nvSpPr>
-          <p:cNvPr id="140" name="Text 3"/>
+          <p:cNvPr id="139" name="Text 3"/>
           <p:cNvSpPr/>
           <p:nvPr/>
         </p:nvSpPr>
         <p:spPr>
           <a:xfrm>
             <a:off x="411480" y="932760"/>
-            <a:ext cx="8320680" cy="502560"/>
+            <a:ext cx="8320320" cy="502200"/>
           </a:xfrm>
           <a:prstGeom prst="rect">
             <a:avLst/>
@@ -9763,6 +9666,7 @@
                   <a:srgbClr val="ffffff"/>
                 </a:solidFill>
                 <a:latin typeface="Calibri"/>
+                <a:ea typeface="DejaVu Sans"/>
               </a:rPr>
               <a:t>A prompt is the instruction you send to an LLM to direct and shape its response</a:t>
             </a:r>
@@ -9774,14 +9678,14 @@
       </p:sp>
       <p:sp>
         <p:nvSpPr>
-          <p:cNvPr id="141" name="Shape 4"/>
+          <p:cNvPr id="140" name="Shape 4"/>
           <p:cNvSpPr/>
           <p:nvPr/>
         </p:nvSpPr>
         <p:spPr>
           <a:xfrm>
             <a:off x="292680" y="1572840"/>
-            <a:ext cx="2788560" cy="3337200"/>
+            <a:ext cx="2788200" cy="3336840"/>
           </a:xfrm>
           <a:prstGeom prst="rect">
             <a:avLst/>
@@ -9809,14 +9713,14 @@
       </p:sp>
       <p:sp>
         <p:nvSpPr>
-          <p:cNvPr id="142" name="Shape 5"/>
+          <p:cNvPr id="141" name="Shape 5"/>
           <p:cNvSpPr/>
           <p:nvPr/>
         </p:nvSpPr>
         <p:spPr>
           <a:xfrm>
             <a:off x="292680" y="1572840"/>
-            <a:ext cx="2788560" cy="548280"/>
+            <a:ext cx="2788200" cy="547920"/>
           </a:xfrm>
           <a:prstGeom prst="rect">
             <a:avLst/>
@@ -9837,14 +9741,14 @@
       </p:sp>
       <p:sp>
         <p:nvSpPr>
-          <p:cNvPr id="143" name="Text 6"/>
+          <p:cNvPr id="142" name="Text 6"/>
           <p:cNvSpPr/>
           <p:nvPr/>
         </p:nvSpPr>
         <p:spPr>
           <a:xfrm>
             <a:off x="402480" y="1572840"/>
-            <a:ext cx="2633040" cy="383760"/>
+            <a:ext cx="2632680" cy="383400"/>
           </a:xfrm>
           <a:prstGeom prst="rect">
             <a:avLst/>
@@ -9880,6 +9784,7 @@
                   <a:srgbClr val="ffffff"/>
                 </a:solidFill>
                 <a:latin typeface="Calibri"/>
+                <a:ea typeface="DejaVu Sans"/>
               </a:rPr>
               <a:t>📝  </a:t>
             </a:r>
@@ -9889,6 +9794,7 @@
                   <a:srgbClr val="ffffff"/>
                 </a:solidFill>
                 <a:latin typeface="Calibri"/>
+                <a:ea typeface="DejaVu Sans"/>
               </a:rPr>
               <a:t>Text-Based</a:t>
             </a:r>
@@ -9900,14 +9806,14 @@
       </p:sp>
       <p:sp>
         <p:nvSpPr>
-          <p:cNvPr id="144" name="Text 7"/>
-          <p:cNvSpPr/>
-          <p:nvPr/>
-        </p:nvSpPr>
-        <p:spPr>
-          <a:xfrm>
-            <a:off x="402480" y="1938600"/>
-            <a:ext cx="2633040" cy="237240"/>
+          <p:cNvPr id="143" name="Text 7"/>
+          <p:cNvSpPr/>
+          <p:nvPr/>
+        </p:nvSpPr>
+        <p:spPr>
+          <a:xfrm>
+            <a:off x="640800" y="1891080"/>
+            <a:ext cx="2632680" cy="236880"/>
           </a:xfrm>
           <a:prstGeom prst="rect">
             <a:avLst/>
@@ -9940,28 +9846,32 @@
             <a:r>
               <a:rPr b="0" i="1" lang="en-US" sz="1000" spc="-1" strike="noStrike">
                 <a:solidFill>
-                  <a:srgbClr val="64748b"/>
-                </a:solidFill>
-                <a:latin typeface="Calibri"/>
+                  <a:srgbClr val="000000"/>
+                </a:solidFill>
+                <a:latin typeface="Calibri"/>
+                <a:ea typeface="DejaVu Sans"/>
               </a:rPr>
               <a:t>Most common prompt type</a:t>
             </a:r>
             <a:endParaRPr b="0" lang="en-IN" sz="1000" spc="-1" strike="noStrike">
-              <a:latin typeface="Arial"/>
-            </a:endParaRPr>
-          </a:p>
-        </p:txBody>
-      </p:sp>
-      <p:sp>
-        <p:nvSpPr>
-          <p:cNvPr id="145" name="Shape 8"/>
+              <a:solidFill>
+                <a:srgbClr val="000000"/>
+              </a:solidFill>
+              <a:latin typeface="Arial"/>
+            </a:endParaRPr>
+          </a:p>
+        </p:txBody>
+      </p:sp>
+      <p:sp>
+        <p:nvSpPr>
+          <p:cNvPr id="144" name="Shape 8"/>
           <p:cNvSpPr/>
           <p:nvPr/>
         </p:nvSpPr>
         <p:spPr>
           <a:xfrm>
             <a:off x="402480" y="2240280"/>
-            <a:ext cx="2605680" cy="456840"/>
+            <a:ext cx="2605320" cy="456480"/>
           </a:xfrm>
           <a:prstGeom prst="rect">
             <a:avLst/>
@@ -9982,14 +9892,14 @@
       </p:sp>
       <p:sp>
         <p:nvSpPr>
-          <p:cNvPr id="146" name="Text 9"/>
+          <p:cNvPr id="145" name="Text 9"/>
           <p:cNvSpPr/>
           <p:nvPr/>
         </p:nvSpPr>
         <p:spPr>
           <a:xfrm>
             <a:off x="457200" y="2240280"/>
-            <a:ext cx="2486880" cy="456840"/>
+            <a:ext cx="2486520" cy="456480"/>
           </a:xfrm>
           <a:prstGeom prst="rect">
             <a:avLst/>
@@ -10037,14 +9947,14 @@
       </p:sp>
       <p:sp>
         <p:nvSpPr>
-          <p:cNvPr id="147" name="Shape 10"/>
+          <p:cNvPr id="146" name="Shape 10"/>
           <p:cNvSpPr/>
           <p:nvPr/>
         </p:nvSpPr>
         <p:spPr>
           <a:xfrm>
             <a:off x="402480" y="2807280"/>
-            <a:ext cx="2605680" cy="456840"/>
+            <a:ext cx="2605320" cy="456480"/>
           </a:xfrm>
           <a:prstGeom prst="rect">
             <a:avLst/>
@@ -10065,14 +9975,14 @@
       </p:sp>
       <p:sp>
         <p:nvSpPr>
-          <p:cNvPr id="148" name="Text 11"/>
+          <p:cNvPr id="147" name="Text 11"/>
           <p:cNvSpPr/>
           <p:nvPr/>
         </p:nvSpPr>
         <p:spPr>
           <a:xfrm>
             <a:off x="457200" y="2807280"/>
-            <a:ext cx="2486880" cy="456840"/>
+            <a:ext cx="2486520" cy="456480"/>
           </a:xfrm>
           <a:prstGeom prst="rect">
             <a:avLst/>
@@ -10120,14 +10030,14 @@
       </p:sp>
       <p:sp>
         <p:nvSpPr>
-          <p:cNvPr id="149" name="Shape 12"/>
+          <p:cNvPr id="148" name="Shape 12"/>
           <p:cNvSpPr/>
           <p:nvPr/>
         </p:nvSpPr>
         <p:spPr>
           <a:xfrm>
             <a:off x="402480" y="3374280"/>
-            <a:ext cx="2605680" cy="456840"/>
+            <a:ext cx="2605320" cy="456480"/>
           </a:xfrm>
           <a:prstGeom prst="rect">
             <a:avLst/>
@@ -10148,14 +10058,14 @@
       </p:sp>
       <p:sp>
         <p:nvSpPr>
-          <p:cNvPr id="150" name="Text 13"/>
+          <p:cNvPr id="149" name="Text 13"/>
           <p:cNvSpPr/>
           <p:nvPr/>
         </p:nvSpPr>
         <p:spPr>
           <a:xfrm>
             <a:off x="457200" y="3374280"/>
-            <a:ext cx="2486880" cy="456840"/>
+            <a:ext cx="2486520" cy="456480"/>
           </a:xfrm>
           <a:prstGeom prst="rect">
             <a:avLst/>
@@ -10203,14 +10113,14 @@
       </p:sp>
       <p:sp>
         <p:nvSpPr>
-          <p:cNvPr id="151" name="Shape 14"/>
+          <p:cNvPr id="150" name="Shape 14"/>
           <p:cNvSpPr/>
           <p:nvPr/>
         </p:nvSpPr>
         <p:spPr>
           <a:xfrm>
             <a:off x="402480" y="4005000"/>
-            <a:ext cx="2605680" cy="804240"/>
+            <a:ext cx="2605320" cy="803880"/>
           </a:xfrm>
           <a:prstGeom prst="rect">
             <a:avLst/>
@@ -10233,14 +10143,14 @@
       </p:sp>
       <p:sp>
         <p:nvSpPr>
-          <p:cNvPr id="152" name="Text 15"/>
+          <p:cNvPr id="151" name="Text 15"/>
           <p:cNvSpPr/>
           <p:nvPr/>
         </p:nvSpPr>
         <p:spPr>
           <a:xfrm>
             <a:off x="457200" y="4005000"/>
-            <a:ext cx="2486880" cy="804240"/>
+            <a:ext cx="2486520" cy="803880"/>
           </a:xfrm>
           <a:prstGeom prst="rect">
             <a:avLst/>
@@ -10276,6 +10186,7 @@
                   <a:srgbClr val="1e293b"/>
                 </a:solidFill>
                 <a:latin typeface="Calibri"/>
+                <a:ea typeface="DejaVu Sans"/>
               </a:rPr>
               <a:t>💡 </a:t>
             </a:r>
@@ -10285,6 +10196,7 @@
                   <a:srgbClr val="1e293b"/>
                 </a:solidFill>
                 <a:latin typeface="Calibri"/>
+                <a:ea typeface="DejaVu Sans"/>
               </a:rPr>
               <a:t>Works with all LLMs. Plain natural language instructions.</a:t>
             </a:r>
@@ -10296,14 +10208,14 @@
       </p:sp>
       <p:sp>
         <p:nvSpPr>
-          <p:cNvPr id="153" name="Shape 16"/>
+          <p:cNvPr id="152" name="Shape 16"/>
           <p:cNvSpPr/>
           <p:nvPr/>
         </p:nvSpPr>
         <p:spPr>
           <a:xfrm>
             <a:off x="3237120" y="1572840"/>
-            <a:ext cx="2788560" cy="3337200"/>
+            <a:ext cx="2788200" cy="3336840"/>
           </a:xfrm>
           <a:prstGeom prst="rect">
             <a:avLst/>
@@ -10331,14 +10243,14 @@
       </p:sp>
       <p:sp>
         <p:nvSpPr>
-          <p:cNvPr id="154" name="Shape 17"/>
+          <p:cNvPr id="153" name="Shape 17"/>
           <p:cNvSpPr/>
           <p:nvPr/>
         </p:nvSpPr>
         <p:spPr>
           <a:xfrm>
             <a:off x="3237120" y="1572840"/>
-            <a:ext cx="2788560" cy="548280"/>
+            <a:ext cx="2788200" cy="547920"/>
           </a:xfrm>
           <a:prstGeom prst="rect">
             <a:avLst/>
@@ -10359,14 +10271,14 @@
       </p:sp>
       <p:sp>
         <p:nvSpPr>
-          <p:cNvPr id="155" name="Text 18"/>
+          <p:cNvPr id="154" name="Text 18"/>
           <p:cNvSpPr/>
           <p:nvPr/>
         </p:nvSpPr>
         <p:spPr>
           <a:xfrm>
             <a:off x="3346560" y="1572840"/>
-            <a:ext cx="2633040" cy="383760"/>
+            <a:ext cx="2632680" cy="383400"/>
           </a:xfrm>
           <a:prstGeom prst="rect">
             <a:avLst/>
@@ -10402,6 +10314,7 @@
                   <a:srgbClr val="ffffff"/>
                 </a:solidFill>
                 <a:latin typeface="Calibri"/>
+                <a:ea typeface="DejaVu Sans"/>
               </a:rPr>
               <a:t>🖼️  </a:t>
             </a:r>
@@ -10411,6 +10324,7 @@
                   <a:srgbClr val="ffffff"/>
                 </a:solidFill>
                 <a:latin typeface="Calibri"/>
+                <a:ea typeface="DejaVu Sans"/>
               </a:rPr>
               <a:t>Image-Based</a:t>
             </a:r>
@@ -10422,14 +10336,14 @@
       </p:sp>
       <p:sp>
         <p:nvSpPr>
-          <p:cNvPr id="156" name="Text 19"/>
-          <p:cNvSpPr/>
-          <p:nvPr/>
-        </p:nvSpPr>
-        <p:spPr>
-          <a:xfrm>
-            <a:off x="3346560" y="1938600"/>
-            <a:ext cx="2633040" cy="237240"/>
+          <p:cNvPr id="155" name="Text 19"/>
+          <p:cNvSpPr/>
+          <p:nvPr/>
+        </p:nvSpPr>
+        <p:spPr>
+          <a:xfrm>
+            <a:off x="3600000" y="1883880"/>
+            <a:ext cx="2632680" cy="236880"/>
           </a:xfrm>
           <a:prstGeom prst="rect">
             <a:avLst/>
@@ -10462,28 +10376,32 @@
             <a:r>
               <a:rPr b="0" i="1" lang="en-US" sz="1000" spc="-1" strike="noStrike">
                 <a:solidFill>
-                  <a:srgbClr val="64748b"/>
-                </a:solidFill>
-                <a:latin typeface="Calibri"/>
+                  <a:srgbClr val="000000"/>
+                </a:solidFill>
+                <a:latin typeface="Calibri"/>
+                <a:ea typeface="DejaVu Sans"/>
               </a:rPr>
               <a:t>Vision-capable models</a:t>
             </a:r>
             <a:endParaRPr b="0" lang="en-IN" sz="1000" spc="-1" strike="noStrike">
-              <a:latin typeface="Arial"/>
-            </a:endParaRPr>
-          </a:p>
-        </p:txBody>
-      </p:sp>
-      <p:sp>
-        <p:nvSpPr>
-          <p:cNvPr id="157" name="Shape 20"/>
+              <a:solidFill>
+                <a:srgbClr val="000000"/>
+              </a:solidFill>
+              <a:latin typeface="Arial"/>
+            </a:endParaRPr>
+          </a:p>
+        </p:txBody>
+      </p:sp>
+      <p:sp>
+        <p:nvSpPr>
+          <p:cNvPr id="156" name="Shape 20"/>
           <p:cNvSpPr/>
           <p:nvPr/>
         </p:nvSpPr>
         <p:spPr>
           <a:xfrm>
             <a:off x="3346560" y="2240280"/>
-            <a:ext cx="2605680" cy="456840"/>
+            <a:ext cx="2605320" cy="456480"/>
           </a:xfrm>
           <a:prstGeom prst="rect">
             <a:avLst/>
@@ -10504,14 +10422,14 @@
       </p:sp>
       <p:sp>
         <p:nvSpPr>
-          <p:cNvPr id="158" name="Text 21"/>
+          <p:cNvPr id="157" name="Text 21"/>
           <p:cNvSpPr/>
           <p:nvPr/>
         </p:nvSpPr>
         <p:spPr>
           <a:xfrm>
             <a:off x="3401640" y="2240280"/>
-            <a:ext cx="2486880" cy="456840"/>
+            <a:ext cx="2486520" cy="456480"/>
           </a:xfrm>
           <a:prstGeom prst="rect">
             <a:avLst/>
@@ -10559,14 +10477,14 @@
       </p:sp>
       <p:sp>
         <p:nvSpPr>
-          <p:cNvPr id="159" name="Shape 22"/>
+          <p:cNvPr id="158" name="Shape 22"/>
           <p:cNvSpPr/>
           <p:nvPr/>
         </p:nvSpPr>
         <p:spPr>
           <a:xfrm>
             <a:off x="3346560" y="2807280"/>
-            <a:ext cx="2605680" cy="456840"/>
+            <a:ext cx="2605320" cy="456480"/>
           </a:xfrm>
           <a:prstGeom prst="rect">
             <a:avLst/>
@@ -10587,14 +10505,14 @@
       </p:sp>
       <p:sp>
         <p:nvSpPr>
-          <p:cNvPr id="160" name="Text 23"/>
+          <p:cNvPr id="159" name="Text 23"/>
           <p:cNvSpPr/>
           <p:nvPr/>
         </p:nvSpPr>
         <p:spPr>
           <a:xfrm>
             <a:off x="3401640" y="2807280"/>
-            <a:ext cx="2486880" cy="456840"/>
+            <a:ext cx="2486520" cy="456480"/>
           </a:xfrm>
           <a:prstGeom prst="rect">
             <a:avLst/>
@@ -10642,14 +10560,14 @@
       </p:sp>
       <p:sp>
         <p:nvSpPr>
-          <p:cNvPr id="161" name="Shape 24"/>
+          <p:cNvPr id="160" name="Shape 24"/>
           <p:cNvSpPr/>
           <p:nvPr/>
         </p:nvSpPr>
         <p:spPr>
           <a:xfrm>
             <a:off x="3346560" y="3374280"/>
-            <a:ext cx="2605680" cy="456840"/>
+            <a:ext cx="2605320" cy="456480"/>
           </a:xfrm>
           <a:prstGeom prst="rect">
             <a:avLst/>
@@ -10670,14 +10588,14 @@
       </p:sp>
       <p:sp>
         <p:nvSpPr>
-          <p:cNvPr id="162" name="Text 25"/>
+          <p:cNvPr id="161" name="Text 25"/>
           <p:cNvSpPr/>
           <p:nvPr/>
         </p:nvSpPr>
         <p:spPr>
           <a:xfrm>
             <a:off x="3401640" y="3374280"/>
-            <a:ext cx="2486880" cy="456840"/>
+            <a:ext cx="2486520" cy="456480"/>
           </a:xfrm>
           <a:prstGeom prst="rect">
             <a:avLst/>
@@ -10725,14 +10643,14 @@
       </p:sp>
       <p:sp>
         <p:nvSpPr>
-          <p:cNvPr id="163" name="Shape 26"/>
+          <p:cNvPr id="162" name="Shape 26"/>
           <p:cNvSpPr/>
           <p:nvPr/>
         </p:nvSpPr>
         <p:spPr>
           <a:xfrm>
             <a:off x="3346560" y="4005000"/>
-            <a:ext cx="2605680" cy="804240"/>
+            <a:ext cx="2605320" cy="803880"/>
           </a:xfrm>
           <a:prstGeom prst="rect">
             <a:avLst/>
@@ -10755,14 +10673,14 @@
       </p:sp>
       <p:sp>
         <p:nvSpPr>
-          <p:cNvPr id="164" name="Text 27"/>
+          <p:cNvPr id="163" name="Text 27"/>
           <p:cNvSpPr/>
           <p:nvPr/>
         </p:nvSpPr>
         <p:spPr>
           <a:xfrm>
             <a:off x="3401640" y="4005000"/>
-            <a:ext cx="2486880" cy="804240"/>
+            <a:ext cx="2486520" cy="803880"/>
           </a:xfrm>
           <a:prstGeom prst="rect">
             <a:avLst/>
@@ -10798,6 +10716,7 @@
                   <a:srgbClr val="1e293b"/>
                 </a:solidFill>
                 <a:latin typeface="Calibri"/>
+                <a:ea typeface="DejaVu Sans"/>
               </a:rPr>
               <a:t>💡 </a:t>
             </a:r>
@@ -10807,6 +10726,7 @@
                   <a:srgbClr val="1e293b"/>
                 </a:solidFill>
                 <a:latin typeface="Calibri"/>
+                <a:ea typeface="DejaVu Sans"/>
               </a:rPr>
               <a:t>Requires multimodal models: GPT-4o, Claude 3, Gemini.</a:t>
             </a:r>
@@ -10818,14 +10738,14 @@
       </p:sp>
       <p:sp>
         <p:nvSpPr>
-          <p:cNvPr id="165" name="Shape 28"/>
+          <p:cNvPr id="164" name="Shape 28"/>
           <p:cNvSpPr/>
           <p:nvPr/>
         </p:nvSpPr>
         <p:spPr>
           <a:xfrm>
             <a:off x="6181200" y="1572840"/>
-            <a:ext cx="2788560" cy="3337200"/>
+            <a:ext cx="2788200" cy="3336840"/>
           </a:xfrm>
           <a:prstGeom prst="rect">
             <a:avLst/>
@@ -10853,14 +10773,14 @@
       </p:sp>
       <p:sp>
         <p:nvSpPr>
-          <p:cNvPr id="166" name="Shape 29"/>
+          <p:cNvPr id="165" name="Shape 29"/>
           <p:cNvSpPr/>
           <p:nvPr/>
         </p:nvSpPr>
         <p:spPr>
           <a:xfrm>
             <a:off x="6181200" y="1572840"/>
-            <a:ext cx="2788560" cy="548280"/>
+            <a:ext cx="2788200" cy="547920"/>
           </a:xfrm>
           <a:prstGeom prst="rect">
             <a:avLst/>
@@ -10881,14 +10801,14 @@
       </p:sp>
       <p:sp>
         <p:nvSpPr>
-          <p:cNvPr id="167" name="Text 30"/>
+          <p:cNvPr id="166" name="Text 30"/>
           <p:cNvSpPr/>
           <p:nvPr/>
         </p:nvSpPr>
         <p:spPr>
           <a:xfrm>
             <a:off x="6291000" y="1572840"/>
-            <a:ext cx="2633040" cy="383760"/>
+            <a:ext cx="2632680" cy="383400"/>
           </a:xfrm>
           <a:prstGeom prst="rect">
             <a:avLst/>
@@ -10924,6 +10844,7 @@
                   <a:srgbClr val="ffffff"/>
                 </a:solidFill>
                 <a:latin typeface="Calibri"/>
+                <a:ea typeface="DejaVu Sans"/>
               </a:rPr>
               <a:t>🎵  </a:t>
             </a:r>
@@ -10933,6 +10854,7 @@
                   <a:srgbClr val="ffffff"/>
                 </a:solidFill>
                 <a:latin typeface="Calibri"/>
+                <a:ea typeface="DejaVu Sans"/>
               </a:rPr>
               <a:t>Audio / Video</a:t>
             </a:r>
@@ -10944,14 +10866,14 @@
       </p:sp>
       <p:sp>
         <p:nvSpPr>
-          <p:cNvPr id="168" name="Text 31"/>
-          <p:cNvSpPr/>
-          <p:nvPr/>
-        </p:nvSpPr>
-        <p:spPr>
-          <a:xfrm>
-            <a:off x="6291000" y="1938600"/>
-            <a:ext cx="2633040" cy="237240"/>
+          <p:cNvPr id="167" name="Text 31"/>
+          <p:cNvSpPr/>
+          <p:nvPr/>
+        </p:nvSpPr>
+        <p:spPr>
+          <a:xfrm>
+            <a:off x="6547320" y="1883880"/>
+            <a:ext cx="2632680" cy="236880"/>
           </a:xfrm>
           <a:prstGeom prst="rect">
             <a:avLst/>
@@ -10984,28 +10906,32 @@
             <a:r>
               <a:rPr b="0" i="1" lang="en-US" sz="1000" spc="-1" strike="noStrike">
                 <a:solidFill>
-                  <a:srgbClr val="64748b"/>
-                </a:solidFill>
-                <a:latin typeface="Calibri"/>
+                  <a:srgbClr val="000000"/>
+                </a:solidFill>
+                <a:latin typeface="Calibri"/>
+                <a:ea typeface="DejaVu Sans"/>
               </a:rPr>
               <a:t>Advanced multimodal</a:t>
             </a:r>
             <a:endParaRPr b="0" lang="en-IN" sz="1000" spc="-1" strike="noStrike">
-              <a:latin typeface="Arial"/>
-            </a:endParaRPr>
-          </a:p>
-        </p:txBody>
-      </p:sp>
-      <p:sp>
-        <p:nvSpPr>
-          <p:cNvPr id="169" name="Shape 32"/>
+              <a:solidFill>
+                <a:srgbClr val="000000"/>
+              </a:solidFill>
+              <a:latin typeface="Arial"/>
+            </a:endParaRPr>
+          </a:p>
+        </p:txBody>
+      </p:sp>
+      <p:sp>
+        <p:nvSpPr>
+          <p:cNvPr id="168" name="Shape 32"/>
           <p:cNvSpPr/>
           <p:nvPr/>
         </p:nvSpPr>
         <p:spPr>
           <a:xfrm>
             <a:off x="6291000" y="2240280"/>
-            <a:ext cx="2605680" cy="456840"/>
+            <a:ext cx="2605320" cy="456480"/>
           </a:xfrm>
           <a:prstGeom prst="rect">
             <a:avLst/>
@@ -11026,14 +10952,14 @@
       </p:sp>
       <p:sp>
         <p:nvSpPr>
-          <p:cNvPr id="170" name="Text 33"/>
+          <p:cNvPr id="169" name="Text 33"/>
           <p:cNvSpPr/>
           <p:nvPr/>
         </p:nvSpPr>
         <p:spPr>
           <a:xfrm>
             <a:off x="6346080" y="2240280"/>
-            <a:ext cx="2486880" cy="456840"/>
+            <a:ext cx="2486520" cy="456480"/>
           </a:xfrm>
           <a:prstGeom prst="rect">
             <a:avLst/>
@@ -11081,14 +11007,14 @@
       </p:sp>
       <p:sp>
         <p:nvSpPr>
-          <p:cNvPr id="171" name="Shape 34"/>
+          <p:cNvPr id="170" name="Shape 34"/>
           <p:cNvSpPr/>
           <p:nvPr/>
         </p:nvSpPr>
         <p:spPr>
           <a:xfrm>
             <a:off x="6291000" y="2807280"/>
-            <a:ext cx="2605680" cy="456840"/>
+            <a:ext cx="2605320" cy="456480"/>
           </a:xfrm>
           <a:prstGeom prst="rect">
             <a:avLst/>
@@ -11109,14 +11035,14 @@
       </p:sp>
       <p:sp>
         <p:nvSpPr>
-          <p:cNvPr id="172" name="Text 35"/>
+          <p:cNvPr id="171" name="Text 35"/>
           <p:cNvSpPr/>
           <p:nvPr/>
         </p:nvSpPr>
         <p:spPr>
           <a:xfrm>
             <a:off x="6346080" y="2807280"/>
-            <a:ext cx="2486880" cy="456840"/>
+            <a:ext cx="2486520" cy="456480"/>
           </a:xfrm>
           <a:prstGeom prst="rect">
             <a:avLst/>
@@ -11164,14 +11090,14 @@
       </p:sp>
       <p:sp>
         <p:nvSpPr>
-          <p:cNvPr id="173" name="Shape 36"/>
+          <p:cNvPr id="172" name="Shape 36"/>
           <p:cNvSpPr/>
           <p:nvPr/>
         </p:nvSpPr>
         <p:spPr>
           <a:xfrm>
             <a:off x="6291000" y="3374280"/>
-            <a:ext cx="2605680" cy="456840"/>
+            <a:ext cx="2605320" cy="456480"/>
           </a:xfrm>
           <a:prstGeom prst="rect">
             <a:avLst/>
@@ -11192,14 +11118,14 @@
       </p:sp>
       <p:sp>
         <p:nvSpPr>
-          <p:cNvPr id="174" name="Text 37"/>
+          <p:cNvPr id="173" name="Text 37"/>
           <p:cNvSpPr/>
           <p:nvPr/>
         </p:nvSpPr>
         <p:spPr>
           <a:xfrm>
             <a:off x="6346080" y="3374280"/>
-            <a:ext cx="2486880" cy="456840"/>
+            <a:ext cx="2486520" cy="456480"/>
           </a:xfrm>
           <a:prstGeom prst="rect">
             <a:avLst/>
@@ -11247,14 +11173,14 @@
       </p:sp>
       <p:sp>
         <p:nvSpPr>
-          <p:cNvPr id="175" name="Shape 38"/>
+          <p:cNvPr id="174" name="Shape 38"/>
           <p:cNvSpPr/>
           <p:nvPr/>
         </p:nvSpPr>
         <p:spPr>
           <a:xfrm>
             <a:off x="6291000" y="4005000"/>
-            <a:ext cx="2605680" cy="804240"/>
+            <a:ext cx="2605320" cy="803880"/>
           </a:xfrm>
           <a:prstGeom prst="rect">
             <a:avLst/>
@@ -11277,14 +11203,14 @@
       </p:sp>
       <p:sp>
         <p:nvSpPr>
-          <p:cNvPr id="176" name="Text 39"/>
+          <p:cNvPr id="175" name="Text 39"/>
           <p:cNvSpPr/>
           <p:nvPr/>
         </p:nvSpPr>
         <p:spPr>
           <a:xfrm>
             <a:off x="6346080" y="4005000"/>
-            <a:ext cx="2486880" cy="804240"/>
+            <a:ext cx="2486520" cy="803880"/>
           </a:xfrm>
           <a:prstGeom prst="rect">
             <a:avLst/>
@@ -11320,6 +11246,7 @@
                   <a:srgbClr val="1e293b"/>
                 </a:solidFill>
                 <a:latin typeface="Calibri"/>
+                <a:ea typeface="DejaVu Sans"/>
               </a:rPr>
               <a:t>💡 </a:t>
             </a:r>
@@ -11329,6 +11256,7 @@
                   <a:srgbClr val="1e293b"/>
                 </a:solidFill>
                 <a:latin typeface="Calibri"/>
+                <a:ea typeface="DejaVu Sans"/>
               </a:rPr>
               <a:t>Emerging capability — Whisper, Gemini 1.5 Pro, etc.</a:t>
             </a:r>
@@ -11377,14 +11305,14 @@
       </p:grpSpPr>
       <p:sp>
         <p:nvSpPr>
-          <p:cNvPr id="177" name="Shape 0"/>
+          <p:cNvPr id="176" name="Shape 0"/>
           <p:cNvSpPr/>
           <p:nvPr/>
         </p:nvSpPr>
         <p:spPr>
           <a:xfrm>
             <a:off x="0" y="0"/>
-            <a:ext cx="9143640" cy="822600"/>
+            <a:ext cx="9143280" cy="822240"/>
           </a:xfrm>
           <a:prstGeom prst="rect">
             <a:avLst/>
@@ -11405,14 +11333,14 @@
       </p:sp>
       <p:sp>
         <p:nvSpPr>
-          <p:cNvPr id="178" name="Text 1"/>
+          <p:cNvPr id="177" name="Text 1"/>
           <p:cNvSpPr/>
           <p:nvPr/>
         </p:nvSpPr>
         <p:spPr>
           <a:xfrm>
             <a:off x="411480" y="0"/>
-            <a:ext cx="8320680" cy="822600"/>
+            <a:ext cx="8320320" cy="822240"/>
           </a:xfrm>
           <a:prstGeom prst="rect">
             <a:avLst/>
@@ -11448,6 +11376,7 @@
                   <a:srgbClr val="ffffff"/>
                 </a:solidFill>
                 <a:latin typeface="Calibri"/>
+                <a:ea typeface="DejaVu Sans"/>
               </a:rPr>
               <a:t>Why Prompts Are So Important</a:t>
             </a:r>
@@ -11459,14 +11388,14 @@
       </p:sp>
       <p:sp>
         <p:nvSpPr>
-          <p:cNvPr id="179" name="Shape 2"/>
+          <p:cNvPr id="178" name="Shape 2"/>
           <p:cNvSpPr/>
           <p:nvPr/>
         </p:nvSpPr>
         <p:spPr>
           <a:xfrm>
             <a:off x="320040" y="960120"/>
-            <a:ext cx="8503560" cy="1005480"/>
+            <a:ext cx="8503200" cy="1005120"/>
           </a:xfrm>
           <a:prstGeom prst="rect">
             <a:avLst/>
@@ -11487,14 +11416,14 @@
       </p:sp>
       <p:sp>
         <p:nvSpPr>
-          <p:cNvPr id="180" name="Text 3"/>
+          <p:cNvPr id="179" name="Text 3"/>
           <p:cNvSpPr/>
           <p:nvPr/>
         </p:nvSpPr>
         <p:spPr>
           <a:xfrm>
             <a:off x="457200" y="960120"/>
-            <a:ext cx="8229240" cy="1005480"/>
+            <a:ext cx="8228880" cy="1005120"/>
           </a:xfrm>
           <a:prstGeom prst="rect">
             <a:avLst/>
@@ -11530,6 +11459,7 @@
                   <a:srgbClr val="ffffff"/>
                 </a:solidFill>
                 <a:latin typeface="Calibri"/>
+                <a:ea typeface="DejaVu Sans"/>
               </a:rPr>
               <a:t>Output quality depends entirely on the prompt you write — </a:t>
             </a:r>
@@ -11539,6 +11469,7 @@
                   <a:srgbClr val="ccfbf1"/>
                 </a:solidFill>
                 <a:latin typeface="Calibri"/>
+                <a:ea typeface="DejaVu Sans"/>
               </a:rPr>
               <a:t>tiny changes produce dramatically different results.</a:t>
             </a:r>
@@ -11550,14 +11481,14 @@
       </p:sp>
       <p:sp>
         <p:nvSpPr>
-          <p:cNvPr id="181" name="Shape 4"/>
+          <p:cNvPr id="180" name="Shape 4"/>
           <p:cNvSpPr/>
           <p:nvPr/>
         </p:nvSpPr>
         <p:spPr>
           <a:xfrm>
             <a:off x="292680" y="2148840"/>
-            <a:ext cx="2788560" cy="2697120"/>
+            <a:ext cx="2788200" cy="2696760"/>
           </a:xfrm>
           <a:prstGeom prst="rect">
             <a:avLst/>
@@ -11585,14 +11516,14 @@
       </p:sp>
       <p:sp>
         <p:nvSpPr>
-          <p:cNvPr id="182" name="Shape 5"/>
+          <p:cNvPr id="181" name="Shape 5"/>
           <p:cNvSpPr/>
           <p:nvPr/>
         </p:nvSpPr>
         <p:spPr>
           <a:xfrm>
             <a:off x="292680" y="2148840"/>
-            <a:ext cx="2788560" cy="438480"/>
+            <a:ext cx="2788200" cy="438120"/>
           </a:xfrm>
           <a:prstGeom prst="rect">
             <a:avLst/>
@@ -11613,14 +11544,14 @@
       </p:sp>
       <p:sp>
         <p:nvSpPr>
-          <p:cNvPr id="183" name="Text 6"/>
+          <p:cNvPr id="182" name="Text 6"/>
           <p:cNvSpPr/>
           <p:nvPr/>
         </p:nvSpPr>
         <p:spPr>
           <a:xfrm>
             <a:off x="402480" y="2148840"/>
-            <a:ext cx="2633040" cy="438480"/>
+            <a:ext cx="2632680" cy="438120"/>
           </a:xfrm>
           <a:prstGeom prst="rect">
             <a:avLst/>
@@ -11656,6 +11587,7 @@
                   <a:srgbClr val="ffffff"/>
                 </a:solidFill>
                 <a:latin typeface="Calibri"/>
+                <a:ea typeface="DejaVu Sans"/>
               </a:rPr>
               <a:t>Vague Prompt</a:t>
             </a:r>
@@ -11667,14 +11599,14 @@
       </p:sp>
       <p:sp>
         <p:nvSpPr>
-          <p:cNvPr id="184" name="Shape 7"/>
+          <p:cNvPr id="183" name="Shape 7"/>
           <p:cNvSpPr/>
           <p:nvPr/>
         </p:nvSpPr>
         <p:spPr>
           <a:xfrm>
             <a:off x="402480" y="2679120"/>
-            <a:ext cx="2633040" cy="658080"/>
+            <a:ext cx="2632680" cy="657720"/>
           </a:xfrm>
           <a:prstGeom prst="rect">
             <a:avLst/>
@@ -11695,14 +11627,14 @@
       </p:sp>
       <p:sp>
         <p:nvSpPr>
-          <p:cNvPr id="185" name="Text 8"/>
+          <p:cNvPr id="184" name="Text 8"/>
           <p:cNvSpPr/>
           <p:nvPr/>
         </p:nvSpPr>
         <p:spPr>
           <a:xfrm>
             <a:off x="457200" y="2679120"/>
-            <a:ext cx="2523240" cy="658080"/>
+            <a:ext cx="2522880" cy="657720"/>
           </a:xfrm>
           <a:prstGeom prst="rect">
             <a:avLst/>
@@ -11774,14 +11706,14 @@
       </p:sp>
       <p:sp>
         <p:nvSpPr>
-          <p:cNvPr id="186" name="Text 9"/>
+          <p:cNvPr id="185" name="Text 9"/>
           <p:cNvSpPr/>
           <p:nvPr/>
         </p:nvSpPr>
         <p:spPr>
           <a:xfrm>
             <a:off x="402480" y="3401640"/>
-            <a:ext cx="2633040" cy="1352880"/>
+            <a:ext cx="2632680" cy="1352520"/>
           </a:xfrm>
           <a:prstGeom prst="rect">
             <a:avLst/>
@@ -11817,6 +11749,7 @@
                   <a:srgbClr val="1e293b"/>
                 </a:solidFill>
                 <a:latin typeface="Calibri"/>
+                <a:ea typeface="DejaVu Sans"/>
               </a:rPr>
               <a:t>Result: Gets a generic 3-paragraph essay about AI history — not what you probably wanted.</a:t>
             </a:r>
@@ -11828,14 +11761,14 @@
       </p:sp>
       <p:sp>
         <p:nvSpPr>
-          <p:cNvPr id="187" name="Shape 10"/>
+          <p:cNvPr id="186" name="Shape 10"/>
           <p:cNvSpPr/>
           <p:nvPr/>
         </p:nvSpPr>
         <p:spPr>
           <a:xfrm>
             <a:off x="3237120" y="2148840"/>
-            <a:ext cx="2788560" cy="2697120"/>
+            <a:ext cx="2788200" cy="2696760"/>
           </a:xfrm>
           <a:prstGeom prst="rect">
             <a:avLst/>
@@ -11863,14 +11796,14 @@
       </p:sp>
       <p:sp>
         <p:nvSpPr>
-          <p:cNvPr id="188" name="Shape 11"/>
+          <p:cNvPr id="187" name="Shape 11"/>
           <p:cNvSpPr/>
           <p:nvPr/>
         </p:nvSpPr>
         <p:spPr>
           <a:xfrm>
             <a:off x="3237120" y="2148840"/>
-            <a:ext cx="2788560" cy="438480"/>
+            <a:ext cx="2788200" cy="438120"/>
           </a:xfrm>
           <a:prstGeom prst="rect">
             <a:avLst/>
@@ -11891,14 +11824,14 @@
       </p:sp>
       <p:sp>
         <p:nvSpPr>
-          <p:cNvPr id="189" name="Text 12"/>
+          <p:cNvPr id="188" name="Text 12"/>
           <p:cNvSpPr/>
           <p:nvPr/>
         </p:nvSpPr>
         <p:spPr>
           <a:xfrm>
             <a:off x="3346560" y="2148840"/>
-            <a:ext cx="2633040" cy="438480"/>
+            <a:ext cx="2632680" cy="438120"/>
           </a:xfrm>
           <a:prstGeom prst="rect">
             <a:avLst/>
@@ -11934,6 +11867,7 @@
                   <a:srgbClr val="ffffff"/>
                 </a:solidFill>
                 <a:latin typeface="Calibri"/>
+                <a:ea typeface="DejaVu Sans"/>
               </a:rPr>
               <a:t>Specific Prompt</a:t>
             </a:r>
@@ -11945,14 +11879,14 @@
       </p:sp>
       <p:sp>
         <p:nvSpPr>
-          <p:cNvPr id="190" name="Shape 13"/>
+          <p:cNvPr id="189" name="Shape 13"/>
           <p:cNvSpPr/>
           <p:nvPr/>
         </p:nvSpPr>
         <p:spPr>
           <a:xfrm>
             <a:off x="3346560" y="2679120"/>
-            <a:ext cx="2633040" cy="658080"/>
+            <a:ext cx="2632680" cy="657720"/>
           </a:xfrm>
           <a:prstGeom prst="rect">
             <a:avLst/>
@@ -11973,14 +11907,14 @@
       </p:sp>
       <p:sp>
         <p:nvSpPr>
-          <p:cNvPr id="191" name="Text 14"/>
+          <p:cNvPr id="190" name="Text 14"/>
           <p:cNvSpPr/>
           <p:nvPr/>
         </p:nvSpPr>
         <p:spPr>
           <a:xfrm>
             <a:off x="3401640" y="2679120"/>
-            <a:ext cx="2523240" cy="658080"/>
+            <a:ext cx="2522880" cy="657720"/>
           </a:xfrm>
           <a:prstGeom prst="rect">
             <a:avLst/>
@@ -12052,14 +11986,14 @@
       </p:sp>
       <p:sp>
         <p:nvSpPr>
-          <p:cNvPr id="192" name="Text 15"/>
+          <p:cNvPr id="191" name="Text 15"/>
           <p:cNvSpPr/>
           <p:nvPr/>
         </p:nvSpPr>
         <p:spPr>
           <a:xfrm>
             <a:off x="3346560" y="3401640"/>
-            <a:ext cx="2633040" cy="1352880"/>
+            <a:ext cx="2632680" cy="1352520"/>
           </a:xfrm>
           <a:prstGeom prst="rect">
             <a:avLst/>
@@ -12095,6 +12029,7 @@
                   <a:srgbClr val="1e293b"/>
                 </a:solidFill>
                 <a:latin typeface="Calibri"/>
+                <a:ea typeface="DejaVu Sans"/>
               </a:rPr>
               <a:t>Result: Gets exactly 3 simple bullets tailored to a young audience — precise and useful.</a:t>
             </a:r>
@@ -12106,14 +12041,14 @@
       </p:sp>
       <p:sp>
         <p:nvSpPr>
-          <p:cNvPr id="193" name="Shape 16"/>
+          <p:cNvPr id="192" name="Shape 16"/>
           <p:cNvSpPr/>
           <p:nvPr/>
         </p:nvSpPr>
         <p:spPr>
           <a:xfrm>
             <a:off x="6181200" y="2148840"/>
-            <a:ext cx="2788560" cy="2697120"/>
+            <a:ext cx="2788200" cy="2696760"/>
           </a:xfrm>
           <a:prstGeom prst="rect">
             <a:avLst/>
@@ -12141,14 +12076,14 @@
       </p:sp>
       <p:sp>
         <p:nvSpPr>
-          <p:cNvPr id="194" name="Shape 17"/>
+          <p:cNvPr id="193" name="Shape 17"/>
           <p:cNvSpPr/>
           <p:nvPr/>
         </p:nvSpPr>
         <p:spPr>
           <a:xfrm>
             <a:off x="6181200" y="2148840"/>
-            <a:ext cx="2788560" cy="438480"/>
+            <a:ext cx="2788200" cy="438120"/>
           </a:xfrm>
           <a:prstGeom prst="rect">
             <a:avLst/>
@@ -12169,14 +12104,14 @@
       </p:sp>
       <p:sp>
         <p:nvSpPr>
-          <p:cNvPr id="195" name="Text 18"/>
+          <p:cNvPr id="194" name="Text 18"/>
           <p:cNvSpPr/>
           <p:nvPr/>
         </p:nvSpPr>
         <p:spPr>
           <a:xfrm>
             <a:off x="6291000" y="2148840"/>
-            <a:ext cx="2633040" cy="438480"/>
+            <a:ext cx="2632680" cy="438120"/>
           </a:xfrm>
           <a:prstGeom prst="rect">
             <a:avLst/>
@@ -12212,6 +12147,7 @@
                   <a:srgbClr val="ffffff"/>
                 </a:solidFill>
                 <a:latin typeface="Calibri"/>
+                <a:ea typeface="DejaVu Sans"/>
               </a:rPr>
               <a:t>Structured Prompt</a:t>
             </a:r>
@@ -12223,14 +12159,14 @@
       </p:sp>
       <p:sp>
         <p:nvSpPr>
-          <p:cNvPr id="196" name="Shape 19"/>
+          <p:cNvPr id="195" name="Shape 19"/>
           <p:cNvSpPr/>
           <p:nvPr/>
         </p:nvSpPr>
         <p:spPr>
           <a:xfrm>
             <a:off x="6291000" y="2679120"/>
-            <a:ext cx="2633040" cy="658080"/>
+            <a:ext cx="2632680" cy="657720"/>
           </a:xfrm>
           <a:prstGeom prst="rect">
             <a:avLst/>
@@ -12251,14 +12187,14 @@
       </p:sp>
       <p:sp>
         <p:nvSpPr>
-          <p:cNvPr id="197" name="Text 20"/>
+          <p:cNvPr id="196" name="Text 20"/>
           <p:cNvSpPr/>
           <p:nvPr/>
         </p:nvSpPr>
         <p:spPr>
           <a:xfrm>
             <a:off x="6346080" y="2679120"/>
-            <a:ext cx="2523240" cy="658080"/>
+            <a:ext cx="2522880" cy="657720"/>
           </a:xfrm>
           <a:prstGeom prst="rect">
             <a:avLst/>
@@ -12330,14 +12266,14 @@
       </p:sp>
       <p:sp>
         <p:nvSpPr>
-          <p:cNvPr id="198" name="Text 21"/>
+          <p:cNvPr id="197" name="Text 21"/>
           <p:cNvSpPr/>
           <p:nvPr/>
         </p:nvSpPr>
         <p:spPr>
           <a:xfrm>
             <a:off x="6291000" y="3401640"/>
-            <a:ext cx="2633040" cy="1352880"/>
+            <a:ext cx="2632680" cy="1352520"/>
           </a:xfrm>
           <a:prstGeom prst="rect">
             <a:avLst/>
@@ -12373,6 +12309,7 @@
                   <a:srgbClr val="1e293b"/>
                 </a:solidFill>
                 <a:latin typeface="Calibri"/>
+                <a:ea typeface="DejaVu Sans"/>
               </a:rPr>
               <a:t>Result: Gets a perfectly formatted numbered list ready to copy into a document.</a:t>
             </a:r>
@@ -12384,14 +12321,14 @@
       </p:sp>
       <p:sp>
         <p:nvSpPr>
-          <p:cNvPr id="199" name="Shape 22"/>
+          <p:cNvPr id="198" name="Shape 22"/>
           <p:cNvSpPr/>
           <p:nvPr/>
         </p:nvSpPr>
         <p:spPr>
           <a:xfrm>
             <a:off x="320040" y="4809600"/>
-            <a:ext cx="8503560" cy="237240"/>
+            <a:ext cx="8503200" cy="236880"/>
           </a:xfrm>
           <a:prstGeom prst="rect">
             <a:avLst/>
@@ -12412,14 +12349,14 @@
       </p:sp>
       <p:sp>
         <p:nvSpPr>
-          <p:cNvPr id="200" name="Text 23"/>
+          <p:cNvPr id="199" name="Text 23"/>
           <p:cNvSpPr/>
           <p:nvPr/>
         </p:nvSpPr>
         <p:spPr>
           <a:xfrm>
             <a:off x="411480" y="4809600"/>
-            <a:ext cx="8320680" cy="237240"/>
+            <a:ext cx="8320320" cy="236880"/>
           </a:xfrm>
           <a:prstGeom prst="rect">
             <a:avLst/>
@@ -12455,6 +12392,7 @@
                   <a:srgbClr val="1e293b"/>
                 </a:solidFill>
                 <a:latin typeface="Calibri"/>
+                <a:ea typeface="DejaVu Sans"/>
               </a:rPr>
               <a:t>🔑  </a:t>
             </a:r>
@@ -12464,6 +12402,7 @@
                   <a:srgbClr val="1e293b"/>
                 </a:solidFill>
                 <a:latin typeface="Calibri"/>
+                <a:ea typeface="DejaVu Sans"/>
               </a:rPr>
               <a:t>The same LLM can produce excellent or poor results purely based on how you write the prompt.</a:t>
             </a:r>
@@ -12512,14 +12451,14 @@
       </p:grpSpPr>
       <p:sp>
         <p:nvSpPr>
-          <p:cNvPr id="201" name="Shape 0"/>
+          <p:cNvPr id="200" name="Shape 0"/>
           <p:cNvSpPr/>
           <p:nvPr/>
         </p:nvSpPr>
         <p:spPr>
           <a:xfrm>
             <a:off x="0" y="0"/>
-            <a:ext cx="9143640" cy="822600"/>
+            <a:ext cx="9143280" cy="822240"/>
           </a:xfrm>
           <a:prstGeom prst="rect">
             <a:avLst/>
@@ -12540,14 +12479,14 @@
       </p:sp>
       <p:sp>
         <p:nvSpPr>
-          <p:cNvPr id="202" name="Text 1"/>
+          <p:cNvPr id="201" name="Text 1"/>
           <p:cNvSpPr/>
           <p:nvPr/>
         </p:nvSpPr>
         <p:spPr>
           <a:xfrm>
             <a:off x="411480" y="0"/>
-            <a:ext cx="8320680" cy="822600"/>
+            <a:ext cx="8320320" cy="822240"/>
           </a:xfrm>
           <a:prstGeom prst="rect">
             <a:avLst/>
@@ -12583,6 +12522,7 @@
                   <a:srgbClr val="ffffff"/>
                 </a:solidFill>
                 <a:latin typeface="Calibri"/>
+                <a:ea typeface="DejaVu Sans"/>
               </a:rPr>
               <a:t>Current Way of Writing Prompts — and the Problem</a:t>
             </a:r>
@@ -12594,14 +12534,14 @@
       </p:sp>
       <p:sp>
         <p:nvSpPr>
-          <p:cNvPr id="203" name="Shape 2"/>
+          <p:cNvPr id="202" name="Shape 2"/>
           <p:cNvSpPr/>
           <p:nvPr/>
         </p:nvSpPr>
         <p:spPr>
           <a:xfrm>
             <a:off x="292680" y="932760"/>
-            <a:ext cx="4132800" cy="3913200"/>
+            <a:ext cx="4132440" cy="3912840"/>
           </a:xfrm>
           <a:prstGeom prst="rect">
             <a:avLst/>
@@ -12629,14 +12569,14 @@
       </p:sp>
       <p:sp>
         <p:nvSpPr>
-          <p:cNvPr id="204" name="Shape 3"/>
+          <p:cNvPr id="203" name="Shape 3"/>
           <p:cNvSpPr/>
           <p:nvPr/>
         </p:nvSpPr>
         <p:spPr>
           <a:xfrm>
             <a:off x="292680" y="932760"/>
-            <a:ext cx="4132800" cy="475200"/>
+            <a:ext cx="4132440" cy="474840"/>
           </a:xfrm>
           <a:prstGeom prst="rect">
             <a:avLst/>
@@ -12657,14 +12597,14 @@
       </p:sp>
       <p:sp>
         <p:nvSpPr>
-          <p:cNvPr id="205" name="Text 4"/>
+          <p:cNvPr id="204" name="Text 4"/>
           <p:cNvSpPr/>
           <p:nvPr/>
         </p:nvSpPr>
         <p:spPr>
           <a:xfrm>
             <a:off x="411480" y="932760"/>
-            <a:ext cx="3949920" cy="475200"/>
+            <a:ext cx="3949560" cy="474840"/>
           </a:xfrm>
           <a:prstGeom prst="rect">
             <a:avLst/>
@@ -12700,6 +12640,7 @@
                   <a:srgbClr val="ffffff"/>
                 </a:solidFill>
                 <a:latin typeface="Calibri"/>
+                <a:ea typeface="DejaVu Sans"/>
               </a:rPr>
               <a:t>❌  </a:t>
             </a:r>
@@ -12709,6 +12650,7 @@
                   <a:srgbClr val="ffffff"/>
                 </a:solidFill>
                 <a:latin typeface="Calibri"/>
+                <a:ea typeface="DejaVu Sans"/>
               </a:rPr>
               <a:t>Current Approach (Hard-coded)</a:t>
             </a:r>
@@ -12720,14 +12662,14 @@
       </p:sp>
       <p:sp>
         <p:nvSpPr>
-          <p:cNvPr id="206" name="Shape 5"/>
+          <p:cNvPr id="205" name="Shape 5"/>
           <p:cNvSpPr/>
           <p:nvPr/>
         </p:nvSpPr>
         <p:spPr>
           <a:xfrm>
             <a:off x="411480" y="1508760"/>
-            <a:ext cx="3885840" cy="1599840"/>
+            <a:ext cx="3885480" cy="1599480"/>
           </a:xfrm>
           <a:prstGeom prst="rect">
             <a:avLst/>
@@ -12748,14 +12690,14 @@
       </p:sp>
       <p:sp>
         <p:nvSpPr>
-          <p:cNvPr id="207" name="Text 6"/>
+          <p:cNvPr id="206" name="Text 6"/>
           <p:cNvSpPr/>
           <p:nvPr/>
         </p:nvSpPr>
         <p:spPr>
           <a:xfrm>
             <a:off x="502920" y="1572840"/>
-            <a:ext cx="3730320" cy="1462680"/>
+            <a:ext cx="3729960" cy="1462320"/>
           </a:xfrm>
           <a:prstGeom prst="rect">
             <a:avLst/>
@@ -12875,7 +12817,7 @@
                 <a:latin typeface="Consolas"/>
                 <a:ea typeface="Consolas"/>
               </a:rPr>
-              <a:t>'write a five line poem on cricket'</a:t>
+              <a:t>'write a five line poem on climate change'</a:t>
             </a:r>
             <a:endParaRPr b="0" lang="en-IN" sz="950" spc="-1" strike="noStrike">
               <a:latin typeface="Arial"/>
@@ -12909,14 +12851,14 @@
       </p:sp>
       <p:sp>
         <p:nvSpPr>
-          <p:cNvPr id="208" name="Text 7"/>
+          <p:cNvPr id="207" name="Text 7"/>
           <p:cNvSpPr/>
           <p:nvPr/>
         </p:nvSpPr>
         <p:spPr>
           <a:xfrm>
             <a:off x="411480" y="3200400"/>
-            <a:ext cx="3885840" cy="1508400"/>
+            <a:ext cx="3885480" cy="1508040"/>
           </a:xfrm>
           <a:prstGeom prst="rect">
             <a:avLst/>
@@ -12947,7 +12889,7 @@
               <a:buClr>
                 <a:srgbClr val="1e293b"/>
               </a:buClr>
-              <a:buFont typeface="Symbol" charset="2"/>
+              <a:buFont typeface="Symbol"/>
               <a:buChar char=""/>
             </a:pPr>
             <a:r>
@@ -12956,6 +12898,7 @@
                   <a:srgbClr val="1e293b"/>
                 </a:solidFill>
                 <a:latin typeface="Calibri"/>
+                <a:ea typeface="DejaVu Sans"/>
               </a:rPr>
               <a:t>Developer writes all prompts manually</a:t>
             </a:r>
@@ -12974,7 +12917,7 @@
               <a:buClr>
                 <a:srgbClr val="1e293b"/>
               </a:buClr>
-              <a:buFont typeface="Symbol" charset="2"/>
+              <a:buFont typeface="Symbol"/>
               <a:buChar char=""/>
             </a:pPr>
             <a:r>
@@ -12983,6 +12926,7 @@
                   <a:srgbClr val="1e293b"/>
                 </a:solidFill>
                 <a:latin typeface="Calibri"/>
+                <a:ea typeface="DejaVu Sans"/>
               </a:rPr>
               <a:t>No flexibility for different users</a:t>
             </a:r>
@@ -13001,7 +12945,7 @@
               <a:buClr>
                 <a:srgbClr val="1e293b"/>
               </a:buClr>
-              <a:buFont typeface="Symbol" charset="2"/>
+              <a:buFont typeface="Symbol"/>
               <a:buChar char=""/>
             </a:pPr>
             <a:r>
@@ -13010,6 +12954,7 @@
                   <a:srgbClr val="1e293b"/>
                 </a:solidFill>
                 <a:latin typeface="Calibri"/>
+                <a:ea typeface="DejaVu Sans"/>
               </a:rPr>
               <a:t>Prompt quality depends on developer knowledge</a:t>
             </a:r>
@@ -13028,7 +12973,7 @@
               <a:buClr>
                 <a:srgbClr val="1e293b"/>
               </a:buClr>
-              <a:buFont typeface="Symbol" charset="2"/>
+              <a:buFont typeface="Symbol"/>
               <a:buChar char=""/>
             </a:pPr>
             <a:r>
@@ -13037,6 +12982,7 @@
                   <a:srgbClr val="1e293b"/>
                 </a:solidFill>
                 <a:latin typeface="Calibri"/>
+                <a:ea typeface="DejaVu Sans"/>
               </a:rPr>
               <a:t>Cannot adapt to user needs or preferences</a:t>
             </a:r>
@@ -13048,14 +12994,14 @@
       </p:sp>
       <p:sp>
         <p:nvSpPr>
-          <p:cNvPr id="209" name="Shape 8"/>
+          <p:cNvPr id="208" name="Shape 8"/>
           <p:cNvSpPr/>
           <p:nvPr/>
         </p:nvSpPr>
         <p:spPr>
           <a:xfrm>
             <a:off x="4718160" y="932760"/>
-            <a:ext cx="4132800" cy="3913200"/>
+            <a:ext cx="4132440" cy="3912840"/>
           </a:xfrm>
           <a:prstGeom prst="rect">
             <a:avLst/>
@@ -13083,14 +13029,14 @@
       </p:sp>
       <p:sp>
         <p:nvSpPr>
-          <p:cNvPr id="210" name="Shape 9"/>
+          <p:cNvPr id="209" name="Shape 9"/>
           <p:cNvSpPr/>
           <p:nvPr/>
         </p:nvSpPr>
         <p:spPr>
           <a:xfrm>
             <a:off x="4718160" y="932760"/>
-            <a:ext cx="4132800" cy="475200"/>
+            <a:ext cx="4132440" cy="474840"/>
           </a:xfrm>
           <a:prstGeom prst="rect">
             <a:avLst/>
@@ -13111,14 +13057,14 @@
       </p:sp>
       <p:sp>
         <p:nvSpPr>
-          <p:cNvPr id="211" name="Text 10"/>
+          <p:cNvPr id="210" name="Text 10"/>
           <p:cNvSpPr/>
           <p:nvPr/>
         </p:nvSpPr>
         <p:spPr>
           <a:xfrm>
             <a:off x="4827960" y="932760"/>
-            <a:ext cx="3949920" cy="475200"/>
+            <a:ext cx="3949560" cy="474840"/>
           </a:xfrm>
           <a:prstGeom prst="rect">
             <a:avLst/>
@@ -13154,6 +13100,7 @@
                   <a:srgbClr val="ffffff"/>
                 </a:solidFill>
                 <a:latin typeface="Calibri"/>
+                <a:ea typeface="DejaVu Sans"/>
               </a:rPr>
               <a:t>✓  </a:t>
             </a:r>
@@ -13163,6 +13110,7 @@
                   <a:srgbClr val="ffffff"/>
                 </a:solidFill>
                 <a:latin typeface="Calibri"/>
+                <a:ea typeface="DejaVu Sans"/>
               </a:rPr>
               <a:t>Correct Approach (User-Driven)</a:t>
             </a:r>
@@ -13174,14 +13122,14 @@
       </p:sp>
       <p:sp>
         <p:nvSpPr>
-          <p:cNvPr id="212" name="Shape 11"/>
+          <p:cNvPr id="211" name="Shape 11"/>
           <p:cNvSpPr/>
           <p:nvPr/>
         </p:nvSpPr>
         <p:spPr>
           <a:xfrm>
             <a:off x="4827960" y="1508760"/>
-            <a:ext cx="3885840" cy="1599840"/>
+            <a:ext cx="3885480" cy="1599480"/>
           </a:xfrm>
           <a:prstGeom prst="rect">
             <a:avLst/>
@@ -13202,14 +13150,14 @@
       </p:sp>
       <p:sp>
         <p:nvSpPr>
-          <p:cNvPr id="213" name="Text 12"/>
+          <p:cNvPr id="212" name="Text 12"/>
           <p:cNvSpPr/>
           <p:nvPr/>
         </p:nvSpPr>
         <p:spPr>
           <a:xfrm>
             <a:off x="4919400" y="1572840"/>
-            <a:ext cx="3730320" cy="1462680"/>
+            <a:ext cx="3729960" cy="1462320"/>
           </a:xfrm>
           <a:prstGeom prst="rect">
             <a:avLst/>
@@ -13329,14 +13277,14 @@
       </p:sp>
       <p:sp>
         <p:nvSpPr>
-          <p:cNvPr id="214" name="Text 13"/>
+          <p:cNvPr id="213" name="Text 13"/>
           <p:cNvSpPr/>
           <p:nvPr/>
         </p:nvSpPr>
         <p:spPr>
           <a:xfrm>
             <a:off x="4827960" y="3200400"/>
-            <a:ext cx="3885840" cy="1508400"/>
+            <a:ext cx="3885480" cy="1508040"/>
           </a:xfrm>
           <a:prstGeom prst="rect">
             <a:avLst/>
@@ -13367,7 +13315,7 @@
               <a:buClr>
                 <a:srgbClr val="1e293b"/>
               </a:buClr>
-              <a:buFont typeface="Symbol" charset="2"/>
+              <a:buFont typeface="Symbol"/>
               <a:buChar char=""/>
             </a:pPr>
             <a:r>
@@ -13376,6 +13324,7 @@
                   <a:srgbClr val="1e293b"/>
                 </a:solidFill>
                 <a:latin typeface="Calibri"/>
+                <a:ea typeface="DejaVu Sans"/>
               </a:rPr>
               <a:t>Users write prompts through your application UI</a:t>
             </a:r>
@@ -13394,7 +13343,7 @@
               <a:buClr>
                 <a:srgbClr val="1e293b"/>
               </a:buClr>
-              <a:buFont typeface="Symbol" charset="2"/>
+              <a:buFont typeface="Symbol"/>
               <a:buChar char=""/>
             </a:pPr>
             <a:r>
@@ -13403,6 +13352,7 @@
                   <a:srgbClr val="1e293b"/>
                 </a:solidFill>
                 <a:latin typeface="Calibri"/>
+                <a:ea typeface="DejaVu Sans"/>
               </a:rPr>
               <a:t>Each user gets personalised, relevant responses</a:t>
             </a:r>
@@ -13421,7 +13371,7 @@
               <a:buClr>
                 <a:srgbClr val="1e293b"/>
               </a:buClr>
-              <a:buFont typeface="Symbol" charset="2"/>
+              <a:buFont typeface="Symbol"/>
               <a:buChar char=""/>
             </a:pPr>
             <a:r>
@@ -13430,6 +13380,7 @@
                   <a:srgbClr val="1e293b"/>
                 </a:solidFill>
                 <a:latin typeface="Calibri"/>
+                <a:ea typeface="DejaVu Sans"/>
               </a:rPr>
               <a:t>Developers focus on building the app, not prompts</a:t>
             </a:r>
@@ -13448,7 +13399,7 @@
               <a:buClr>
                 <a:srgbClr val="1e293b"/>
               </a:buClr>
-              <a:buFont typeface="Symbol" charset="2"/>
+              <a:buFont typeface="Symbol"/>
               <a:buChar char=""/>
             </a:pPr>
             <a:r>
@@ -13457,6 +13408,7 @@
                   <a:srgbClr val="1e293b"/>
                 </a:solidFill>
                 <a:latin typeface="Calibri"/>
+                <a:ea typeface="DejaVu Sans"/>
               </a:rPr>
               <a:t>Scales naturally across different user needs</a:t>
             </a:r>
@@ -13505,14 +13457,14 @@
       </p:grpSpPr>
       <p:sp>
         <p:nvSpPr>
-          <p:cNvPr id="215" name="Shape 0"/>
+          <p:cNvPr id="214" name="Shape 0"/>
           <p:cNvSpPr/>
           <p:nvPr/>
         </p:nvSpPr>
         <p:spPr>
           <a:xfrm>
             <a:off x="0" y="0"/>
-            <a:ext cx="9143640" cy="822600"/>
+            <a:ext cx="9143280" cy="822240"/>
           </a:xfrm>
           <a:prstGeom prst="rect">
             <a:avLst/>
@@ -13533,14 +13485,14 @@
       </p:sp>
       <p:sp>
         <p:nvSpPr>
-          <p:cNvPr id="216" name="Text 1"/>
+          <p:cNvPr id="215" name="Text 1"/>
           <p:cNvSpPr/>
           <p:nvPr/>
         </p:nvSpPr>
         <p:spPr>
           <a:xfrm>
             <a:off x="411480" y="0"/>
-            <a:ext cx="8320680" cy="822600"/>
+            <a:ext cx="8320320" cy="822240"/>
           </a:xfrm>
           <a:prstGeom prst="rect">
             <a:avLst/>
@@ -13576,6 +13528,7 @@
                   <a:srgbClr val="ffffff"/>
                 </a:solidFill>
                 <a:latin typeface="Calibri"/>
+                <a:ea typeface="DejaVu Sans"/>
               </a:rPr>
               <a:t>Real-World Use Case: Research Assistant Tool</a:t>
             </a:r>
@@ -13587,14 +13540,14 @@
       </p:sp>
       <p:sp>
         <p:nvSpPr>
-          <p:cNvPr id="217" name="Shape 2"/>
+          <p:cNvPr id="216" name="Shape 2"/>
           <p:cNvSpPr/>
           <p:nvPr/>
         </p:nvSpPr>
         <p:spPr>
           <a:xfrm>
             <a:off x="320040" y="960120"/>
-            <a:ext cx="4023000" cy="3858480"/>
+            <a:ext cx="4022640" cy="3858120"/>
           </a:xfrm>
           <a:prstGeom prst="rect">
             <a:avLst/>
@@ -13622,14 +13575,14 @@
       </p:sp>
       <p:sp>
         <p:nvSpPr>
-          <p:cNvPr id="218" name="Shape 3"/>
+          <p:cNvPr id="217" name="Shape 3"/>
           <p:cNvSpPr/>
           <p:nvPr/>
         </p:nvSpPr>
         <p:spPr>
           <a:xfrm>
             <a:off x="320040" y="960120"/>
-            <a:ext cx="4023000" cy="456840"/>
+            <a:ext cx="4022640" cy="456480"/>
           </a:xfrm>
           <a:prstGeom prst="rect">
             <a:avLst/>
@@ -13650,14 +13603,14 @@
       </p:sp>
       <p:sp>
         <p:nvSpPr>
-          <p:cNvPr id="219" name="Text 4"/>
+          <p:cNvPr id="218" name="Text 4"/>
           <p:cNvSpPr/>
           <p:nvPr/>
         </p:nvSpPr>
         <p:spPr>
           <a:xfrm>
             <a:off x="438840" y="960120"/>
-            <a:ext cx="3840120" cy="456840"/>
+            <a:ext cx="3839760" cy="456480"/>
           </a:xfrm>
           <a:prstGeom prst="rect">
             <a:avLst/>
@@ -13693,6 +13646,7 @@
                   <a:srgbClr val="ffffff"/>
                 </a:solidFill>
                 <a:latin typeface="Calibri"/>
+                <a:ea typeface="DejaVu Sans"/>
               </a:rPr>
               <a:t>📋  </a:t>
             </a:r>
@@ -13702,6 +13656,7 @@
                   <a:srgbClr val="ffffff"/>
                 </a:solidFill>
                 <a:latin typeface="Calibri"/>
+                <a:ea typeface="DejaVu Sans"/>
               </a:rPr>
               <a:t>What We're Building</a:t>
             </a:r>
@@ -13713,14 +13668,14 @@
       </p:sp>
       <p:sp>
         <p:nvSpPr>
-          <p:cNvPr id="220" name="Text 5"/>
+          <p:cNvPr id="219" name="Text 5"/>
           <p:cNvSpPr/>
           <p:nvPr/>
         </p:nvSpPr>
         <p:spPr>
           <a:xfrm>
             <a:off x="457200" y="1508760"/>
-            <a:ext cx="3748680" cy="3200040"/>
+            <a:ext cx="3748320" cy="3199680"/>
           </a:xfrm>
           <a:prstGeom prst="rect">
             <a:avLst/>
@@ -13751,7 +13706,7 @@
               <a:buClr>
                 <a:srgbClr val="1e293b"/>
               </a:buClr>
-              <a:buFont typeface="Symbol" charset="2"/>
+              <a:buFont typeface="Symbol"/>
               <a:buChar char=""/>
             </a:pPr>
             <a:r>
@@ -13760,8 +13715,9 @@
                   <a:srgbClr val="1e293b"/>
                 </a:solidFill>
                 <a:latin typeface="Calibri"/>
-              </a:rPr>
-              <a:t>A web app where users can summarise any research paper</a:t>
+                <a:ea typeface="DejaVu Sans"/>
+              </a:rPr>
+              <a:t>A web app where users can create any topic report</a:t>
             </a:r>
             <a:endParaRPr b="0" lang="en-IN" sz="1150" spc="-1" strike="noStrike">
               <a:latin typeface="Arial"/>
@@ -13778,7 +13734,7 @@
               <a:buClr>
                 <a:srgbClr val="1e293b"/>
               </a:buClr>
-              <a:buFont typeface="Symbol" charset="2"/>
+              <a:buFont typeface="Symbol"/>
               <a:buChar char=""/>
             </a:pPr>
             <a:r>
@@ -13787,8 +13743,9 @@
                   <a:srgbClr val="1e293b"/>
                 </a:solidFill>
                 <a:latin typeface="Calibri"/>
-              </a:rPr>
-              <a:t>Users type a query like: "Summarise the Attention paper in simple terms"</a:t>
+                <a:ea typeface="DejaVu Sans"/>
+              </a:rPr>
+              <a:t>Users type a query like: "create report on climate change"</a:t>
             </a:r>
             <a:endParaRPr b="0" lang="en-IN" sz="1150" spc="-1" strike="noStrike">
               <a:latin typeface="Arial"/>
@@ -13805,7 +13762,7 @@
               <a:buClr>
                 <a:srgbClr val="1e293b"/>
               </a:buClr>
-              <a:buFont typeface="Symbol" charset="2"/>
+              <a:buFont typeface="Symbol"/>
               <a:buChar char=""/>
             </a:pPr>
             <a:r>
@@ -13814,8 +13771,9 @@
                   <a:srgbClr val="1e293b"/>
                 </a:solidFill>
                 <a:latin typeface="Calibri"/>
-              </a:rPr>
-              <a:t>User clicks a 'Summarise' button</a:t>
+                <a:ea typeface="DejaVu Sans"/>
+              </a:rPr>
+              <a:t>User clicks a 'Generate Response' button</a:t>
             </a:r>
             <a:endParaRPr b="0" lang="en-IN" sz="1150" spc="-1" strike="noStrike">
               <a:latin typeface="Arial"/>
@@ -13832,7 +13790,7 @@
               <a:buClr>
                 <a:srgbClr val="1e293b"/>
               </a:buClr>
-              <a:buFont typeface="Symbol" charset="2"/>
+              <a:buFont typeface="Symbol"/>
               <a:buChar char=""/>
             </a:pPr>
             <a:r>
@@ -13841,6 +13799,7 @@
                   <a:srgbClr val="1e293b"/>
                 </a:solidFill>
                 <a:latin typeface="Calibri"/>
+                <a:ea typeface="DejaVu Sans"/>
               </a:rPr>
               <a:t>App fetches text from the input box, sends it to the LLM, and displays the response</a:t>
             </a:r>
@@ -13859,7 +13818,7 @@
               <a:buClr>
                 <a:srgbClr val="1e293b"/>
               </a:buClr>
-              <a:buFont typeface="Symbol" charset="2"/>
+              <a:buFont typeface="Symbol"/>
               <a:buChar char=""/>
             </a:pPr>
             <a:r>
@@ -13868,6 +13827,7 @@
                   <a:srgbClr val="1e293b"/>
                 </a:solidFill>
                 <a:latin typeface="Calibri"/>
+                <a:ea typeface="DejaVu Sans"/>
               </a:rPr>
               <a:t>Built with Streamlit + LangChain + ChatOpenAI</a:t>
             </a:r>
@@ -13879,14 +13839,14 @@
       </p:sp>
       <p:sp>
         <p:nvSpPr>
-          <p:cNvPr id="221" name="Shape 6"/>
+          <p:cNvPr id="220" name="Shape 6"/>
           <p:cNvSpPr/>
           <p:nvPr/>
         </p:nvSpPr>
         <p:spPr>
           <a:xfrm>
             <a:off x="4572000" y="960120"/>
-            <a:ext cx="4251600" cy="3858480"/>
+            <a:ext cx="4251240" cy="3858120"/>
           </a:xfrm>
           <a:prstGeom prst="rect">
             <a:avLst/>
@@ -13914,14 +13874,14 @@
       </p:sp>
       <p:sp>
         <p:nvSpPr>
-          <p:cNvPr id="222" name="Shape 7"/>
+          <p:cNvPr id="221" name="Shape 7"/>
           <p:cNvSpPr/>
           <p:nvPr/>
         </p:nvSpPr>
         <p:spPr>
           <a:xfrm>
             <a:off x="4572000" y="960120"/>
-            <a:ext cx="4251600" cy="456840"/>
+            <a:ext cx="4251240" cy="456480"/>
           </a:xfrm>
           <a:prstGeom prst="rect">
             <a:avLst/>
@@ -13942,14 +13902,14 @@
       </p:sp>
       <p:sp>
         <p:nvSpPr>
-          <p:cNvPr id="223" name="Text 8"/>
+          <p:cNvPr id="222" name="Text 8"/>
           <p:cNvSpPr/>
           <p:nvPr/>
         </p:nvSpPr>
         <p:spPr>
           <a:xfrm>
             <a:off x="4681800" y="960120"/>
-            <a:ext cx="4068720" cy="456840"/>
+            <a:ext cx="4068360" cy="456480"/>
           </a:xfrm>
           <a:prstGeom prst="rect">
             <a:avLst/>
@@ -13985,6 +13945,7 @@
                   <a:srgbClr val="ffffff"/>
                 </a:solidFill>
                 <a:latin typeface="Calibri"/>
+                <a:ea typeface="DejaVu Sans"/>
               </a:rPr>
               <a:t>🔄  </a:t>
             </a:r>
@@ -13994,6 +13955,7 @@
                   <a:srgbClr val="ffffff"/>
                 </a:solidFill>
                 <a:latin typeface="Calibri"/>
+                <a:ea typeface="DejaVu Sans"/>
               </a:rPr>
               <a:t>Application Flow</a:t>
             </a:r>
@@ -14005,14 +13967,14 @@
       </p:sp>
       <p:sp>
         <p:nvSpPr>
-          <p:cNvPr id="224" name="Shape 9"/>
+          <p:cNvPr id="223" name="Shape 9"/>
           <p:cNvSpPr/>
           <p:nvPr/>
         </p:nvSpPr>
         <p:spPr>
           <a:xfrm>
             <a:off x="4681800" y="1609200"/>
-            <a:ext cx="420120" cy="420120"/>
+            <a:ext cx="419760" cy="419760"/>
           </a:xfrm>
           <a:prstGeom prst="ellipse">
             <a:avLst/>
@@ -14033,14 +13995,14 @@
       </p:sp>
       <p:sp>
         <p:nvSpPr>
-          <p:cNvPr id="225" name="Text 10"/>
+          <p:cNvPr id="224" name="Text 10"/>
           <p:cNvSpPr/>
           <p:nvPr/>
         </p:nvSpPr>
         <p:spPr>
           <a:xfrm>
             <a:off x="4681800" y="1609200"/>
-            <a:ext cx="420120" cy="420120"/>
+            <a:ext cx="419760" cy="419760"/>
           </a:xfrm>
           <a:prstGeom prst="rect">
             <a:avLst/>
@@ -14076,6 +14038,7 @@
                   <a:srgbClr val="ffffff"/>
                 </a:solidFill>
                 <a:latin typeface="Calibri"/>
+                <a:ea typeface="DejaVu Sans"/>
               </a:rPr>
               <a:t>1</a:t>
             </a:r>
@@ -14087,14 +14050,14 @@
       </p:sp>
       <p:sp>
         <p:nvSpPr>
-          <p:cNvPr id="226" name="Shape 11"/>
+          <p:cNvPr id="225" name="Shape 11"/>
           <p:cNvSpPr/>
           <p:nvPr/>
         </p:nvSpPr>
         <p:spPr>
           <a:xfrm>
             <a:off x="5193720" y="1627560"/>
-            <a:ext cx="3492720" cy="383760"/>
+            <a:ext cx="3492360" cy="383400"/>
           </a:xfrm>
           <a:prstGeom prst="rect">
             <a:avLst/>
@@ -14117,14 +14080,14 @@
       </p:sp>
       <p:sp>
         <p:nvSpPr>
-          <p:cNvPr id="227" name="Text 12"/>
+          <p:cNvPr id="226" name="Text 12"/>
           <p:cNvSpPr/>
           <p:nvPr/>
         </p:nvSpPr>
         <p:spPr>
           <a:xfrm>
             <a:off x="5285160" y="1627560"/>
-            <a:ext cx="3337200" cy="383760"/>
+            <a:ext cx="3336840" cy="383400"/>
           </a:xfrm>
           <a:prstGeom prst="rect">
             <a:avLst/>
@@ -14160,6 +14123,7 @@
                   <a:srgbClr val="1e293b"/>
                 </a:solidFill>
                 <a:latin typeface="Calibri"/>
+                <a:ea typeface="DejaVu Sans"/>
               </a:rPr>
               <a:t>User visits the web app</a:t>
             </a:r>
@@ -14171,14 +14135,14 @@
       </p:sp>
       <p:sp>
         <p:nvSpPr>
-          <p:cNvPr id="228" name="Shape 13"/>
+          <p:cNvPr id="227" name="Shape 13"/>
           <p:cNvSpPr/>
           <p:nvPr/>
         </p:nvSpPr>
         <p:spPr>
           <a:xfrm>
             <a:off x="4873680" y="2030040"/>
-            <a:ext cx="36360" cy="182520"/>
+            <a:ext cx="36000" cy="182160"/>
           </a:xfrm>
           <a:prstGeom prst="rect">
             <a:avLst/>
@@ -14199,14 +14163,14 @@
       </p:sp>
       <p:sp>
         <p:nvSpPr>
-          <p:cNvPr id="229" name="Shape 14"/>
+          <p:cNvPr id="228" name="Shape 14"/>
           <p:cNvSpPr/>
           <p:nvPr/>
         </p:nvSpPr>
         <p:spPr>
           <a:xfrm>
             <a:off x="4681800" y="2231280"/>
-            <a:ext cx="420120" cy="420120"/>
+            <a:ext cx="419760" cy="419760"/>
           </a:xfrm>
           <a:prstGeom prst="ellipse">
             <a:avLst/>
@@ -14227,14 +14191,14 @@
       </p:sp>
       <p:sp>
         <p:nvSpPr>
-          <p:cNvPr id="230" name="Text 15"/>
+          <p:cNvPr id="229" name="Text 15"/>
           <p:cNvSpPr/>
           <p:nvPr/>
         </p:nvSpPr>
         <p:spPr>
           <a:xfrm>
             <a:off x="4681800" y="2231280"/>
-            <a:ext cx="420120" cy="420120"/>
+            <a:ext cx="419760" cy="419760"/>
           </a:xfrm>
           <a:prstGeom prst="rect">
             <a:avLst/>
@@ -14270,6 +14234,7 @@
                   <a:srgbClr val="ffffff"/>
                 </a:solidFill>
                 <a:latin typeface="Calibri"/>
+                <a:ea typeface="DejaVu Sans"/>
               </a:rPr>
               <a:t>2</a:t>
             </a:r>
@@ -14281,14 +14246,14 @@
       </p:sp>
       <p:sp>
         <p:nvSpPr>
-          <p:cNvPr id="231" name="Shape 16"/>
+          <p:cNvPr id="230" name="Shape 16"/>
           <p:cNvSpPr/>
           <p:nvPr/>
         </p:nvSpPr>
         <p:spPr>
           <a:xfrm>
             <a:off x="5193720" y="2249280"/>
-            <a:ext cx="3492720" cy="383760"/>
+            <a:ext cx="3492360" cy="383400"/>
           </a:xfrm>
           <a:prstGeom prst="rect">
             <a:avLst/>
@@ -14311,14 +14276,14 @@
       </p:sp>
       <p:sp>
         <p:nvSpPr>
-          <p:cNvPr id="232" name="Text 17"/>
+          <p:cNvPr id="231" name="Text 17"/>
           <p:cNvSpPr/>
           <p:nvPr/>
         </p:nvSpPr>
         <p:spPr>
           <a:xfrm>
             <a:off x="5285160" y="2249280"/>
-            <a:ext cx="3337200" cy="383760"/>
+            <a:ext cx="3336840" cy="383400"/>
           </a:xfrm>
           <a:prstGeom prst="rect">
             <a:avLst/>
@@ -14354,6 +14319,7 @@
                   <a:srgbClr val="1e293b"/>
                 </a:solidFill>
                 <a:latin typeface="Calibri"/>
+                <a:ea typeface="DejaVu Sans"/>
               </a:rPr>
               <a:t>Types query in text box</a:t>
             </a:r>
@@ -14365,14 +14331,14 @@
       </p:sp>
       <p:sp>
         <p:nvSpPr>
-          <p:cNvPr id="233" name="Shape 18"/>
+          <p:cNvPr id="232" name="Shape 18"/>
           <p:cNvSpPr/>
           <p:nvPr/>
         </p:nvSpPr>
         <p:spPr>
           <a:xfrm>
             <a:off x="4873680" y="2651760"/>
-            <a:ext cx="36360" cy="182520"/>
+            <a:ext cx="36000" cy="182160"/>
           </a:xfrm>
           <a:prstGeom prst="rect">
             <a:avLst/>
@@ -14393,14 +14359,14 @@
       </p:sp>
       <p:sp>
         <p:nvSpPr>
-          <p:cNvPr id="234" name="Shape 19"/>
+          <p:cNvPr id="233" name="Shape 19"/>
           <p:cNvSpPr/>
           <p:nvPr/>
         </p:nvSpPr>
         <p:spPr>
           <a:xfrm>
             <a:off x="4681800" y="2853000"/>
-            <a:ext cx="420120" cy="420120"/>
+            <a:ext cx="419760" cy="419760"/>
           </a:xfrm>
           <a:prstGeom prst="ellipse">
             <a:avLst/>
@@ -14421,14 +14387,14 @@
       </p:sp>
       <p:sp>
         <p:nvSpPr>
-          <p:cNvPr id="235" name="Text 20"/>
+          <p:cNvPr id="234" name="Text 20"/>
           <p:cNvSpPr/>
           <p:nvPr/>
         </p:nvSpPr>
         <p:spPr>
           <a:xfrm>
             <a:off x="4681800" y="2853000"/>
-            <a:ext cx="420120" cy="420120"/>
+            <a:ext cx="419760" cy="419760"/>
           </a:xfrm>
           <a:prstGeom prst="rect">
             <a:avLst/>
@@ -14464,6 +14430,7 @@
                   <a:srgbClr val="ffffff"/>
                 </a:solidFill>
                 <a:latin typeface="Calibri"/>
+                <a:ea typeface="DejaVu Sans"/>
               </a:rPr>
               <a:t>3</a:t>
             </a:r>
@@ -14475,14 +14442,14 @@
       </p:sp>
       <p:sp>
         <p:nvSpPr>
-          <p:cNvPr id="236" name="Shape 21"/>
+          <p:cNvPr id="235" name="Shape 21"/>
           <p:cNvSpPr/>
           <p:nvPr/>
         </p:nvSpPr>
         <p:spPr>
           <a:xfrm>
             <a:off x="5193720" y="2871360"/>
-            <a:ext cx="3492720" cy="383760"/>
+            <a:ext cx="3492360" cy="383400"/>
           </a:xfrm>
           <a:prstGeom prst="rect">
             <a:avLst/>
@@ -14505,14 +14472,14 @@
       </p:sp>
       <p:sp>
         <p:nvSpPr>
-          <p:cNvPr id="237" name="Text 22"/>
+          <p:cNvPr id="236" name="Text 22"/>
           <p:cNvSpPr/>
           <p:nvPr/>
         </p:nvSpPr>
         <p:spPr>
           <a:xfrm>
             <a:off x="5285160" y="2871360"/>
-            <a:ext cx="3337200" cy="383760"/>
+            <a:ext cx="3336840" cy="383400"/>
           </a:xfrm>
           <a:prstGeom prst="rect">
             <a:avLst/>
@@ -14548,8 +14515,9 @@
                   <a:srgbClr val="1e293b"/>
                 </a:solidFill>
                 <a:latin typeface="Calibri"/>
-              </a:rPr>
-              <a:t>Clicks 'Summarise' button</a:t>
+                <a:ea typeface="DejaVu Sans"/>
+              </a:rPr>
+              <a:t>Clicks 'Generate response' button</a:t>
             </a:r>
             <a:endParaRPr b="0" lang="en-IN" sz="1200" spc="-1" strike="noStrike">
               <a:latin typeface="Arial"/>
@@ -14559,14 +14527,14 @@
       </p:sp>
       <p:sp>
         <p:nvSpPr>
-          <p:cNvPr id="238" name="Shape 23"/>
+          <p:cNvPr id="237" name="Shape 23"/>
           <p:cNvSpPr/>
           <p:nvPr/>
         </p:nvSpPr>
         <p:spPr>
           <a:xfrm>
             <a:off x="4873680" y="3273480"/>
-            <a:ext cx="36360" cy="182520"/>
+            <a:ext cx="36000" cy="182160"/>
           </a:xfrm>
           <a:prstGeom prst="rect">
             <a:avLst/>
@@ -14587,14 +14555,14 @@
       </p:sp>
       <p:sp>
         <p:nvSpPr>
-          <p:cNvPr id="239" name="Shape 24"/>
+          <p:cNvPr id="238" name="Shape 24"/>
           <p:cNvSpPr/>
           <p:nvPr/>
         </p:nvSpPr>
         <p:spPr>
           <a:xfrm>
             <a:off x="4681800" y="3474720"/>
-            <a:ext cx="420120" cy="420120"/>
+            <a:ext cx="419760" cy="419760"/>
           </a:xfrm>
           <a:prstGeom prst="ellipse">
             <a:avLst/>
@@ -14615,14 +14583,14 @@
       </p:sp>
       <p:sp>
         <p:nvSpPr>
-          <p:cNvPr id="240" name="Text 25"/>
+          <p:cNvPr id="239" name="Text 25"/>
           <p:cNvSpPr/>
           <p:nvPr/>
         </p:nvSpPr>
         <p:spPr>
           <a:xfrm>
             <a:off x="4681800" y="3474720"/>
-            <a:ext cx="420120" cy="420120"/>
+            <a:ext cx="419760" cy="419760"/>
           </a:xfrm>
           <a:prstGeom prst="rect">
             <a:avLst/>
@@ -14658,6 +14626,7 @@
                   <a:srgbClr val="ffffff"/>
                 </a:solidFill>
                 <a:latin typeface="Calibri"/>
+                <a:ea typeface="DejaVu Sans"/>
               </a:rPr>
               <a:t>4</a:t>
             </a:r>
@@ -14669,14 +14638,14 @@
       </p:sp>
       <p:sp>
         <p:nvSpPr>
-          <p:cNvPr id="241" name="Shape 26"/>
+          <p:cNvPr id="240" name="Shape 26"/>
           <p:cNvSpPr/>
           <p:nvPr/>
         </p:nvSpPr>
         <p:spPr>
           <a:xfrm>
             <a:off x="5193720" y="3493080"/>
-            <a:ext cx="3492720" cy="383760"/>
+            <a:ext cx="3492360" cy="383400"/>
           </a:xfrm>
           <a:prstGeom prst="rect">
             <a:avLst/>
@@ -14699,14 +14668,14 @@
       </p:sp>
       <p:sp>
         <p:nvSpPr>
-          <p:cNvPr id="242" name="Text 27"/>
+          <p:cNvPr id="241" name="Text 27"/>
           <p:cNvSpPr/>
           <p:nvPr/>
         </p:nvSpPr>
         <p:spPr>
           <a:xfrm>
             <a:off x="5285160" y="3493080"/>
-            <a:ext cx="3337200" cy="383760"/>
+            <a:ext cx="3336840" cy="383400"/>
           </a:xfrm>
           <a:prstGeom prst="rect">
             <a:avLst/>
@@ -14742,6 +14711,7 @@
                   <a:srgbClr val="1e293b"/>
                 </a:solidFill>
                 <a:latin typeface="Calibri"/>
+                <a:ea typeface="DejaVu Sans"/>
               </a:rPr>
               <a:t>App sends prompt to LLM</a:t>
             </a:r>
@@ -14753,14 +14723,14 @@
       </p:sp>
       <p:sp>
         <p:nvSpPr>
-          <p:cNvPr id="243" name="Shape 28"/>
+          <p:cNvPr id="242" name="Shape 28"/>
           <p:cNvSpPr/>
           <p:nvPr/>
         </p:nvSpPr>
         <p:spPr>
           <a:xfrm>
             <a:off x="4873680" y="3895200"/>
-            <a:ext cx="36360" cy="182520"/>
+            <a:ext cx="36000" cy="182160"/>
           </a:xfrm>
           <a:prstGeom prst="rect">
             <a:avLst/>
@@ -14781,14 +14751,14 @@
       </p:sp>
       <p:sp>
         <p:nvSpPr>
-          <p:cNvPr id="244" name="Shape 29"/>
+          <p:cNvPr id="243" name="Shape 29"/>
           <p:cNvSpPr/>
           <p:nvPr/>
         </p:nvSpPr>
         <p:spPr>
           <a:xfrm>
             <a:off x="4681800" y="4096440"/>
-            <a:ext cx="420120" cy="420120"/>
+            <a:ext cx="419760" cy="419760"/>
           </a:xfrm>
           <a:prstGeom prst="ellipse">
             <a:avLst/>
@@ -14809,14 +14779,14 @@
       </p:sp>
       <p:sp>
         <p:nvSpPr>
-          <p:cNvPr id="245" name="Text 30"/>
+          <p:cNvPr id="244" name="Text 30"/>
           <p:cNvSpPr/>
           <p:nvPr/>
         </p:nvSpPr>
         <p:spPr>
           <a:xfrm>
             <a:off x="4681800" y="4096440"/>
-            <a:ext cx="420120" cy="420120"/>
+            <a:ext cx="419760" cy="419760"/>
           </a:xfrm>
           <a:prstGeom prst="rect">
             <a:avLst/>
@@ -14852,6 +14822,7 @@
                   <a:srgbClr val="ffffff"/>
                 </a:solidFill>
                 <a:latin typeface="Calibri"/>
+                <a:ea typeface="DejaVu Sans"/>
               </a:rPr>
               <a:t>5</a:t>
             </a:r>
@@ -14863,14 +14834,14 @@
       </p:sp>
       <p:sp>
         <p:nvSpPr>
-          <p:cNvPr id="246" name="Shape 31"/>
+          <p:cNvPr id="245" name="Shape 31"/>
           <p:cNvSpPr/>
           <p:nvPr/>
         </p:nvSpPr>
         <p:spPr>
           <a:xfrm>
             <a:off x="5193720" y="4114800"/>
-            <a:ext cx="3492720" cy="383760"/>
+            <a:ext cx="3492360" cy="383400"/>
           </a:xfrm>
           <a:prstGeom prst="rect">
             <a:avLst/>
@@ -14893,14 +14864,14 @@
       </p:sp>
       <p:sp>
         <p:nvSpPr>
-          <p:cNvPr id="247" name="Text 32"/>
+          <p:cNvPr id="246" name="Text 32"/>
           <p:cNvSpPr/>
           <p:nvPr/>
         </p:nvSpPr>
         <p:spPr>
           <a:xfrm>
             <a:off x="5285160" y="4114800"/>
-            <a:ext cx="3337200" cy="383760"/>
+            <a:ext cx="3336840" cy="383400"/>
           </a:xfrm>
           <a:prstGeom prst="rect">
             <a:avLst/>
@@ -14936,6 +14907,7 @@
                   <a:srgbClr val="1e293b"/>
                 </a:solidFill>
                 <a:latin typeface="Calibri"/>
+                <a:ea typeface="DejaVu Sans"/>
               </a:rPr>
               <a:t>LLM response shown on page</a:t>
             </a:r>
@@ -14984,14 +14956,14 @@
       </p:grpSpPr>
       <p:sp>
         <p:nvSpPr>
-          <p:cNvPr id="248" name="Shape 0"/>
+          <p:cNvPr id="247" name="Shape 0"/>
           <p:cNvSpPr/>
           <p:nvPr/>
         </p:nvSpPr>
         <p:spPr>
           <a:xfrm>
             <a:off x="0" y="0"/>
-            <a:ext cx="9143640" cy="822600"/>
+            <a:ext cx="9143280" cy="822240"/>
           </a:xfrm>
           <a:prstGeom prst="rect">
             <a:avLst/>
@@ -15012,14 +14984,14 @@
       </p:sp>
       <p:sp>
         <p:nvSpPr>
-          <p:cNvPr id="249" name="Text 1"/>
+          <p:cNvPr id="248" name="Text 1"/>
           <p:cNvSpPr/>
           <p:nvPr/>
         </p:nvSpPr>
         <p:spPr>
           <a:xfrm>
             <a:off x="411480" y="0"/>
-            <a:ext cx="8320680" cy="822600"/>
+            <a:ext cx="8320320" cy="822240"/>
           </a:xfrm>
           <a:prstGeom prst="rect">
             <a:avLst/>
@@ -15055,6 +15027,7 @@
                   <a:srgbClr val="ffffff"/>
                 </a:solidFill>
                 <a:latin typeface="Calibri"/>
+                <a:ea typeface="DejaVu Sans"/>
               </a:rPr>
               <a:t>Building the Research Assistant UI — Code</a:t>
             </a:r>
@@ -15066,14 +15039,14 @@
       </p:sp>
       <p:sp>
         <p:nvSpPr>
-          <p:cNvPr id="250" name="Shape 2"/>
+          <p:cNvPr id="249" name="Shape 2"/>
           <p:cNvSpPr/>
           <p:nvPr/>
         </p:nvSpPr>
         <p:spPr>
           <a:xfrm>
             <a:off x="320040" y="932760"/>
-            <a:ext cx="5321520" cy="3858480"/>
+            <a:ext cx="5321160" cy="3858120"/>
           </a:xfrm>
           <a:prstGeom prst="rect">
             <a:avLst/>
@@ -15101,14 +15074,14 @@
       </p:sp>
       <p:sp>
         <p:nvSpPr>
-          <p:cNvPr id="251" name="Shape 3"/>
+          <p:cNvPr id="250" name="Shape 3"/>
           <p:cNvSpPr/>
           <p:nvPr/>
         </p:nvSpPr>
         <p:spPr>
           <a:xfrm>
             <a:off x="320040" y="932760"/>
-            <a:ext cx="5321520" cy="319680"/>
+            <a:ext cx="5321160" cy="319320"/>
           </a:xfrm>
           <a:prstGeom prst="rect">
             <a:avLst/>
@@ -15129,14 +15102,14 @@
       </p:sp>
       <p:sp>
         <p:nvSpPr>
-          <p:cNvPr id="252" name="Text 4"/>
+          <p:cNvPr id="251" name="Text 4"/>
           <p:cNvSpPr/>
           <p:nvPr/>
         </p:nvSpPr>
         <p:spPr>
           <a:xfrm>
             <a:off x="457200" y="932760"/>
-            <a:ext cx="3200040" cy="319680"/>
+            <a:ext cx="3199680" cy="319320"/>
           </a:xfrm>
           <a:prstGeom prst="rect">
             <a:avLst/>
@@ -15172,6 +15145,7 @@
                   <a:srgbClr val="7dd3fc"/>
                 </a:solidFill>
                 <a:latin typeface="Calibri"/>
+                <a:ea typeface="DejaVu Sans"/>
               </a:rPr>
               <a:t>content_assistant.py</a:t>
             </a:r>
@@ -15183,14 +15157,14 @@
       </p:sp>
       <p:sp>
         <p:nvSpPr>
-          <p:cNvPr id="253" name="Text 5"/>
+          <p:cNvPr id="252" name="Text 5"/>
           <p:cNvSpPr/>
           <p:nvPr/>
         </p:nvSpPr>
         <p:spPr>
           <a:xfrm>
             <a:off x="457200" y="1316880"/>
-            <a:ext cx="5120280" cy="3401280"/>
+            <a:ext cx="5119920" cy="3400920"/>
           </a:xfrm>
           <a:prstGeom prst="rect">
             <a:avLst/>
@@ -15211,6 +15185,12 @@
             <a:noAutofit/>
           </a:bodyPr>
           <a:p>
+            <a:pPr>
+              <a:lnSpc>
+                <a:spcPct val="100000"/>
+              </a:lnSpc>
+              <a:buNone/>
+            </a:pPr>
             <a:r>
               <a:rPr b="0" lang="en-US" sz="1000" spc="-1" strike="noStrike">
                 <a:solidFill>
@@ -15226,6 +15206,12 @@
             </a:endParaRPr>
           </a:p>
           <a:p>
+            <a:pPr>
+              <a:lnSpc>
+                <a:spcPct val="100000"/>
+              </a:lnSpc>
+              <a:buNone/>
+            </a:pPr>
             <a:r>
               <a:rPr b="0" lang="en-US" sz="1000" spc="-1" strike="noStrike">
                 <a:solidFill>
@@ -15241,6 +15227,12 @@
             </a:endParaRPr>
           </a:p>
           <a:p>
+            <a:pPr>
+              <a:lnSpc>
+                <a:spcPct val="100000"/>
+              </a:lnSpc>
+              <a:buNone/>
+            </a:pPr>
             <a:r>
               <a:rPr b="0" lang="en-US" sz="1000" spc="-1" strike="noStrike">
                 <a:solidFill>
@@ -15256,11 +15248,23 @@
             </a:endParaRPr>
           </a:p>
           <a:p>
+            <a:pPr>
+              <a:lnSpc>
+                <a:spcPct val="100000"/>
+              </a:lnSpc>
+              <a:buNone/>
+            </a:pPr>
             <a:endParaRPr b="0" lang="en-IN" sz="1000" spc="-1" strike="noStrike">
               <a:latin typeface="Arial"/>
             </a:endParaRPr>
           </a:p>
           <a:p>
+            <a:pPr>
+              <a:lnSpc>
+                <a:spcPct val="100000"/>
+              </a:lnSpc>
+              <a:buNone/>
+            </a:pPr>
             <a:r>
               <a:rPr b="0" lang="en-US" sz="1000" spc="-1" strike="noStrike">
                 <a:solidFill>
@@ -15276,6 +15280,12 @@
             </a:endParaRPr>
           </a:p>
           <a:p>
+            <a:pPr>
+              <a:lnSpc>
+                <a:spcPct val="100000"/>
+              </a:lnSpc>
+              <a:buNone/>
+            </a:pPr>
             <a:r>
               <a:rPr b="0" lang="en-US" sz="1000" spc="-1" strike="noStrike">
                 <a:solidFill>
@@ -15291,11 +15301,23 @@
             </a:endParaRPr>
           </a:p>
           <a:p>
+            <a:pPr>
+              <a:lnSpc>
+                <a:spcPct val="100000"/>
+              </a:lnSpc>
+              <a:buNone/>
+            </a:pPr>
             <a:endParaRPr b="0" lang="en-IN" sz="1000" spc="-1" strike="noStrike">
               <a:latin typeface="Arial"/>
             </a:endParaRPr>
           </a:p>
           <a:p>
+            <a:pPr>
+              <a:lnSpc>
+                <a:spcPct val="100000"/>
+              </a:lnSpc>
+              <a:buNone/>
+            </a:pPr>
             <a:r>
               <a:rPr b="0" lang="en-US" sz="1000" spc="-1" strike="noStrike">
                 <a:solidFill>
@@ -15311,6 +15333,12 @@
             </a:endParaRPr>
           </a:p>
           <a:p>
+            <a:pPr>
+              <a:lnSpc>
+                <a:spcPct val="100000"/>
+              </a:lnSpc>
+              <a:buNone/>
+            </a:pPr>
             <a:r>
               <a:rPr b="0" lang="en-US" sz="1000" spc="-1" strike="noStrike">
                 <a:solidFill>
@@ -15326,11 +15354,23 @@
             </a:endParaRPr>
           </a:p>
           <a:p>
+            <a:pPr>
+              <a:lnSpc>
+                <a:spcPct val="100000"/>
+              </a:lnSpc>
+              <a:buNone/>
+            </a:pPr>
             <a:endParaRPr b="0" lang="en-IN" sz="1000" spc="-1" strike="noStrike">
               <a:latin typeface="Arial"/>
             </a:endParaRPr>
           </a:p>
           <a:p>
+            <a:pPr>
+              <a:lnSpc>
+                <a:spcPct val="100000"/>
+              </a:lnSpc>
+              <a:buNone/>
+            </a:pPr>
             <a:r>
               <a:rPr b="0" lang="en-US" sz="1000" spc="-1" strike="noStrike">
                 <a:solidFill>
@@ -15346,6 +15386,12 @@
             </a:endParaRPr>
           </a:p>
           <a:p>
+            <a:pPr>
+              <a:lnSpc>
+                <a:spcPct val="100000"/>
+              </a:lnSpc>
+              <a:buNone/>
+            </a:pPr>
             <a:r>
               <a:rPr b="0" lang="en-US" sz="1000" spc="-1" strike="noStrike">
                 <a:solidFill>
@@ -15354,18 +15400,30 @@
                 <a:latin typeface="Consolas"/>
                 <a:ea typeface="Consolas"/>
               </a:rPr>
-              <a:t>ui.title("AI Content Assistant")</a:t>
+              <a:t>ui.title("AI Report Generator")</a:t>
             </a:r>
             <a:endParaRPr b="0" lang="en-IN" sz="1000" spc="-1" strike="noStrike">
               <a:latin typeface="Arial"/>
             </a:endParaRPr>
           </a:p>
           <a:p>
+            <a:pPr>
+              <a:lnSpc>
+                <a:spcPct val="100000"/>
+              </a:lnSpc>
+              <a:buNone/>
+            </a:pPr>
             <a:endParaRPr b="0" lang="en-IN" sz="1000" spc="-1" strike="noStrike">
               <a:latin typeface="Arial"/>
             </a:endParaRPr>
           </a:p>
           <a:p>
+            <a:pPr>
+              <a:lnSpc>
+                <a:spcPct val="100000"/>
+              </a:lnSpc>
+              <a:buNone/>
+            </a:pPr>
             <a:r>
               <a:rPr b="0" lang="en-US" sz="1000" spc="-1" strike="noStrike">
                 <a:solidFill>
@@ -15381,11 +15439,23 @@
             </a:endParaRPr>
           </a:p>
           <a:p>
+            <a:pPr>
+              <a:lnSpc>
+                <a:spcPct val="100000"/>
+              </a:lnSpc>
+              <a:buNone/>
+            </a:pPr>
             <a:endParaRPr b="0" lang="en-IN" sz="1000" spc="-1" strike="noStrike">
               <a:latin typeface="Arial"/>
             </a:endParaRPr>
           </a:p>
           <a:p>
+            <a:pPr>
+              <a:lnSpc>
+                <a:spcPct val="100000"/>
+              </a:lnSpc>
+              <a:buNone/>
+            </a:pPr>
             <a:r>
               <a:rPr b="0" lang="en-US" sz="1000" spc="-1" strike="noStrike">
                 <a:solidFill>
@@ -15401,6 +15471,12 @@
             </a:endParaRPr>
           </a:p>
           <a:p>
+            <a:pPr>
+              <a:lnSpc>
+                <a:spcPct val="100000"/>
+              </a:lnSpc>
+              <a:buNone/>
+            </a:pPr>
             <a:r>
               <a:rPr b="0" lang="en-US" sz="1000" spc="-1" strike="noStrike">
                 <a:solidFill>
@@ -15416,6 +15492,12 @@
             </a:endParaRPr>
           </a:p>
           <a:p>
+            <a:pPr>
+              <a:lnSpc>
+                <a:spcPct val="100000"/>
+              </a:lnSpc>
+              <a:buNone/>
+            </a:pPr>
             <a:r>
               <a:rPr b="0" lang="en-US" sz="1000" spc="-1" strike="noStrike">
                 <a:solidFill>
@@ -15441,6 +15523,12 @@
             </a:endParaRPr>
           </a:p>
           <a:p>
+            <a:pPr>
+              <a:lnSpc>
+                <a:spcPct val="100000"/>
+              </a:lnSpc>
+              <a:buNone/>
+            </a:pPr>
             <a:r>
               <a:rPr b="0" lang="en-US" sz="1000" spc="-1" strike="noStrike">
                 <a:solidFill>
@@ -15466,6 +15554,12 @@
             </a:endParaRPr>
           </a:p>
           <a:p>
+            <a:pPr>
+              <a:lnSpc>
+                <a:spcPct val="100000"/>
+              </a:lnSpc>
+              <a:buNone/>
+            </a:pPr>
             <a:r>
               <a:rPr b="0" lang="en-US" sz="1000" spc="-1" strike="noStrike">
                 <a:solidFill>
@@ -15491,6 +15585,12 @@
             </a:endParaRPr>
           </a:p>
           <a:p>
+            <a:pPr>
+              <a:lnSpc>
+                <a:spcPct val="100000"/>
+              </a:lnSpc>
+              <a:buNone/>
+            </a:pPr>
             <a:r>
               <a:rPr b="0" lang="en-US" sz="1000" spc="-1" strike="noStrike">
                 <a:solidFill>
@@ -15516,6 +15616,12 @@
             </a:endParaRPr>
           </a:p>
           <a:p>
+            <a:pPr>
+              <a:lnSpc>
+                <a:spcPct val="100000"/>
+              </a:lnSpc>
+              <a:buNone/>
+            </a:pPr>
             <a:r>
               <a:rPr b="0" lang="en-US" sz="1000" spc="-1" strike="noStrike">
                 <a:solidFill>
@@ -15544,14 +15650,14 @@
       </p:sp>
       <p:sp>
         <p:nvSpPr>
-          <p:cNvPr id="254" name="Shape 6"/>
+          <p:cNvPr id="253" name="Shape 6"/>
           <p:cNvSpPr/>
           <p:nvPr/>
         </p:nvSpPr>
         <p:spPr>
           <a:xfrm>
             <a:off x="5806440" y="932760"/>
-            <a:ext cx="3035520" cy="1718640"/>
+            <a:ext cx="3035160" cy="1718280"/>
           </a:xfrm>
           <a:prstGeom prst="rect">
             <a:avLst/>
@@ -15579,14 +15685,14 @@
       </p:sp>
       <p:sp>
         <p:nvSpPr>
-          <p:cNvPr id="255" name="Shape 7"/>
+          <p:cNvPr id="254" name="Shape 7"/>
           <p:cNvSpPr/>
           <p:nvPr/>
         </p:nvSpPr>
         <p:spPr>
           <a:xfrm>
             <a:off x="5806440" y="932760"/>
-            <a:ext cx="3035520" cy="383760"/>
+            <a:ext cx="3035160" cy="383400"/>
           </a:xfrm>
           <a:prstGeom prst="rect">
             <a:avLst/>
@@ -15607,14 +15713,14 @@
       </p:sp>
       <p:sp>
         <p:nvSpPr>
-          <p:cNvPr id="256" name="Text 8"/>
+          <p:cNvPr id="255" name="Text 8"/>
           <p:cNvSpPr/>
           <p:nvPr/>
         </p:nvSpPr>
         <p:spPr>
           <a:xfrm>
             <a:off x="5925240" y="932760"/>
-            <a:ext cx="2880000" cy="383760"/>
+            <a:ext cx="2879640" cy="383400"/>
           </a:xfrm>
           <a:prstGeom prst="rect">
             <a:avLst/>
@@ -15650,6 +15756,7 @@
                   <a:srgbClr val="ffffff"/>
                 </a:solidFill>
                 <a:latin typeface="Calibri"/>
+                <a:ea typeface="DejaVu Sans"/>
               </a:rPr>
               <a:t>⚠️  </a:t>
             </a:r>
@@ -15659,6 +15766,7 @@
                   <a:srgbClr val="ffffff"/>
                 </a:solidFill>
                 <a:latin typeface="Calibri"/>
+                <a:ea typeface="DejaVu Sans"/>
               </a:rPr>
               <a:t>The Problem</a:t>
             </a:r>
@@ -15670,14 +15778,14 @@
       </p:sp>
       <p:sp>
         <p:nvSpPr>
-          <p:cNvPr id="257" name="Text 9"/>
+          <p:cNvPr id="256" name="Text 9"/>
           <p:cNvSpPr/>
           <p:nvPr/>
         </p:nvSpPr>
         <p:spPr>
           <a:xfrm>
             <a:off x="5925240" y="1371600"/>
-            <a:ext cx="2852640" cy="1188360"/>
+            <a:ext cx="2852280" cy="1188000"/>
           </a:xfrm>
           <a:prstGeom prst="rect">
             <a:avLst/>
@@ -15713,6 +15821,7 @@
                   <a:srgbClr val="1e293b"/>
                 </a:solidFill>
                 <a:latin typeface="Calibri"/>
+                <a:ea typeface="DejaVu Sans"/>
               </a:rPr>
               <a:t>Users have full control of the prompt text — they can type anything! This causes:</a:t>
             </a:r>
@@ -15736,6 +15845,7 @@
                   <a:srgbClr val="1e293b"/>
                 </a:solidFill>
                 <a:latin typeface="Calibri"/>
+                <a:ea typeface="DejaVu Sans"/>
               </a:rPr>
               <a:t>• </a:t>
             </a:r>
@@ -15745,6 +15855,7 @@
                   <a:srgbClr val="1e293b"/>
                 </a:solidFill>
                 <a:latin typeface="Calibri"/>
+                <a:ea typeface="DejaVu Sans"/>
               </a:rPr>
               <a:t>Inconsistent output quality</a:t>
             </a:r>
@@ -15768,6 +15879,7 @@
                   <a:srgbClr val="1e293b"/>
                 </a:solidFill>
                 <a:latin typeface="Calibri"/>
+                <a:ea typeface="DejaVu Sans"/>
               </a:rPr>
               <a:t>• </a:t>
             </a:r>
@@ -15777,6 +15889,7 @@
                   <a:srgbClr val="1e293b"/>
                 </a:solidFill>
                 <a:latin typeface="Calibri"/>
+                <a:ea typeface="DejaVu Sans"/>
               </a:rPr>
               <a:t>Unpredictable response formats</a:t>
             </a:r>
@@ -15800,6 +15913,7 @@
                   <a:srgbClr val="1e293b"/>
                 </a:solidFill>
                 <a:latin typeface="Calibri"/>
+                <a:ea typeface="DejaVu Sans"/>
               </a:rPr>
               <a:t>• </a:t>
             </a:r>
@@ -15809,6 +15923,7 @@
                   <a:srgbClr val="1e293b"/>
                 </a:solidFill>
                 <a:latin typeface="Calibri"/>
+                <a:ea typeface="DejaVu Sans"/>
               </a:rPr>
               <a:t>Potential misuse or irrelevant queries</a:t>
             </a:r>
@@ -15820,14 +15935,14 @@
       </p:sp>
       <p:sp>
         <p:nvSpPr>
-          <p:cNvPr id="258" name="Shape 10"/>
+          <p:cNvPr id="257" name="Shape 10"/>
           <p:cNvSpPr/>
           <p:nvPr/>
         </p:nvSpPr>
         <p:spPr>
           <a:xfrm>
             <a:off x="5806440" y="2816280"/>
-            <a:ext cx="3035520" cy="1974600"/>
+            <a:ext cx="3035160" cy="1974240"/>
           </a:xfrm>
           <a:prstGeom prst="rect">
             <a:avLst/>
@@ -15855,14 +15970,14 @@
       </p:sp>
       <p:sp>
         <p:nvSpPr>
-          <p:cNvPr id="259" name="Shape 11"/>
+          <p:cNvPr id="258" name="Shape 11"/>
           <p:cNvSpPr/>
           <p:nvPr/>
         </p:nvSpPr>
         <p:spPr>
           <a:xfrm>
             <a:off x="5806440" y="2816280"/>
-            <a:ext cx="3035520" cy="383760"/>
+            <a:ext cx="3035160" cy="383400"/>
           </a:xfrm>
           <a:prstGeom prst="rect">
             <a:avLst/>
@@ -15883,14 +15998,14 @@
       </p:sp>
       <p:sp>
         <p:nvSpPr>
-          <p:cNvPr id="260" name="Text 12"/>
+          <p:cNvPr id="259" name="Text 12"/>
           <p:cNvSpPr/>
           <p:nvPr/>
         </p:nvSpPr>
         <p:spPr>
           <a:xfrm>
             <a:off x="5925240" y="2816280"/>
-            <a:ext cx="2880000" cy="383760"/>
+            <a:ext cx="2879640" cy="383400"/>
           </a:xfrm>
           <a:prstGeom prst="rect">
             <a:avLst/>
@@ -15926,6 +16041,7 @@
                   <a:srgbClr val="ffffff"/>
                 </a:solidFill>
                 <a:latin typeface="Calibri"/>
+                <a:ea typeface="DejaVu Sans"/>
               </a:rPr>
               <a:t>✅  </a:t>
             </a:r>
@@ -15935,6 +16051,7 @@
                   <a:srgbClr val="ffffff"/>
                 </a:solidFill>
                 <a:latin typeface="Calibri"/>
+                <a:ea typeface="DejaVu Sans"/>
               </a:rPr>
               <a:t>The Solution</a:t>
             </a:r>
@@ -15946,14 +16063,14 @@
       </p:sp>
       <p:sp>
         <p:nvSpPr>
-          <p:cNvPr id="261" name="Text 13"/>
+          <p:cNvPr id="260" name="Text 13"/>
           <p:cNvSpPr/>
           <p:nvPr/>
         </p:nvSpPr>
         <p:spPr>
           <a:xfrm>
             <a:off x="5925240" y="3255120"/>
-            <a:ext cx="2852640" cy="1444320"/>
+            <a:ext cx="2852280" cy="1443960"/>
           </a:xfrm>
           <a:prstGeom prst="rect">
             <a:avLst/>
@@ -15989,6 +16106,7 @@
                   <a:srgbClr val="1e293b"/>
                 </a:solidFill>
                 <a:latin typeface="Calibri"/>
+                <a:ea typeface="DejaVu Sans"/>
               </a:rPr>
               <a:t>Use Prompt Templates with controlled inputs!</a:t>
             </a:r>
@@ -16012,6 +16130,7 @@
                   <a:srgbClr val="1e293b"/>
                 </a:solidFill>
                 <a:latin typeface="Calibri"/>
+                <a:ea typeface="DejaVu Sans"/>
               </a:rPr>
               <a:t>• </a:t>
             </a:r>
@@ -16021,6 +16140,7 @@
                   <a:srgbClr val="1e293b"/>
                 </a:solidFill>
                 <a:latin typeface="Calibri"/>
+                <a:ea typeface="DejaVu Sans"/>
               </a:rPr>
               <a:t>Replace free text input with dropdowns</a:t>
             </a:r>
@@ -16044,6 +16164,7 @@
                   <a:srgbClr val="1e293b"/>
                 </a:solidFill>
                 <a:latin typeface="Calibri"/>
+                <a:ea typeface="DejaVu Sans"/>
               </a:rPr>
               <a:t>• </a:t>
             </a:r>
@@ -16053,6 +16174,7 @@
                   <a:srgbClr val="1e293b"/>
                 </a:solidFill>
                 <a:latin typeface="Calibri"/>
+                <a:ea typeface="DejaVu Sans"/>
               </a:rPr>
               <a:t>Users choose style, length, format</a:t>
             </a:r>
@@ -16076,6 +16198,7 @@
                   <a:srgbClr val="1e293b"/>
                 </a:solidFill>
                 <a:latin typeface="Calibri"/>
+                <a:ea typeface="DejaVu Sans"/>
               </a:rPr>
               <a:t>• </a:t>
             </a:r>
@@ -16085,6 +16208,7 @@
                   <a:srgbClr val="1e293b"/>
                 </a:solidFill>
                 <a:latin typeface="Calibri"/>
+                <a:ea typeface="DejaVu Sans"/>
               </a:rPr>
               <a:t>Developer controls prompt structure</a:t>
             </a:r>
@@ -16108,6 +16232,7 @@
                   <a:srgbClr val="1e293b"/>
                 </a:solidFill>
                 <a:latin typeface="Calibri"/>
+                <a:ea typeface="DejaVu Sans"/>
               </a:rPr>
               <a:t>• </a:t>
             </a:r>
@@ -16117,6 +16242,7 @@
                   <a:srgbClr val="1e293b"/>
                 </a:solidFill>
                 <a:latin typeface="Calibri"/>
+                <a:ea typeface="DejaVu Sans"/>
               </a:rPr>
               <a:t>Output quality becomes predictable</a:t>
             </a:r>
